--- a/skills/pptx-deck/examples/redmine-migration/redmine-migration.pptx
+++ b/skills/pptx-deck/examples/redmine-migration/redmine-migration.pptx
@@ -4650,52 +4650,734 @@
           <a:lstStyle/>
           <a:p>
             <a:r>
-              <a:t>現行サーバはOSとミドルウェアが保守切れで、脆弱性に対応できない状態にある</a:t>
-            </a:r>
-          </a:p>
-        </p:txBody>
-      </p:sp>
-      <p:sp>
-        <p:nvSpPr>
-          <p:cNvPr id="3" name="Content Placeholder 2"/>
-          <p:cNvSpPr>
-            <a:spLocks noGrp="1"/>
-          </p:cNvSpPr>
-          <p:nvPr>
-            <p:ph idx="1"/>
-          </p:nvPr>
+              <a:t>現行サーバはOSとミドルウェアが保守切れで、</a:t>
+            </a:r>
+          </a:p>
+          <a:p>
+            <a:r>
+              <a:t>脆弱性に対応できない状態にある</a:t>
+            </a:r>
+          </a:p>
+        </p:txBody>
+      </p:sp>
+      <p:sp>
+        <p:nvSpPr>
+          <p:cNvPr id="3" name="Component takeaway" descr="pptx-deck-generated"/>
+          <p:cNvSpPr/>
+          <p:nvPr/>
         </p:nvSpPr>
         <p:spPr>
           <a:xfrm>
-            <a:off x="457200" y="1600200"/>
-            <a:ext cx="11274552" cy="4525963"/>
+            <a:off x="457200" y="5660136"/>
+            <a:ext cx="11274552" cy="512064"/>
           </a:xfrm>
+          <a:prstGeom prst="roundRect">
+            <a:avLst/>
+          </a:prstGeom>
+          <a:solidFill>
+            <a:schemeClr val="accent1">
+              <a:lumMod val="15000"/>
+              <a:lumOff val="85000"/>
+            </a:schemeClr>
+          </a:solidFill>
+          <a:ln w="9525">
+            <a:solidFill>
+              <a:schemeClr val="lt1">
+                <a:lumMod val="85000"/>
+              </a:schemeClr>
+            </a:solidFill>
+          </a:ln>
         </p:spPr>
-        <p:txBody>
-          <a:bodyPr/>
+        <p:style>
+          <a:lnRef idx="1">
+            <a:schemeClr val="accent1"/>
+          </a:lnRef>
+          <a:fillRef idx="3">
+            <a:schemeClr val="accent1"/>
+          </a:fillRef>
+          <a:effectRef idx="2">
+            <a:schemeClr val="accent1"/>
+          </a:effectRef>
+          <a:fontRef idx="minor">
+            <a:schemeClr val="lt1"/>
+          </a:fontRef>
+        </p:style>
+        <p:txBody>
+          <a:bodyPr rtlCol="0" anchor="ctr"/>
           <a:lstStyle/>
           <a:p>
-            <a:r>
-              <a:t>CentOS 7 は2024年6月に保守終了</a:t>
-            </a:r>
-          </a:p>
-          <a:p>
-            <a:r>
-              <a:t>Ruby 2.7・MySQL 5.7 も保守終了</a:t>
-            </a:r>
-          </a:p>
-          <a:p>
-            <a:r>
-              <a:t>Redmine 4.2 系は更新対象外</a:t>
-            </a:r>
-          </a:p>
-          <a:p>
-            <a:r>
-              <a:t>利用者約300名・添付約120GB（想定値）</a:t>
-            </a:r>
-          </a:p>
-        </p:txBody>
-      </p:sp>
+            <a:pPr algn="ctr"/>
+          </a:p>
+        </p:txBody>
+      </p:sp>
+      <p:sp>
+        <p:nvSpPr>
+          <p:cNvPr id="4" name="Takeaway accent" descr="pptx-deck-generated"/>
+          <p:cNvSpPr/>
+          <p:nvPr/>
+        </p:nvSpPr>
+        <p:spPr>
+          <a:xfrm>
+            <a:off x="457200" y="5660136"/>
+            <a:ext cx="82296" cy="512064"/>
+          </a:xfrm>
+          <a:prstGeom prst="rect">
+            <a:avLst/>
+          </a:prstGeom>
+          <a:solidFill>
+            <a:schemeClr val="accent1"/>
+          </a:solidFill>
+        </p:spPr>
+        <p:style>
+          <a:lnRef idx="1">
+            <a:schemeClr val="accent1"/>
+          </a:lnRef>
+          <a:fillRef idx="3">
+            <a:schemeClr val="accent1"/>
+          </a:fillRef>
+          <a:effectRef idx="2">
+            <a:schemeClr val="accent1"/>
+          </a:effectRef>
+          <a:fontRef idx="minor">
+            <a:schemeClr val="lt1"/>
+          </a:fontRef>
+        </p:style>
+        <p:txBody>
+          <a:bodyPr rtlCol="0" anchor="ctr"/>
+          <a:lstStyle/>
+          <a:p>
+            <a:pPr algn="ctr"/>
+          </a:p>
+        </p:txBody>
+      </p:sp>
+      <p:sp>
+        <p:nvSpPr>
+          <p:cNvPr id="5" name="Takeaway text" descr="pptx-deck-generated"/>
+          <p:cNvSpPr txBox="1"/>
+          <p:nvPr/>
+        </p:nvSpPr>
+        <p:spPr>
+          <a:xfrm>
+            <a:off x="603504" y="5687568"/>
+            <a:ext cx="11073384" cy="457200"/>
+          </a:xfrm>
+          <a:prstGeom prst="rect">
+            <a:avLst/>
+          </a:prstGeom>
+          <a:noFill/>
+          <a:ln>
+            <a:noFill/>
+          </a:ln>
+        </p:spPr>
+        <p:txBody>
+          <a:bodyPr wrap="square" anchor="ctr" lIns="82296" rIns="82296" tIns="36576" bIns="36576">
+            <a:spAutoFit/>
+          </a:bodyPr>
+          <a:lstStyle/>
+          <a:p>
+            <a:pPr algn="l">
+              <a:lnSpc>
+                <a:spcPct val="100000"/>
+              </a:lnSpc>
+              <a:spcAft>
+                <a:spcPts val="0"/>
+              </a:spcAft>
+            </a:pPr>
+            <a:r>
+              <a:rPr sz="1200" b="1">
+                <a:solidFill>
+                  <a:schemeClr val="dk1"/>
+                </a:solidFill>
+                <a:latin typeface="Yu Gothic"/>
+                <a:ea typeface="Yu Gothic"/>
+              </a:rPr>
+              <a:t>利用者約300名・添付約120GB（想定値）が脆弱性にさらされたままになる</a:t>
+            </a:r>
+          </a:p>
+        </p:txBody>
+      </p:sp>
+      <p:grpSp>
+        <p:nvGrpSpPr>
+          <p:cNvPr id="6" name="Cards 1" descr="pptx-deck-generated"/>
+          <p:cNvGrpSpPr/>
+          <p:nvPr/>
+        </p:nvGrpSpPr>
+        <p:grpSpPr>
+          <a:xfrm>
+            <a:off x="457200" y="1554480"/>
+            <a:ext cx="3648456" cy="3995927"/>
+            <a:chOff x="0" y="0"/>
+            <a:chExt cx="3648456" cy="3995927"/>
+          </a:xfrm>
+        </p:grpSpPr>
+        <p:sp>
+          <p:nvSpPr>
+            <p:cNvPr id="7" name="Card 1 panel" descr="pptx-deck-generated"/>
+            <p:cNvSpPr/>
+            <p:nvPr/>
+          </p:nvSpPr>
+          <p:spPr>
+            <a:xfrm>
+              <a:off x="0" y="0"/>
+              <a:ext cx="3648456" cy="3995927"/>
+            </a:xfrm>
+            <a:prstGeom prst="roundRect">
+              <a:avLst/>
+            </a:prstGeom>
+            <a:solidFill>
+              <a:schemeClr val="lt1"/>
+            </a:solidFill>
+            <a:ln w="9525">
+              <a:solidFill>
+                <a:schemeClr val="lt1">
+                  <a:lumMod val="85000"/>
+                </a:schemeClr>
+              </a:solidFill>
+            </a:ln>
+          </p:spPr>
+          <p:style>
+            <a:lnRef idx="1">
+              <a:schemeClr val="accent1"/>
+            </a:lnRef>
+            <a:fillRef idx="3">
+              <a:schemeClr val="accent1"/>
+            </a:fillRef>
+            <a:effectRef idx="2">
+              <a:schemeClr val="accent1"/>
+            </a:effectRef>
+            <a:fontRef idx="minor">
+              <a:schemeClr val="lt1"/>
+            </a:fontRef>
+          </p:style>
+          <p:txBody>
+            <a:bodyPr rtlCol="0" anchor="ctr"/>
+            <a:lstStyle/>
+            <a:p>
+              <a:pPr algn="ctr"/>
+            </a:p>
+          </p:txBody>
+        </p:sp>
+        <p:sp>
+          <p:nvSpPr>
+            <p:cNvPr id="8" name="Card 1 accent" descr="pptx-deck-generated"/>
+            <p:cNvSpPr/>
+            <p:nvPr/>
+          </p:nvSpPr>
+          <p:spPr>
+            <a:xfrm>
+              <a:off x="0" y="0"/>
+              <a:ext cx="3648456" cy="73152"/>
+            </a:xfrm>
+            <a:prstGeom prst="rect">
+              <a:avLst/>
+            </a:prstGeom>
+            <a:solidFill>
+              <a:schemeClr val="accent1"/>
+            </a:solidFill>
+          </p:spPr>
+          <p:style>
+            <a:lnRef idx="1">
+              <a:schemeClr val="accent1"/>
+            </a:lnRef>
+            <a:fillRef idx="3">
+              <a:schemeClr val="accent1"/>
+            </a:fillRef>
+            <a:effectRef idx="2">
+              <a:schemeClr val="accent1"/>
+            </a:effectRef>
+            <a:fontRef idx="minor">
+              <a:schemeClr val="lt1"/>
+            </a:fontRef>
+          </p:style>
+          <p:txBody>
+            <a:bodyPr rtlCol="0" anchor="ctr"/>
+            <a:lstStyle/>
+            <a:p>
+              <a:pPr algn="ctr"/>
+            </a:p>
+          </p:txBody>
+        </p:sp>
+        <p:sp>
+          <p:nvSpPr>
+            <p:cNvPr id="9" name="Card 1 heading" descr="pptx-deck-generated"/>
+            <p:cNvSpPr txBox="1"/>
+            <p:nvPr/>
+          </p:nvSpPr>
+          <p:spPr>
+            <a:xfrm>
+              <a:off x="128016" y="137159"/>
+              <a:ext cx="3392424" cy="438912"/>
+            </a:xfrm>
+            <a:prstGeom prst="rect">
+              <a:avLst/>
+            </a:prstGeom>
+            <a:noFill/>
+            <a:ln>
+              <a:noFill/>
+            </a:ln>
+          </p:spPr>
+          <p:txBody>
+            <a:bodyPr wrap="square" anchor="ctr" lIns="82296" rIns="82296" tIns="36576" bIns="36576">
+              <a:spAutoFit/>
+            </a:bodyPr>
+            <a:lstStyle/>
+            <a:p>
+              <a:pPr algn="l">
+                <a:lnSpc>
+                  <a:spcPct val="100000"/>
+                </a:lnSpc>
+                <a:spcAft>
+                  <a:spcPts val="0"/>
+                </a:spcAft>
+              </a:pPr>
+              <a:r>
+                <a:rPr sz="1600" b="1">
+                  <a:solidFill>
+                    <a:schemeClr val="accent1"/>
+                  </a:solidFill>
+                  <a:latin typeface="Yu Gothic"/>
+                  <a:ea typeface="Yu Gothic"/>
+                </a:rPr>
+                <a:t>OS</a:t>
+              </a:r>
+            </a:p>
+          </p:txBody>
+        </p:sp>
+        <p:sp>
+          <p:nvSpPr>
+            <p:cNvPr id="10" name="Card 1 copy" descr="pptx-deck-generated"/>
+            <p:cNvSpPr txBox="1"/>
+            <p:nvPr/>
+          </p:nvSpPr>
+          <p:spPr>
+            <a:xfrm>
+              <a:off x="128016" y="640080"/>
+              <a:ext cx="3392424" cy="3246119"/>
+            </a:xfrm>
+            <a:prstGeom prst="rect">
+              <a:avLst/>
+            </a:prstGeom>
+            <a:noFill/>
+            <a:ln>
+              <a:noFill/>
+            </a:ln>
+          </p:spPr>
+          <p:txBody>
+            <a:bodyPr wrap="square" anchor="ctr" lIns="82296" rIns="82296" tIns="36576" bIns="36576">
+              <a:spAutoFit/>
+            </a:bodyPr>
+            <a:lstStyle/>
+            <a:p>
+              <a:pPr algn="l">
+                <a:lnSpc>
+                  <a:spcPct val="100000"/>
+                </a:lnSpc>
+                <a:spcAft>
+                  <a:spcPts val="0"/>
+                </a:spcAft>
+              </a:pPr>
+              <a:r>
+                <a:rPr sz="1200" b="0">
+                  <a:solidFill>
+                    <a:schemeClr val="dk1"/>
+                  </a:solidFill>
+                  <a:latin typeface="Yu Gothic"/>
+                  <a:ea typeface="Yu Gothic"/>
+                </a:rPr>
+                <a:t>• CentOS 7 / 2024年6月保守終了</a:t>
+              </a:r>
+            </a:p>
+          </p:txBody>
+        </p:sp>
+      </p:grpSp>
+      <p:grpSp>
+        <p:nvGrpSpPr>
+          <p:cNvPr id="11" name="Cards 2" descr="pptx-deck-generated"/>
+          <p:cNvGrpSpPr/>
+          <p:nvPr/>
+        </p:nvGrpSpPr>
+        <p:grpSpPr>
+          <a:xfrm>
+            <a:off x="4270248" y="1554480"/>
+            <a:ext cx="3648456" cy="3995927"/>
+            <a:chOff x="0" y="0"/>
+            <a:chExt cx="3648456" cy="3995927"/>
+          </a:xfrm>
+        </p:grpSpPr>
+        <p:sp>
+          <p:nvSpPr>
+            <p:cNvPr id="12" name="Card 2 panel" descr="pptx-deck-generated"/>
+            <p:cNvSpPr/>
+            <p:nvPr/>
+          </p:nvSpPr>
+          <p:spPr>
+            <a:xfrm>
+              <a:off x="0" y="0"/>
+              <a:ext cx="3648456" cy="3995927"/>
+            </a:xfrm>
+            <a:prstGeom prst="roundRect">
+              <a:avLst/>
+            </a:prstGeom>
+            <a:solidFill>
+              <a:schemeClr val="lt1"/>
+            </a:solidFill>
+            <a:ln w="9525">
+              <a:solidFill>
+                <a:schemeClr val="lt1">
+                  <a:lumMod val="85000"/>
+                </a:schemeClr>
+              </a:solidFill>
+            </a:ln>
+          </p:spPr>
+          <p:style>
+            <a:lnRef idx="1">
+              <a:schemeClr val="accent1"/>
+            </a:lnRef>
+            <a:fillRef idx="3">
+              <a:schemeClr val="accent1"/>
+            </a:fillRef>
+            <a:effectRef idx="2">
+              <a:schemeClr val="accent1"/>
+            </a:effectRef>
+            <a:fontRef idx="minor">
+              <a:schemeClr val="lt1"/>
+            </a:fontRef>
+          </p:style>
+          <p:txBody>
+            <a:bodyPr rtlCol="0" anchor="ctr"/>
+            <a:lstStyle/>
+            <a:p>
+              <a:pPr algn="ctr"/>
+            </a:p>
+          </p:txBody>
+        </p:sp>
+        <p:sp>
+          <p:nvSpPr>
+            <p:cNvPr id="13" name="Card 2 accent" descr="pptx-deck-generated"/>
+            <p:cNvSpPr/>
+            <p:nvPr/>
+          </p:nvSpPr>
+          <p:spPr>
+            <a:xfrm>
+              <a:off x="0" y="0"/>
+              <a:ext cx="3648456" cy="73152"/>
+            </a:xfrm>
+            <a:prstGeom prst="rect">
+              <a:avLst/>
+            </a:prstGeom>
+            <a:solidFill>
+              <a:schemeClr val="accent1"/>
+            </a:solidFill>
+          </p:spPr>
+          <p:style>
+            <a:lnRef idx="1">
+              <a:schemeClr val="accent1"/>
+            </a:lnRef>
+            <a:fillRef idx="3">
+              <a:schemeClr val="accent1"/>
+            </a:fillRef>
+            <a:effectRef idx="2">
+              <a:schemeClr val="accent1"/>
+            </a:effectRef>
+            <a:fontRef idx="minor">
+              <a:schemeClr val="lt1"/>
+            </a:fontRef>
+          </p:style>
+          <p:txBody>
+            <a:bodyPr rtlCol="0" anchor="ctr"/>
+            <a:lstStyle/>
+            <a:p>
+              <a:pPr algn="ctr"/>
+            </a:p>
+          </p:txBody>
+        </p:sp>
+        <p:sp>
+          <p:nvSpPr>
+            <p:cNvPr id="14" name="Card 2 heading" descr="pptx-deck-generated"/>
+            <p:cNvSpPr txBox="1"/>
+            <p:nvPr/>
+          </p:nvSpPr>
+          <p:spPr>
+            <a:xfrm>
+              <a:off x="128016" y="137159"/>
+              <a:ext cx="3392424" cy="438912"/>
+            </a:xfrm>
+            <a:prstGeom prst="rect">
+              <a:avLst/>
+            </a:prstGeom>
+            <a:noFill/>
+            <a:ln>
+              <a:noFill/>
+            </a:ln>
+          </p:spPr>
+          <p:txBody>
+            <a:bodyPr wrap="square" anchor="ctr" lIns="82296" rIns="82296" tIns="36576" bIns="36576">
+              <a:spAutoFit/>
+            </a:bodyPr>
+            <a:lstStyle/>
+            <a:p>
+              <a:pPr algn="l">
+                <a:lnSpc>
+                  <a:spcPct val="100000"/>
+                </a:lnSpc>
+                <a:spcAft>
+                  <a:spcPts val="0"/>
+                </a:spcAft>
+              </a:pPr>
+              <a:r>
+                <a:rPr sz="1600" b="1">
+                  <a:solidFill>
+                    <a:schemeClr val="accent1"/>
+                  </a:solidFill>
+                  <a:latin typeface="Yu Gothic"/>
+                  <a:ea typeface="Yu Gothic"/>
+                </a:rPr>
+                <a:t>ミドルウェア</a:t>
+              </a:r>
+            </a:p>
+          </p:txBody>
+        </p:sp>
+        <p:sp>
+          <p:nvSpPr>
+            <p:cNvPr id="15" name="Card 2 copy" descr="pptx-deck-generated"/>
+            <p:cNvSpPr txBox="1"/>
+            <p:nvPr/>
+          </p:nvSpPr>
+          <p:spPr>
+            <a:xfrm>
+              <a:off x="128016" y="640080"/>
+              <a:ext cx="3392424" cy="3246119"/>
+            </a:xfrm>
+            <a:prstGeom prst="rect">
+              <a:avLst/>
+            </a:prstGeom>
+            <a:noFill/>
+            <a:ln>
+              <a:noFill/>
+            </a:ln>
+          </p:spPr>
+          <p:txBody>
+            <a:bodyPr wrap="square" anchor="ctr" lIns="82296" rIns="82296" tIns="36576" bIns="36576">
+              <a:spAutoFit/>
+            </a:bodyPr>
+            <a:lstStyle/>
+            <a:p>
+              <a:pPr algn="l">
+                <a:lnSpc>
+                  <a:spcPct val="100000"/>
+                </a:lnSpc>
+                <a:spcAft>
+                  <a:spcPts val="0"/>
+                </a:spcAft>
+              </a:pPr>
+              <a:r>
+                <a:rPr sz="1200" b="0">
+                  <a:solidFill>
+                    <a:schemeClr val="dk1"/>
+                  </a:solidFill>
+                  <a:latin typeface="Yu Gothic"/>
+                  <a:ea typeface="Yu Gothic"/>
+                </a:rPr>
+                <a:t>• Ruby 2.7・MySQL 5.7 / 保守終了</a:t>
+              </a:r>
+            </a:p>
+          </p:txBody>
+        </p:sp>
+      </p:grpSp>
+      <p:grpSp>
+        <p:nvGrpSpPr>
+          <p:cNvPr id="16" name="Cards 3" descr="pptx-deck-generated"/>
+          <p:cNvGrpSpPr/>
+          <p:nvPr/>
+        </p:nvGrpSpPr>
+        <p:grpSpPr>
+          <a:xfrm>
+            <a:off x="8083296" y="1554480"/>
+            <a:ext cx="3648456" cy="3995927"/>
+            <a:chOff x="0" y="0"/>
+            <a:chExt cx="3648456" cy="3995927"/>
+          </a:xfrm>
+        </p:grpSpPr>
+        <p:sp>
+          <p:nvSpPr>
+            <p:cNvPr id="17" name="Card 3 panel" descr="pptx-deck-generated"/>
+            <p:cNvSpPr/>
+            <p:nvPr/>
+          </p:nvSpPr>
+          <p:spPr>
+            <a:xfrm>
+              <a:off x="0" y="0"/>
+              <a:ext cx="3648456" cy="3995927"/>
+            </a:xfrm>
+            <a:prstGeom prst="roundRect">
+              <a:avLst/>
+            </a:prstGeom>
+            <a:solidFill>
+              <a:schemeClr val="lt1"/>
+            </a:solidFill>
+            <a:ln w="9525">
+              <a:solidFill>
+                <a:schemeClr val="lt1">
+                  <a:lumMod val="85000"/>
+                </a:schemeClr>
+              </a:solidFill>
+            </a:ln>
+          </p:spPr>
+          <p:style>
+            <a:lnRef idx="1">
+              <a:schemeClr val="accent1"/>
+            </a:lnRef>
+            <a:fillRef idx="3">
+              <a:schemeClr val="accent1"/>
+            </a:fillRef>
+            <a:effectRef idx="2">
+              <a:schemeClr val="accent1"/>
+            </a:effectRef>
+            <a:fontRef idx="minor">
+              <a:schemeClr val="lt1"/>
+            </a:fontRef>
+          </p:style>
+          <p:txBody>
+            <a:bodyPr rtlCol="0" anchor="ctr"/>
+            <a:lstStyle/>
+            <a:p>
+              <a:pPr algn="ctr"/>
+            </a:p>
+          </p:txBody>
+        </p:sp>
+        <p:sp>
+          <p:nvSpPr>
+            <p:cNvPr id="18" name="Card 3 accent" descr="pptx-deck-generated"/>
+            <p:cNvSpPr/>
+            <p:nvPr/>
+          </p:nvSpPr>
+          <p:spPr>
+            <a:xfrm>
+              <a:off x="0" y="0"/>
+              <a:ext cx="3648456" cy="73152"/>
+            </a:xfrm>
+            <a:prstGeom prst="rect">
+              <a:avLst/>
+            </a:prstGeom>
+            <a:solidFill>
+              <a:schemeClr val="accent1"/>
+            </a:solidFill>
+          </p:spPr>
+          <p:style>
+            <a:lnRef idx="1">
+              <a:schemeClr val="accent1"/>
+            </a:lnRef>
+            <a:fillRef idx="3">
+              <a:schemeClr val="accent1"/>
+            </a:fillRef>
+            <a:effectRef idx="2">
+              <a:schemeClr val="accent1"/>
+            </a:effectRef>
+            <a:fontRef idx="minor">
+              <a:schemeClr val="lt1"/>
+            </a:fontRef>
+          </p:style>
+          <p:txBody>
+            <a:bodyPr rtlCol="0" anchor="ctr"/>
+            <a:lstStyle/>
+            <a:p>
+              <a:pPr algn="ctr"/>
+            </a:p>
+          </p:txBody>
+        </p:sp>
+        <p:sp>
+          <p:nvSpPr>
+            <p:cNvPr id="19" name="Card 3 heading" descr="pptx-deck-generated"/>
+            <p:cNvSpPr txBox="1"/>
+            <p:nvPr/>
+          </p:nvSpPr>
+          <p:spPr>
+            <a:xfrm>
+              <a:off x="128016" y="137159"/>
+              <a:ext cx="3392424" cy="438912"/>
+            </a:xfrm>
+            <a:prstGeom prst="rect">
+              <a:avLst/>
+            </a:prstGeom>
+            <a:noFill/>
+            <a:ln>
+              <a:noFill/>
+            </a:ln>
+          </p:spPr>
+          <p:txBody>
+            <a:bodyPr wrap="square" anchor="ctr" lIns="82296" rIns="82296" tIns="36576" bIns="36576">
+              <a:spAutoFit/>
+            </a:bodyPr>
+            <a:lstStyle/>
+            <a:p>
+              <a:pPr algn="l">
+                <a:lnSpc>
+                  <a:spcPct val="100000"/>
+                </a:lnSpc>
+                <a:spcAft>
+                  <a:spcPts val="0"/>
+                </a:spcAft>
+              </a:pPr>
+              <a:r>
+                <a:rPr sz="1600" b="1">
+                  <a:solidFill>
+                    <a:schemeClr val="accent1"/>
+                  </a:solidFill>
+                  <a:latin typeface="Yu Gothic"/>
+                  <a:ea typeface="Yu Gothic"/>
+                </a:rPr>
+                <a:t>アプリ</a:t>
+              </a:r>
+            </a:p>
+          </p:txBody>
+        </p:sp>
+        <p:sp>
+          <p:nvSpPr>
+            <p:cNvPr id="20" name="Card 3 copy" descr="pptx-deck-generated"/>
+            <p:cNvSpPr txBox="1"/>
+            <p:nvPr/>
+          </p:nvSpPr>
+          <p:spPr>
+            <a:xfrm>
+              <a:off x="128016" y="640080"/>
+              <a:ext cx="3392424" cy="3246119"/>
+            </a:xfrm>
+            <a:prstGeom prst="rect">
+              <a:avLst/>
+            </a:prstGeom>
+            <a:noFill/>
+            <a:ln>
+              <a:noFill/>
+            </a:ln>
+          </p:spPr>
+          <p:txBody>
+            <a:bodyPr wrap="square" anchor="ctr" lIns="82296" rIns="82296" tIns="36576" bIns="36576">
+              <a:spAutoFit/>
+            </a:bodyPr>
+            <a:lstStyle/>
+            <a:p>
+              <a:pPr algn="l">
+                <a:lnSpc>
+                  <a:spcPct val="100000"/>
+                </a:lnSpc>
+                <a:spcAft>
+                  <a:spcPts val="0"/>
+                </a:spcAft>
+              </a:pPr>
+              <a:r>
+                <a:rPr sz="1200" b="0">
+                  <a:solidFill>
+                    <a:schemeClr val="dk1"/>
+                  </a:solidFill>
+                  <a:latin typeface="Yu Gothic"/>
+                  <a:ea typeface="Yu Gothic"/>
+                </a:rPr>
+                <a:t>• Redmine 4.2 / 更新対象外</a:t>
+              </a:r>
+            </a:p>
+          </p:txBody>
+        </p:sp>
+      </p:grpSp>
     </p:spTree>
   </p:cSld>
   <p:clrMapOvr>
@@ -4716,318 +5398,525 @@
       <p:grpSpPr/>
       <p:sp>
         <p:nvSpPr>
-          <p:cNvPr id="2" name="Title"/>
-          <p:cNvSpPr txBox="1"/>
-          <p:nvPr/>
+          <p:cNvPr id="2" name="Title 1"/>
+          <p:cNvSpPr>
+            <a:spLocks noGrp="1"/>
+          </p:cNvSpPr>
+          <p:nvPr>
+            <p:ph type="title"/>
+          </p:nvPr>
         </p:nvSpPr>
         <p:spPr>
           <a:xfrm>
             <a:off x="457200" y="274320"/>
             <a:ext cx="11274552" cy="1051560"/>
           </a:xfrm>
-          <a:prstGeom prst="rect">
+        </p:spPr>
+        <p:txBody>
+          <a:bodyPr/>
+          <a:lstStyle/>
+          <a:p>
+            <a:r>
+              <a:t>OSとミドルウェアを保守期間内の版へそろえ、運用手順も標準化する</a:t>
+            </a:r>
+          </a:p>
+        </p:txBody>
+      </p:sp>
+      <p:grpSp>
+        <p:nvGrpSpPr>
+          <p:cNvPr id="3" name="Comparison 1" descr="pptx-deck-generated"/>
+          <p:cNvGrpSpPr/>
+          <p:nvPr/>
+        </p:nvGrpSpPr>
+        <p:grpSpPr>
+          <a:xfrm>
+            <a:off x="457200" y="1627632"/>
+            <a:ext cx="5308092" cy="4471416"/>
+            <a:chOff x="0" y="0"/>
+            <a:chExt cx="5308092" cy="4471416"/>
+          </a:xfrm>
+        </p:grpSpPr>
+        <p:sp>
+          <p:nvSpPr>
+            <p:cNvPr id="4" name="Comparison 1 panel" descr="pptx-deck-generated"/>
+            <p:cNvSpPr/>
+            <p:nvPr/>
+          </p:nvSpPr>
+          <p:spPr>
+            <a:xfrm>
+              <a:off x="0" y="0"/>
+              <a:ext cx="5308092" cy="4471416"/>
+            </a:xfrm>
+            <a:prstGeom prst="roundRect">
+              <a:avLst/>
+            </a:prstGeom>
+            <a:solidFill>
+              <a:schemeClr val="dk1">
+                <a:lumMod val="65000"/>
+                <a:lumOff val="35000"/>
+                <a:lumMod val="15000"/>
+                <a:lumOff val="85000"/>
+              </a:schemeClr>
+            </a:solidFill>
+            <a:ln w="9525">
+              <a:solidFill>
+                <a:schemeClr val="lt1">
+                  <a:lumMod val="85000"/>
+                </a:schemeClr>
+              </a:solidFill>
+            </a:ln>
+          </p:spPr>
+          <p:style>
+            <a:lnRef idx="1">
+              <a:schemeClr val="accent1"/>
+            </a:lnRef>
+            <a:fillRef idx="3">
+              <a:schemeClr val="accent1"/>
+            </a:fillRef>
+            <a:effectRef idx="2">
+              <a:schemeClr val="accent1"/>
+            </a:effectRef>
+            <a:fontRef idx="minor">
+              <a:schemeClr val="lt1"/>
+            </a:fontRef>
+          </p:style>
+          <p:txBody>
+            <a:bodyPr rtlCol="0" anchor="ctr"/>
+            <a:lstStyle/>
+            <a:p>
+              <a:pPr algn="ctr"/>
+            </a:p>
+          </p:txBody>
+        </p:sp>
+        <p:sp>
+          <p:nvSpPr>
+            <p:cNvPr id="5" name="Comparison 1 heading" descr="pptx-deck-generated"/>
+            <p:cNvSpPr/>
+            <p:nvPr/>
+          </p:nvSpPr>
+          <p:spPr>
+            <a:xfrm>
+              <a:off x="0" y="0"/>
+              <a:ext cx="5308092" cy="603504"/>
+            </a:xfrm>
+            <a:prstGeom prst="roundRect">
+              <a:avLst/>
+            </a:prstGeom>
+            <a:solidFill>
+              <a:schemeClr val="accent1"/>
+            </a:solidFill>
+          </p:spPr>
+          <p:style>
+            <a:lnRef idx="1">
+              <a:schemeClr val="accent1"/>
+            </a:lnRef>
+            <a:fillRef idx="3">
+              <a:schemeClr val="accent1"/>
+            </a:fillRef>
+            <a:effectRef idx="2">
+              <a:schemeClr val="accent1"/>
+            </a:effectRef>
+            <a:fontRef idx="minor">
+              <a:schemeClr val="lt1"/>
+            </a:fontRef>
+          </p:style>
+          <p:txBody>
+            <a:bodyPr rtlCol="0" anchor="ctr" wrap="square" lIns="82296" rIns="82296" tIns="36576" bIns="36576"/>
+            <a:lstStyle/>
+            <a:p>
+              <a:pPr algn="l">
+                <a:lnSpc>
+                  <a:spcPct val="100000"/>
+                </a:lnSpc>
+                <a:spcAft>
+                  <a:spcPts val="0"/>
+                </a:spcAft>
+              </a:pPr>
+              <a:r>
+                <a:rPr sz="1600" b="1">
+                  <a:solidFill>
+                    <a:schemeClr val="lt1"/>
+                  </a:solidFill>
+                  <a:latin typeface="Yu Gothic"/>
+                  <a:ea typeface="Yu Gothic"/>
+                </a:rPr>
+                <a:t>現行</a:t>
+              </a:r>
+            </a:p>
+          </p:txBody>
+        </p:sp>
+        <p:sp>
+          <p:nvSpPr>
+            <p:cNvPr id="6" name="Comparison 1 items" descr="pptx-deck-generated"/>
+            <p:cNvSpPr txBox="1"/>
+            <p:nvPr/>
+          </p:nvSpPr>
+          <p:spPr>
+            <a:xfrm>
+              <a:off x="155448" y="731520"/>
+              <a:ext cx="4997196" cy="3685031"/>
+            </a:xfrm>
+            <a:prstGeom prst="rect">
+              <a:avLst/>
+            </a:prstGeom>
+            <a:noFill/>
+            <a:ln>
+              <a:noFill/>
+            </a:ln>
+          </p:spPr>
+          <p:txBody>
+            <a:bodyPr wrap="square" anchor="ctr" lIns="82296" rIns="82296" tIns="36576" bIns="36576">
+              <a:spAutoFit/>
+            </a:bodyPr>
+            <a:lstStyle/>
+            <a:p>
+              <a:pPr algn="l">
+                <a:lnSpc>
+                  <a:spcPct val="100000"/>
+                </a:lnSpc>
+                <a:spcAft>
+                  <a:spcPts val="0"/>
+                </a:spcAft>
+              </a:pPr>
+              <a:r>
+                <a:rPr sz="1200" b="0">
+                  <a:solidFill>
+                    <a:schemeClr val="dk1"/>
+                  </a:solidFill>
+                  <a:latin typeface="Yu Gothic"/>
+                  <a:ea typeface="Yu Gothic"/>
+                </a:rPr>
+                <a:t>• CentOS 7</a:t>
+              </a:r>
+            </a:p>
+            <a:p>
+              <a:pPr algn="l">
+                <a:lnSpc>
+                  <a:spcPct val="100000"/>
+                </a:lnSpc>
+                <a:spcAft>
+                  <a:spcPts val="0"/>
+                </a:spcAft>
+              </a:pPr>
+              <a:r>
+                <a:rPr sz="1200" b="0">
+                  <a:solidFill>
+                    <a:schemeClr val="dk1"/>
+                  </a:solidFill>
+                  <a:latin typeface="Yu Gothic"/>
+                  <a:ea typeface="Yu Gothic"/>
+                </a:rPr>
+                <a:t>• Redmine 4.2</a:t>
+              </a:r>
+            </a:p>
+            <a:p>
+              <a:pPr algn="l">
+                <a:lnSpc>
+                  <a:spcPct val="100000"/>
+                </a:lnSpc>
+                <a:spcAft>
+                  <a:spcPts val="0"/>
+                </a:spcAft>
+              </a:pPr>
+              <a:r>
+                <a:rPr sz="1200" b="0">
+                  <a:solidFill>
+                    <a:schemeClr val="dk1"/>
+                  </a:solidFill>
+                  <a:latin typeface="Yu Gothic"/>
+                  <a:ea typeface="Yu Gothic"/>
+                </a:rPr>
+                <a:t>• MySQL 5.7</a:t>
+              </a:r>
+            </a:p>
+            <a:p>
+              <a:pPr algn="l">
+                <a:lnSpc>
+                  <a:spcPct val="100000"/>
+                </a:lnSpc>
+                <a:spcAft>
+                  <a:spcPts val="0"/>
+                </a:spcAft>
+              </a:pPr>
+              <a:r>
+                <a:rPr sz="1200" b="0">
+                  <a:solidFill>
+                    <a:schemeClr val="dk1"/>
+                  </a:solidFill>
+                  <a:latin typeface="Yu Gothic"/>
+                  <a:ea typeface="Yu Gothic"/>
+                </a:rPr>
+                <a:t>• 手作業のバックアップ</a:t>
+              </a:r>
+            </a:p>
+          </p:txBody>
+        </p:sp>
+      </p:grpSp>
+      <p:grpSp>
+        <p:nvGrpSpPr>
+          <p:cNvPr id="7" name="Comparison 2" descr="pptx-deck-generated"/>
+          <p:cNvGrpSpPr/>
+          <p:nvPr/>
+        </p:nvGrpSpPr>
+        <p:grpSpPr>
+          <a:xfrm>
+            <a:off x="6423659" y="1627632"/>
+            <a:ext cx="5308092" cy="4471416"/>
+            <a:chOff x="0" y="0"/>
+            <a:chExt cx="5308092" cy="4471416"/>
+          </a:xfrm>
+        </p:grpSpPr>
+        <p:sp>
+          <p:nvSpPr>
+            <p:cNvPr id="8" name="Comparison 2 panel" descr="pptx-deck-generated"/>
+            <p:cNvSpPr/>
+            <p:nvPr/>
+          </p:nvSpPr>
+          <p:spPr>
+            <a:xfrm>
+              <a:off x="0" y="0"/>
+              <a:ext cx="5308092" cy="4471416"/>
+            </a:xfrm>
+            <a:prstGeom prst="roundRect">
+              <a:avLst/>
+            </a:prstGeom>
+            <a:solidFill>
+              <a:schemeClr val="accent1">
+                <a:lumMod val="15000"/>
+                <a:lumOff val="85000"/>
+              </a:schemeClr>
+            </a:solidFill>
+            <a:ln w="9525">
+              <a:solidFill>
+                <a:schemeClr val="lt1">
+                  <a:lumMod val="85000"/>
+                </a:schemeClr>
+              </a:solidFill>
+            </a:ln>
+          </p:spPr>
+          <p:style>
+            <a:lnRef idx="1">
+              <a:schemeClr val="accent1"/>
+            </a:lnRef>
+            <a:fillRef idx="3">
+              <a:schemeClr val="accent1"/>
+            </a:fillRef>
+            <a:effectRef idx="2">
+              <a:schemeClr val="accent1"/>
+            </a:effectRef>
+            <a:fontRef idx="minor">
+              <a:schemeClr val="lt1"/>
+            </a:fontRef>
+          </p:style>
+          <p:txBody>
+            <a:bodyPr rtlCol="0" anchor="ctr"/>
+            <a:lstStyle/>
+            <a:p>
+              <a:pPr algn="ctr"/>
+            </a:p>
+          </p:txBody>
+        </p:sp>
+        <p:sp>
+          <p:nvSpPr>
+            <p:cNvPr id="9" name="Comparison 2 heading" descr="pptx-deck-generated"/>
+            <p:cNvSpPr/>
+            <p:nvPr/>
+          </p:nvSpPr>
+          <p:spPr>
+            <a:xfrm>
+              <a:off x="0" y="0"/>
+              <a:ext cx="5308092" cy="603504"/>
+            </a:xfrm>
+            <a:prstGeom prst="roundRect">
+              <a:avLst/>
+            </a:prstGeom>
+            <a:solidFill>
+              <a:schemeClr val="accent2"/>
+            </a:solidFill>
+          </p:spPr>
+          <p:style>
+            <a:lnRef idx="1">
+              <a:schemeClr val="accent1"/>
+            </a:lnRef>
+            <a:fillRef idx="3">
+              <a:schemeClr val="accent1"/>
+            </a:fillRef>
+            <a:effectRef idx="2">
+              <a:schemeClr val="accent1"/>
+            </a:effectRef>
+            <a:fontRef idx="minor">
+              <a:schemeClr val="lt1"/>
+            </a:fontRef>
+          </p:style>
+          <p:txBody>
+            <a:bodyPr rtlCol="0" anchor="ctr" wrap="square" lIns="82296" rIns="82296" tIns="36576" bIns="36576"/>
+            <a:lstStyle/>
+            <a:p>
+              <a:pPr algn="l">
+                <a:lnSpc>
+                  <a:spcPct val="100000"/>
+                </a:lnSpc>
+                <a:spcAft>
+                  <a:spcPts val="0"/>
+                </a:spcAft>
+              </a:pPr>
+              <a:r>
+                <a:rPr sz="1600" b="1">
+                  <a:solidFill>
+                    <a:schemeClr val="lt1"/>
+                  </a:solidFill>
+                  <a:latin typeface="Yu Gothic"/>
+                  <a:ea typeface="Yu Gothic"/>
+                </a:rPr>
+                <a:t>移行後</a:t>
+              </a:r>
+            </a:p>
+          </p:txBody>
+        </p:sp>
+        <p:sp>
+          <p:nvSpPr>
+            <p:cNvPr id="10" name="Comparison 2 items" descr="pptx-deck-generated"/>
+            <p:cNvSpPr txBox="1"/>
+            <p:nvPr/>
+          </p:nvSpPr>
+          <p:spPr>
+            <a:xfrm>
+              <a:off x="155448" y="731520"/>
+              <a:ext cx="4997196" cy="3685031"/>
+            </a:xfrm>
+            <a:prstGeom prst="rect">
+              <a:avLst/>
+            </a:prstGeom>
+            <a:noFill/>
+            <a:ln>
+              <a:noFill/>
+            </a:ln>
+          </p:spPr>
+          <p:txBody>
+            <a:bodyPr wrap="square" anchor="ctr" lIns="82296" rIns="82296" tIns="36576" bIns="36576">
+              <a:spAutoFit/>
+            </a:bodyPr>
+            <a:lstStyle/>
+            <a:p>
+              <a:pPr algn="l">
+                <a:lnSpc>
+                  <a:spcPct val="100000"/>
+                </a:lnSpc>
+                <a:spcAft>
+                  <a:spcPts val="0"/>
+                </a:spcAft>
+              </a:pPr>
+              <a:r>
+                <a:rPr sz="1200" b="0">
+                  <a:solidFill>
+                    <a:schemeClr val="dk1"/>
+                  </a:solidFill>
+                  <a:latin typeface="Yu Gothic"/>
+                  <a:ea typeface="Yu Gothic"/>
+                </a:rPr>
+                <a:t>• Ubuntu 24.04 LTS</a:t>
+              </a:r>
+            </a:p>
+            <a:p>
+              <a:pPr algn="l">
+                <a:lnSpc>
+                  <a:spcPct val="100000"/>
+                </a:lnSpc>
+                <a:spcAft>
+                  <a:spcPts val="0"/>
+                </a:spcAft>
+              </a:pPr>
+              <a:r>
+                <a:rPr sz="1200" b="0">
+                  <a:solidFill>
+                    <a:schemeClr val="dk1"/>
+                  </a:solidFill>
+                  <a:latin typeface="Yu Gothic"/>
+                  <a:ea typeface="Yu Gothic"/>
+                </a:rPr>
+                <a:t>• Redmine 6.x（計画時点の最新安定版）</a:t>
+              </a:r>
+            </a:p>
+            <a:p>
+              <a:pPr algn="l">
+                <a:lnSpc>
+                  <a:spcPct val="100000"/>
+                </a:lnSpc>
+                <a:spcAft>
+                  <a:spcPts val="0"/>
+                </a:spcAft>
+              </a:pPr>
+              <a:r>
+                <a:rPr sz="1200" b="0">
+                  <a:solidFill>
+                    <a:schemeClr val="dk1"/>
+                  </a:solidFill>
+                  <a:latin typeface="Yu Gothic"/>
+                  <a:ea typeface="Yu Gothic"/>
+                </a:rPr>
+                <a:t>• MySQL 8.0</a:t>
+              </a:r>
+            </a:p>
+            <a:p>
+              <a:pPr algn="l">
+                <a:lnSpc>
+                  <a:spcPct val="100000"/>
+                </a:lnSpc>
+                <a:spcAft>
+                  <a:spcPts val="0"/>
+                </a:spcAft>
+              </a:pPr>
+              <a:r>
+                <a:rPr sz="1200" b="0">
+                  <a:solidFill>
+                    <a:schemeClr val="dk1"/>
+                  </a:solidFill>
+                  <a:latin typeface="Yu Gothic"/>
+                  <a:ea typeface="Yu Gothic"/>
+                </a:rPr>
+                <a:t>• 自動バックアップと復元手順書</a:t>
+              </a:r>
+            </a:p>
+          </p:txBody>
+        </p:sp>
+      </p:grpSp>
+      <p:sp>
+        <p:nvSpPr>
+          <p:cNvPr id="11" name="Comparison transition" descr="pptx-deck-generated"/>
+          <p:cNvSpPr/>
+          <p:nvPr/>
+        </p:nvSpPr>
+        <p:spPr>
+          <a:xfrm>
+            <a:off x="5911596" y="3493922"/>
+            <a:ext cx="365760" cy="384048"/>
+          </a:xfrm>
+          <a:prstGeom prst="rightArrow">
             <a:avLst/>
           </a:prstGeom>
-          <a:noFill/>
+          <a:solidFill>
+            <a:schemeClr val="accent2"/>
+          </a:solidFill>
         </p:spPr>
-        <p:txBody>
-          <a:bodyPr wrap="square" anchor="t">
-            <a:spAutoFit/>
-          </a:bodyPr>
+        <p:style>
+          <a:lnRef idx="1">
+            <a:schemeClr val="accent1"/>
+          </a:lnRef>
+          <a:fillRef idx="3">
+            <a:schemeClr val="accent1"/>
+          </a:fillRef>
+          <a:effectRef idx="2">
+            <a:schemeClr val="accent1"/>
+          </a:effectRef>
+          <a:fontRef idx="minor">
+            <a:schemeClr val="lt1"/>
+          </a:fontRef>
+        </p:style>
+        <p:txBody>
+          <a:bodyPr rtlCol="0" anchor="ctr"/>
           <a:lstStyle/>
           <a:p>
-            <a:pPr algn="l"/>
-            <a:r>
-              <a:rPr sz="2400" b="1">
-                <a:solidFill>
-                  <a:srgbClr val="1B3A66"/>
-                </a:solidFill>
-                <a:latin typeface="Yu Gothic"/>
-                <a:ea typeface="Yu Gothic"/>
-                <a:cs typeface="Yu Gothic"/>
-              </a:rPr>
-              <a:t>OSとミドルウェアを保守期間内の版へそろえ、運用手順も標準化する</a:t>
-            </a:r>
-          </a:p>
-        </p:txBody>
-      </p:sp>
-      <p:sp>
-        <p:nvSpPr>
-          <p:cNvPr id="3" name="LeftHeading"/>
-          <p:cNvSpPr txBox="1"/>
-          <p:nvPr/>
-        </p:nvSpPr>
-        <p:spPr>
-          <a:xfrm>
-            <a:off x="731520" y="1371600"/>
-            <a:ext cx="5120640" cy="502920"/>
-          </a:xfrm>
-          <a:prstGeom prst="rect">
-            <a:avLst/>
-          </a:prstGeom>
-          <a:noFill/>
-        </p:spPr>
-        <p:txBody>
-          <a:bodyPr wrap="square" anchor="t">
-            <a:spAutoFit/>
-          </a:bodyPr>
-          <a:lstStyle/>
-          <a:p>
-            <a:pPr algn="l"/>
-            <a:r>
-              <a:rPr sz="1800" b="1">
-                <a:solidFill>
-                  <a:srgbClr val="1B3A66"/>
-                </a:solidFill>
-                <a:latin typeface="Yu Gothic"/>
-                <a:ea typeface="Yu Gothic"/>
-                <a:cs typeface="Yu Gothic"/>
-              </a:rPr>
-              <a:t>現行</a:t>
-            </a:r>
-          </a:p>
-        </p:txBody>
-      </p:sp>
-      <p:sp>
-        <p:nvSpPr>
-          <p:cNvPr id="4" name="LeftBody"/>
-          <p:cNvSpPr txBox="1"/>
-          <p:nvPr/>
-        </p:nvSpPr>
-        <p:spPr>
-          <a:xfrm>
-            <a:off x="731520" y="1965960"/>
-            <a:ext cx="5120640" cy="4023360"/>
-          </a:xfrm>
-          <a:prstGeom prst="rect">
-            <a:avLst/>
-          </a:prstGeom>
-          <a:noFill/>
-        </p:spPr>
-        <p:txBody>
-          <a:bodyPr wrap="square" anchor="t">
-            <a:spAutoFit/>
-          </a:bodyPr>
-          <a:lstStyle/>
-          <a:p>
-            <a:pPr algn="l" marL="457200" indent="-457200">
-              <a:spcAft>
-                <a:spcPts val="600"/>
-              </a:spcAft>
-              <a:buFont typeface="Arial"/>
-              <a:buChar char="・"/>
-            </a:pPr>
-            <a:r>
-              <a:rPr sz="1600" b="0">
-                <a:solidFill>
-                  <a:srgbClr val="202124"/>
-                </a:solidFill>
-                <a:latin typeface="Yu Gothic"/>
-                <a:ea typeface="Yu Gothic"/>
-                <a:cs typeface="Yu Gothic"/>
-              </a:rPr>
-              <a:t>CentOS 7</a:t>
-            </a:r>
-          </a:p>
-          <a:p>
-            <a:pPr algn="l" marL="457200" indent="-457200">
-              <a:spcAft>
-                <a:spcPts val="600"/>
-              </a:spcAft>
-              <a:buFont typeface="Arial"/>
-              <a:buChar char="・"/>
-            </a:pPr>
-            <a:r>
-              <a:rPr sz="1600" b="0">
-                <a:solidFill>
-                  <a:srgbClr val="202124"/>
-                </a:solidFill>
-                <a:latin typeface="Yu Gothic"/>
-                <a:ea typeface="Yu Gothic"/>
-                <a:cs typeface="Yu Gothic"/>
-              </a:rPr>
-              <a:t>Redmine 4.2</a:t>
-            </a:r>
-          </a:p>
-          <a:p>
-            <a:pPr algn="l" marL="457200" indent="-457200">
-              <a:spcAft>
-                <a:spcPts val="600"/>
-              </a:spcAft>
-              <a:buFont typeface="Arial"/>
-              <a:buChar char="・"/>
-            </a:pPr>
-            <a:r>
-              <a:rPr sz="1600" b="0">
-                <a:solidFill>
-                  <a:srgbClr val="202124"/>
-                </a:solidFill>
-                <a:latin typeface="Yu Gothic"/>
-                <a:ea typeface="Yu Gothic"/>
-                <a:cs typeface="Yu Gothic"/>
-              </a:rPr>
-              <a:t>MySQL 5.7</a:t>
-            </a:r>
-          </a:p>
-          <a:p>
-            <a:pPr algn="l" marL="457200" indent="-457200">
-              <a:spcAft>
-                <a:spcPts val="600"/>
-              </a:spcAft>
-              <a:buFont typeface="Arial"/>
-              <a:buChar char="・"/>
-            </a:pPr>
-            <a:r>
-              <a:rPr sz="1600" b="0">
-                <a:solidFill>
-                  <a:srgbClr val="202124"/>
-                </a:solidFill>
-                <a:latin typeface="Yu Gothic"/>
-                <a:ea typeface="Yu Gothic"/>
-                <a:cs typeface="Yu Gothic"/>
-              </a:rPr>
-              <a:t>手作業のバックアップ</a:t>
-            </a:r>
-          </a:p>
-        </p:txBody>
-      </p:sp>
-      <p:sp>
-        <p:nvSpPr>
-          <p:cNvPr id="5" name="RightHeading"/>
-          <p:cNvSpPr txBox="1"/>
-          <p:nvPr/>
-        </p:nvSpPr>
-        <p:spPr>
-          <a:xfrm>
-            <a:off x="6309360" y="1371600"/>
-            <a:ext cx="5120640" cy="502920"/>
-          </a:xfrm>
-          <a:prstGeom prst="rect">
-            <a:avLst/>
-          </a:prstGeom>
-          <a:noFill/>
-        </p:spPr>
-        <p:txBody>
-          <a:bodyPr wrap="square" anchor="t">
-            <a:spAutoFit/>
-          </a:bodyPr>
-          <a:lstStyle/>
-          <a:p>
-            <a:pPr algn="l"/>
-            <a:r>
-              <a:rPr sz="1800" b="1">
-                <a:solidFill>
-                  <a:srgbClr val="3E7CB1"/>
-                </a:solidFill>
-                <a:latin typeface="Yu Gothic"/>
-                <a:ea typeface="Yu Gothic"/>
-                <a:cs typeface="Yu Gothic"/>
-              </a:rPr>
-              <a:t>移行後</a:t>
-            </a:r>
-          </a:p>
-        </p:txBody>
-      </p:sp>
-      <p:sp>
-        <p:nvSpPr>
-          <p:cNvPr id="6" name="RightBody"/>
-          <p:cNvSpPr txBox="1"/>
-          <p:nvPr/>
-        </p:nvSpPr>
-        <p:spPr>
-          <a:xfrm>
-            <a:off x="6309360" y="1965960"/>
-            <a:ext cx="5120640" cy="4023360"/>
-          </a:xfrm>
-          <a:prstGeom prst="rect">
-            <a:avLst/>
-          </a:prstGeom>
-          <a:noFill/>
-        </p:spPr>
-        <p:txBody>
-          <a:bodyPr wrap="square" anchor="t">
-            <a:spAutoFit/>
-          </a:bodyPr>
-          <a:lstStyle/>
-          <a:p>
-            <a:pPr algn="l" marL="457200" indent="-457200">
-              <a:spcAft>
-                <a:spcPts val="600"/>
-              </a:spcAft>
-              <a:buFont typeface="Arial"/>
-              <a:buChar char="・"/>
-            </a:pPr>
-            <a:r>
-              <a:rPr sz="1600" b="0">
-                <a:solidFill>
-                  <a:srgbClr val="202124"/>
-                </a:solidFill>
-                <a:latin typeface="Yu Gothic"/>
-                <a:ea typeface="Yu Gothic"/>
-                <a:cs typeface="Yu Gothic"/>
-              </a:rPr>
-              <a:t>Ubuntu 24.04 LTS</a:t>
-            </a:r>
-          </a:p>
-          <a:p>
-            <a:pPr algn="l" marL="457200" indent="-457200">
-              <a:spcAft>
-                <a:spcPts val="600"/>
-              </a:spcAft>
-              <a:buFont typeface="Arial"/>
-              <a:buChar char="・"/>
-            </a:pPr>
-            <a:r>
-              <a:rPr sz="1600" b="0">
-                <a:solidFill>
-                  <a:srgbClr val="202124"/>
-                </a:solidFill>
-                <a:latin typeface="Yu Gothic"/>
-                <a:ea typeface="Yu Gothic"/>
-                <a:cs typeface="Yu Gothic"/>
-              </a:rPr>
-              <a:t>Redmine 6.x（計画時点の最新安定版）</a:t>
-            </a:r>
-          </a:p>
-          <a:p>
-            <a:pPr algn="l" marL="457200" indent="-457200">
-              <a:spcAft>
-                <a:spcPts val="600"/>
-              </a:spcAft>
-              <a:buFont typeface="Arial"/>
-              <a:buChar char="・"/>
-            </a:pPr>
-            <a:r>
-              <a:rPr sz="1600" b="0">
-                <a:solidFill>
-                  <a:srgbClr val="202124"/>
-                </a:solidFill>
-                <a:latin typeface="Yu Gothic"/>
-                <a:ea typeface="Yu Gothic"/>
-                <a:cs typeface="Yu Gothic"/>
-              </a:rPr>
-              <a:t>MySQL 8.0</a:t>
-            </a:r>
-          </a:p>
-          <a:p>
-            <a:pPr algn="l" marL="457200" indent="-457200">
-              <a:spcAft>
-                <a:spcPts val="600"/>
-              </a:spcAft>
-              <a:buFont typeface="Arial"/>
-              <a:buChar char="・"/>
-            </a:pPr>
-            <a:r>
-              <a:rPr sz="1600" b="0">
-                <a:solidFill>
-                  <a:srgbClr val="202124"/>
-                </a:solidFill>
-                <a:latin typeface="Yu Gothic"/>
-                <a:ea typeface="Yu Gothic"/>
-                <a:cs typeface="Yu Gothic"/>
-              </a:rPr>
-              <a:t>自動バックアップと復元手順書</a:t>
-            </a:r>
+            <a:pPr algn="ctr"/>
           </a:p>
         </p:txBody>
       </p:sp>
@@ -6594,952 +7483,1016 @@
       <p:grpSpPr/>
       <p:sp>
         <p:nvSpPr>
-          <p:cNvPr id="2" name="Title"/>
-          <p:cNvSpPr txBox="1"/>
-          <p:nvPr/>
+          <p:cNvPr id="2" name="Title 1"/>
+          <p:cNvSpPr>
+            <a:spLocks noGrp="1"/>
+          </p:cNvSpPr>
+          <p:nvPr>
+            <p:ph type="title"/>
+          </p:nvPr>
         </p:nvSpPr>
         <p:spPr>
           <a:xfrm>
             <a:off x="457200" y="274320"/>
             <a:ext cx="11274552" cy="1051560"/>
           </a:xfrm>
+        </p:spPr>
+        <p:txBody>
+          <a:bodyPr/>
+          <a:lstStyle/>
+          <a:p>
+            <a:r>
+              <a:t>リハーサルを2回行い、本番の手順と所要時間を事前に確定する</a:t>
+            </a:r>
+          </a:p>
+        </p:txBody>
+      </p:sp>
+      <p:sp>
+        <p:nvSpPr>
+          <p:cNvPr id="3" name="Roadmap period 1" descr="pptx-deck-generated"/>
+          <p:cNvSpPr/>
+          <p:nvPr/>
+        </p:nvSpPr>
+        <p:spPr>
+          <a:xfrm>
+            <a:off x="2468880" y="1554480"/>
+            <a:ext cx="2315718" cy="438912"/>
+          </a:xfrm>
+          <a:prstGeom prst="rect">
+            <a:avLst/>
+          </a:prstGeom>
+          <a:solidFill>
+            <a:schemeClr val="accent1"/>
+          </a:solidFill>
+        </p:spPr>
+        <p:style>
+          <a:lnRef idx="1">
+            <a:schemeClr val="accent1"/>
+          </a:lnRef>
+          <a:fillRef idx="3">
+            <a:schemeClr val="accent1"/>
+          </a:fillRef>
+          <a:effectRef idx="2">
+            <a:schemeClr val="accent1"/>
+          </a:effectRef>
+          <a:fontRef idx="minor">
+            <a:schemeClr val="lt1"/>
+          </a:fontRef>
+        </p:style>
+        <p:txBody>
+          <a:bodyPr rtlCol="0" anchor="ctr" wrap="square" lIns="82296" rIns="82296" tIns="36576" bIns="36576"/>
+          <a:lstStyle/>
+          <a:p>
+            <a:pPr algn="ctr">
+              <a:lnSpc>
+                <a:spcPct val="100000"/>
+              </a:lnSpc>
+              <a:spcAft>
+                <a:spcPts val="0"/>
+              </a:spcAft>
+            </a:pPr>
+            <a:r>
+              <a:rPr sz="1000" b="1">
+                <a:solidFill>
+                  <a:schemeClr val="lt1"/>
+                </a:solidFill>
+                <a:latin typeface="Yu Gothic"/>
+                <a:ea typeface="Yu Gothic"/>
+              </a:rPr>
+              <a:t>10月</a:t>
+            </a:r>
+          </a:p>
+        </p:txBody>
+      </p:sp>
+      <p:sp>
+        <p:nvSpPr>
+          <p:cNvPr id="4" name="Roadmap grid 1" descr="pptx-deck-generated"/>
+          <p:cNvSpPr/>
+          <p:nvPr/>
+        </p:nvSpPr>
+        <p:spPr>
+          <a:xfrm>
+            <a:off x="2468880" y="1993391"/>
+            <a:ext cx="9144" cy="4178808"/>
+          </a:xfrm>
+          <a:prstGeom prst="rect">
+            <a:avLst/>
+          </a:prstGeom>
+          <a:solidFill>
+            <a:schemeClr val="lt1">
+              <a:lumMod val="85000"/>
+            </a:schemeClr>
+          </a:solidFill>
+        </p:spPr>
+        <p:style>
+          <a:lnRef idx="1">
+            <a:schemeClr val="accent1"/>
+          </a:lnRef>
+          <a:fillRef idx="3">
+            <a:schemeClr val="accent1"/>
+          </a:fillRef>
+          <a:effectRef idx="2">
+            <a:schemeClr val="accent1"/>
+          </a:effectRef>
+          <a:fontRef idx="minor">
+            <a:schemeClr val="lt1"/>
+          </a:fontRef>
+        </p:style>
+        <p:txBody>
+          <a:bodyPr rtlCol="0" anchor="ctr"/>
+          <a:lstStyle/>
+          <a:p>
+            <a:pPr algn="ctr"/>
+          </a:p>
+        </p:txBody>
+      </p:sp>
+      <p:sp>
+        <p:nvSpPr>
+          <p:cNvPr id="5" name="Roadmap period 2" descr="pptx-deck-generated"/>
+          <p:cNvSpPr/>
+          <p:nvPr/>
+        </p:nvSpPr>
+        <p:spPr>
+          <a:xfrm>
+            <a:off x="4784598" y="1554480"/>
+            <a:ext cx="2315718" cy="438912"/>
+          </a:xfrm>
+          <a:prstGeom prst="rect">
+            <a:avLst/>
+          </a:prstGeom>
+          <a:solidFill>
+            <a:schemeClr val="accent1"/>
+          </a:solidFill>
+        </p:spPr>
+        <p:style>
+          <a:lnRef idx="1">
+            <a:schemeClr val="accent1"/>
+          </a:lnRef>
+          <a:fillRef idx="3">
+            <a:schemeClr val="accent1"/>
+          </a:fillRef>
+          <a:effectRef idx="2">
+            <a:schemeClr val="accent1"/>
+          </a:effectRef>
+          <a:fontRef idx="minor">
+            <a:schemeClr val="lt1"/>
+          </a:fontRef>
+        </p:style>
+        <p:txBody>
+          <a:bodyPr rtlCol="0" anchor="ctr" wrap="square" lIns="82296" rIns="82296" tIns="36576" bIns="36576"/>
+          <a:lstStyle/>
+          <a:p>
+            <a:pPr algn="ctr">
+              <a:lnSpc>
+                <a:spcPct val="100000"/>
+              </a:lnSpc>
+              <a:spcAft>
+                <a:spcPts val="0"/>
+              </a:spcAft>
+            </a:pPr>
+            <a:r>
+              <a:rPr sz="1000" b="1">
+                <a:solidFill>
+                  <a:schemeClr val="lt1"/>
+                </a:solidFill>
+                <a:latin typeface="Yu Gothic"/>
+                <a:ea typeface="Yu Gothic"/>
+              </a:rPr>
+              <a:t>11月</a:t>
+            </a:r>
+          </a:p>
+        </p:txBody>
+      </p:sp>
+      <p:sp>
+        <p:nvSpPr>
+          <p:cNvPr id="6" name="Roadmap grid 2" descr="pptx-deck-generated"/>
+          <p:cNvSpPr/>
+          <p:nvPr/>
+        </p:nvSpPr>
+        <p:spPr>
+          <a:xfrm>
+            <a:off x="4784598" y="1993391"/>
+            <a:ext cx="9144" cy="4178808"/>
+          </a:xfrm>
+          <a:prstGeom prst="rect">
+            <a:avLst/>
+          </a:prstGeom>
+          <a:solidFill>
+            <a:schemeClr val="lt1">
+              <a:lumMod val="85000"/>
+            </a:schemeClr>
+          </a:solidFill>
+        </p:spPr>
+        <p:style>
+          <a:lnRef idx="1">
+            <a:schemeClr val="accent1"/>
+          </a:lnRef>
+          <a:fillRef idx="3">
+            <a:schemeClr val="accent1"/>
+          </a:fillRef>
+          <a:effectRef idx="2">
+            <a:schemeClr val="accent1"/>
+          </a:effectRef>
+          <a:fontRef idx="minor">
+            <a:schemeClr val="lt1"/>
+          </a:fontRef>
+        </p:style>
+        <p:txBody>
+          <a:bodyPr rtlCol="0" anchor="ctr"/>
+          <a:lstStyle/>
+          <a:p>
+            <a:pPr algn="ctr"/>
+          </a:p>
+        </p:txBody>
+      </p:sp>
+      <p:sp>
+        <p:nvSpPr>
+          <p:cNvPr id="7" name="Roadmap period 3" descr="pptx-deck-generated"/>
+          <p:cNvSpPr/>
+          <p:nvPr/>
+        </p:nvSpPr>
+        <p:spPr>
+          <a:xfrm>
+            <a:off x="7100316" y="1554480"/>
+            <a:ext cx="2315718" cy="438912"/>
+          </a:xfrm>
+          <a:prstGeom prst="rect">
+            <a:avLst/>
+          </a:prstGeom>
+          <a:solidFill>
+            <a:schemeClr val="accent1"/>
+          </a:solidFill>
+        </p:spPr>
+        <p:style>
+          <a:lnRef idx="1">
+            <a:schemeClr val="accent1"/>
+          </a:lnRef>
+          <a:fillRef idx="3">
+            <a:schemeClr val="accent1"/>
+          </a:fillRef>
+          <a:effectRef idx="2">
+            <a:schemeClr val="accent1"/>
+          </a:effectRef>
+          <a:fontRef idx="minor">
+            <a:schemeClr val="lt1"/>
+          </a:fontRef>
+        </p:style>
+        <p:txBody>
+          <a:bodyPr rtlCol="0" anchor="ctr" wrap="square" lIns="82296" rIns="82296" tIns="36576" bIns="36576"/>
+          <a:lstStyle/>
+          <a:p>
+            <a:pPr algn="ctr">
+              <a:lnSpc>
+                <a:spcPct val="100000"/>
+              </a:lnSpc>
+              <a:spcAft>
+                <a:spcPts val="0"/>
+              </a:spcAft>
+            </a:pPr>
+            <a:r>
+              <a:rPr sz="1000" b="1">
+                <a:solidFill>
+                  <a:schemeClr val="lt1"/>
+                </a:solidFill>
+                <a:latin typeface="Yu Gothic"/>
+                <a:ea typeface="Yu Gothic"/>
+              </a:rPr>
+              <a:t>12月</a:t>
+            </a:r>
+          </a:p>
+        </p:txBody>
+      </p:sp>
+      <p:sp>
+        <p:nvSpPr>
+          <p:cNvPr id="8" name="Roadmap grid 3" descr="pptx-deck-generated"/>
+          <p:cNvSpPr/>
+          <p:nvPr/>
+        </p:nvSpPr>
+        <p:spPr>
+          <a:xfrm>
+            <a:off x="7100316" y="1993391"/>
+            <a:ext cx="9144" cy="4178808"/>
+          </a:xfrm>
+          <a:prstGeom prst="rect">
+            <a:avLst/>
+          </a:prstGeom>
+          <a:solidFill>
+            <a:schemeClr val="lt1">
+              <a:lumMod val="85000"/>
+            </a:schemeClr>
+          </a:solidFill>
+        </p:spPr>
+        <p:style>
+          <a:lnRef idx="1">
+            <a:schemeClr val="accent1"/>
+          </a:lnRef>
+          <a:fillRef idx="3">
+            <a:schemeClr val="accent1"/>
+          </a:fillRef>
+          <a:effectRef idx="2">
+            <a:schemeClr val="accent1"/>
+          </a:effectRef>
+          <a:fontRef idx="minor">
+            <a:schemeClr val="lt1"/>
+          </a:fontRef>
+        </p:style>
+        <p:txBody>
+          <a:bodyPr rtlCol="0" anchor="ctr"/>
+          <a:lstStyle/>
+          <a:p>
+            <a:pPr algn="ctr"/>
+          </a:p>
+        </p:txBody>
+      </p:sp>
+      <p:sp>
+        <p:nvSpPr>
+          <p:cNvPr id="9" name="Roadmap period 4" descr="pptx-deck-generated"/>
+          <p:cNvSpPr/>
+          <p:nvPr/>
+        </p:nvSpPr>
+        <p:spPr>
+          <a:xfrm>
+            <a:off x="9416034" y="1554480"/>
+            <a:ext cx="2315718" cy="438912"/>
+          </a:xfrm>
+          <a:prstGeom prst="rect">
+            <a:avLst/>
+          </a:prstGeom>
+          <a:solidFill>
+            <a:schemeClr val="accent1"/>
+          </a:solidFill>
+        </p:spPr>
+        <p:style>
+          <a:lnRef idx="1">
+            <a:schemeClr val="accent1"/>
+          </a:lnRef>
+          <a:fillRef idx="3">
+            <a:schemeClr val="accent1"/>
+          </a:fillRef>
+          <a:effectRef idx="2">
+            <a:schemeClr val="accent1"/>
+          </a:effectRef>
+          <a:fontRef idx="minor">
+            <a:schemeClr val="lt1"/>
+          </a:fontRef>
+        </p:style>
+        <p:txBody>
+          <a:bodyPr rtlCol="0" anchor="ctr" wrap="square" lIns="82296" rIns="82296" tIns="36576" bIns="36576"/>
+          <a:lstStyle/>
+          <a:p>
+            <a:pPr algn="ctr">
+              <a:lnSpc>
+                <a:spcPct val="100000"/>
+              </a:lnSpc>
+              <a:spcAft>
+                <a:spcPts val="0"/>
+              </a:spcAft>
+            </a:pPr>
+            <a:r>
+              <a:rPr sz="1000" b="1">
+                <a:solidFill>
+                  <a:schemeClr val="lt1"/>
+                </a:solidFill>
+                <a:latin typeface="Yu Gothic"/>
+                <a:ea typeface="Yu Gothic"/>
+              </a:rPr>
+              <a:t>1月</a:t>
+            </a:r>
+          </a:p>
+        </p:txBody>
+      </p:sp>
+      <p:sp>
+        <p:nvSpPr>
+          <p:cNvPr id="10" name="Roadmap grid 4" descr="pptx-deck-generated"/>
+          <p:cNvSpPr/>
+          <p:nvPr/>
+        </p:nvSpPr>
+        <p:spPr>
+          <a:xfrm>
+            <a:off x="9416034" y="1993391"/>
+            <a:ext cx="9144" cy="4178808"/>
+          </a:xfrm>
+          <a:prstGeom prst="rect">
+            <a:avLst/>
+          </a:prstGeom>
+          <a:solidFill>
+            <a:schemeClr val="lt1">
+              <a:lumMod val="85000"/>
+            </a:schemeClr>
+          </a:solidFill>
+        </p:spPr>
+        <p:style>
+          <a:lnRef idx="1">
+            <a:schemeClr val="accent1"/>
+          </a:lnRef>
+          <a:fillRef idx="3">
+            <a:schemeClr val="accent1"/>
+          </a:fillRef>
+          <a:effectRef idx="2">
+            <a:schemeClr val="accent1"/>
+          </a:effectRef>
+          <a:fontRef idx="minor">
+            <a:schemeClr val="lt1"/>
+          </a:fontRef>
+        </p:style>
+        <p:txBody>
+          <a:bodyPr rtlCol="0" anchor="ctr"/>
+          <a:lstStyle/>
+          <a:p>
+            <a:pPr algn="ctr"/>
+          </a:p>
+        </p:txBody>
+      </p:sp>
+      <p:sp>
+        <p:nvSpPr>
+          <p:cNvPr id="11" name="Roadmap track 1" descr="pptx-deck-generated"/>
+          <p:cNvSpPr txBox="1"/>
+          <p:nvPr/>
+        </p:nvSpPr>
+        <p:spPr>
+          <a:xfrm>
+            <a:off x="493776" y="2020823"/>
+            <a:ext cx="1920240" cy="780897"/>
+          </a:xfrm>
           <a:prstGeom prst="rect">
             <a:avLst/>
           </a:prstGeom>
           <a:noFill/>
+          <a:ln>
+            <a:noFill/>
+          </a:ln>
         </p:spPr>
         <p:txBody>
-          <a:bodyPr wrap="square" anchor="t">
+          <a:bodyPr wrap="square" anchor="ctr" lIns="82296" rIns="82296" tIns="36576" bIns="36576">
             <a:spAutoFit/>
           </a:bodyPr>
           <a:lstStyle/>
           <a:p>
-            <a:pPr algn="l"/>
-            <a:r>
-              <a:rPr sz="2400" b="1">
+            <a:pPr algn="l">
+              <a:lnSpc>
+                <a:spcPct val="100000"/>
+              </a:lnSpc>
+              <a:spcAft>
+                <a:spcPts val="0"/>
+              </a:spcAft>
+            </a:pPr>
+            <a:r>
+              <a:rPr sz="1000" b="1">
                 <a:solidFill>
-                  <a:srgbClr val="1B3A66"/>
+                  <a:schemeClr val="dk1"/>
                 </a:solidFill>
                 <a:latin typeface="Yu Gothic"/>
                 <a:ea typeface="Yu Gothic"/>
-                <a:cs typeface="Yu Gothic"/>
               </a:rPr>
-              <a:t>リハーサルを2回行い、本番の手順と所要時間を事前に確定する</a:t>
-            </a:r>
-          </a:p>
-        </p:txBody>
-      </p:sp>
-      <p:graphicFrame>
-        <p:nvGraphicFramePr>
-          <p:cNvPr id="3" name="DataTable"/>
-          <p:cNvGraphicFramePr>
-            <a:graphicFrameLocks noGrp="1"/>
-          </p:cNvGraphicFramePr>
+              <a:t>棚卸し・調査</a:t>
+            </a:r>
+          </a:p>
+        </p:txBody>
+      </p:sp>
+      <p:grpSp>
+        <p:nvGrpSpPr>
+          <p:cNvPr id="12" name="Roadmap 1" descr="pptx-deck-generated"/>
+          <p:cNvGrpSpPr/>
           <p:nvPr/>
-        </p:nvGraphicFramePr>
-        <p:xfrm>
-          <a:off x="731520" y="1463040"/>
-          <a:ext cx="10698480" cy="2194560"/>
-        </p:xfrm>
-        <a:graphic>
-          <a:graphicData uri="http://schemas.openxmlformats.org/drawingml/2006/table">
-            <a:tbl>
-              <a:tblPr firstRow="1" bandRow="1">
-                <a:tableStyleId>{5C22544A-7EE6-4342-B048-85BDC9FD1C3A}</a:tableStyleId>
-              </a:tblPr>
-              <a:tblGrid>
-                <a:gridCol w="4214553"/>
-                <a:gridCol w="1620982"/>
-                <a:gridCol w="1620982"/>
-                <a:gridCol w="1620982"/>
-                <a:gridCol w="1620981"/>
-              </a:tblGrid>
-              <a:tr h="731520">
-                <a:tc>
-                  <a:txBody>
-                    <a:bodyPr/>
-                    <a:lstStyle/>
-                    <a:p>
-                      <a:r>
-                        <a:rPr sz="1400" b="1">
-                          <a:solidFill>
-                            <a:srgbClr val="FFFFFF"/>
-                          </a:solidFill>
-                          <a:latin typeface="Yu Gothic"/>
-                          <a:ea typeface="Yu Gothic"/>
-                          <a:cs typeface="Yu Gothic"/>
-                        </a:rPr>
-                        <a:t>作業</a:t>
-                      </a:r>
-                    </a:p>
-                  </a:txBody>
-                  <a:tcPr anchor="ctr">
-                    <a:lnB w="9525" cap="flat">
-                      <a:solidFill>
-                        <a:srgbClr val="C8CDD6"/>
-                      </a:solidFill>
-                    </a:lnB>
-                    <a:solidFill>
-                      <a:srgbClr val="1B3A66"/>
-                    </a:solidFill>
-                  </a:tcPr>
-                </a:tc>
-                <a:tc>
-                  <a:txBody>
-                    <a:bodyPr/>
-                    <a:lstStyle/>
-                    <a:p>
-                      <a:r>
-                        <a:rPr sz="1400" b="1">
-                          <a:solidFill>
-                            <a:srgbClr val="FFFFFF"/>
-                          </a:solidFill>
-                          <a:latin typeface="Yu Gothic"/>
-                          <a:ea typeface="Yu Gothic"/>
-                          <a:cs typeface="Yu Gothic"/>
-                        </a:rPr>
-                        <a:t>10月</a:t>
-                      </a:r>
-                    </a:p>
-                  </a:txBody>
-                  <a:tcPr anchor="ctr">
-                    <a:lnB w="9525" cap="flat">
-                      <a:solidFill>
-                        <a:srgbClr val="C8CDD6"/>
-                      </a:solidFill>
-                    </a:lnB>
-                    <a:solidFill>
-                      <a:srgbClr val="1B3A66"/>
-                    </a:solidFill>
-                  </a:tcPr>
-                </a:tc>
-                <a:tc>
-                  <a:txBody>
-                    <a:bodyPr/>
-                    <a:lstStyle/>
-                    <a:p>
-                      <a:r>
-                        <a:rPr sz="1400" b="1">
-                          <a:solidFill>
-                            <a:srgbClr val="FFFFFF"/>
-                          </a:solidFill>
-                          <a:latin typeface="Yu Gothic"/>
-                          <a:ea typeface="Yu Gothic"/>
-                          <a:cs typeface="Yu Gothic"/>
-                        </a:rPr>
-                        <a:t>11月</a:t>
-                      </a:r>
-                    </a:p>
-                  </a:txBody>
-                  <a:tcPr anchor="ctr">
-                    <a:lnB w="9525" cap="flat">
-                      <a:solidFill>
-                        <a:srgbClr val="C8CDD6"/>
-                      </a:solidFill>
-                    </a:lnB>
-                    <a:solidFill>
-                      <a:srgbClr val="1B3A66"/>
-                    </a:solidFill>
-                  </a:tcPr>
-                </a:tc>
-                <a:tc>
-                  <a:txBody>
-                    <a:bodyPr/>
-                    <a:lstStyle/>
-                    <a:p>
-                      <a:r>
-                        <a:rPr sz="1400" b="1">
-                          <a:solidFill>
-                            <a:srgbClr val="FFFFFF"/>
-                          </a:solidFill>
-                          <a:latin typeface="Yu Gothic"/>
-                          <a:ea typeface="Yu Gothic"/>
-                          <a:cs typeface="Yu Gothic"/>
-                        </a:rPr>
-                        <a:t>12月</a:t>
-                      </a:r>
-                    </a:p>
-                  </a:txBody>
-                  <a:tcPr anchor="ctr">
-                    <a:lnB w="9525" cap="flat">
-                      <a:solidFill>
-                        <a:srgbClr val="C8CDD6"/>
-                      </a:solidFill>
-                    </a:lnB>
-                    <a:solidFill>
-                      <a:srgbClr val="1B3A66"/>
-                    </a:solidFill>
-                  </a:tcPr>
-                </a:tc>
-                <a:tc>
-                  <a:txBody>
-                    <a:bodyPr/>
-                    <a:lstStyle/>
-                    <a:p>
-                      <a:r>
-                        <a:rPr sz="1400" b="1">
-                          <a:solidFill>
-                            <a:srgbClr val="FFFFFF"/>
-                          </a:solidFill>
-                          <a:latin typeface="Yu Gothic"/>
-                          <a:ea typeface="Yu Gothic"/>
-                          <a:cs typeface="Yu Gothic"/>
-                        </a:rPr>
-                        <a:t>1月</a:t>
-                      </a:r>
-                    </a:p>
-                  </a:txBody>
-                  <a:tcPr anchor="ctr">
-                    <a:lnB w="9525" cap="flat">
-                      <a:solidFill>
-                        <a:srgbClr val="C8CDD6"/>
-                      </a:solidFill>
-                    </a:lnB>
-                    <a:solidFill>
-                      <a:srgbClr val="1B3A66"/>
-                    </a:solidFill>
-                  </a:tcPr>
-                </a:tc>
-              </a:tr>
-              <a:tr h="731520">
-                <a:tc>
-                  <a:txBody>
-                    <a:bodyPr/>
-                    <a:lstStyle/>
-                    <a:p>
-                      <a:r>
-                        <a:rPr sz="1300">
-                          <a:solidFill>
-                            <a:srgbClr val="202124"/>
-                          </a:solidFill>
-                          <a:latin typeface="Yu Gothic"/>
-                          <a:ea typeface="Yu Gothic"/>
-                          <a:cs typeface="Yu Gothic"/>
-                        </a:rPr>
-                        <a:t>棚卸し・調査</a:t>
-                      </a:r>
-                    </a:p>
-                  </a:txBody>
-                  <a:tcPr anchor="ctr">
-                    <a:lnB w="9525" cap="flat">
-                      <a:solidFill>
-                        <a:srgbClr val="C8CDD6"/>
-                      </a:solidFill>
-                    </a:lnB>
-                    <a:solidFill>
-                      <a:srgbClr val="FFFFFF"/>
-                    </a:solidFill>
-                  </a:tcPr>
-                </a:tc>
-                <a:tc>
-                  <a:txBody>
-                    <a:bodyPr/>
-                    <a:lstStyle/>
-                    <a:p>
-                      <a:r>
-                        <a:rPr sz="1300">
-                          <a:solidFill>
-                            <a:srgbClr val="202124"/>
-                          </a:solidFill>
-                          <a:latin typeface="Yu Gothic"/>
-                          <a:ea typeface="Yu Gothic"/>
-                          <a:cs typeface="Yu Gothic"/>
-                        </a:rPr>
-                        <a:t>■</a:t>
-                      </a:r>
-                    </a:p>
-                  </a:txBody>
-                  <a:tcPr anchor="ctr">
-                    <a:lnB w="9525" cap="flat">
-                      <a:solidFill>
-                        <a:srgbClr val="C8CDD6"/>
-                      </a:solidFill>
-                    </a:lnB>
-                    <a:solidFill>
-                      <a:srgbClr val="FFFFFF"/>
-                    </a:solidFill>
-                  </a:tcPr>
-                </a:tc>
-                <a:tc>
-                  <a:txBody>
-                    <a:bodyPr/>
-                    <a:lstStyle/>
-                    <a:p>
-                      <a:r>
-                        <a:rPr sz="1300">
-                          <a:solidFill>
-                            <a:srgbClr val="202124"/>
-                          </a:solidFill>
-                          <a:latin typeface="Yu Gothic"/>
-                          <a:ea typeface="Yu Gothic"/>
-                          <a:cs typeface="Yu Gothic"/>
-                        </a:rPr>
-                        <a:t/>
-                      </a:r>
-                    </a:p>
-                  </a:txBody>
-                  <a:tcPr anchor="ctr">
-                    <a:lnB w="9525" cap="flat">
-                      <a:solidFill>
-                        <a:srgbClr val="C8CDD6"/>
-                      </a:solidFill>
-                    </a:lnB>
-                    <a:solidFill>
-                      <a:srgbClr val="FFFFFF"/>
-                    </a:solidFill>
-                  </a:tcPr>
-                </a:tc>
-                <a:tc>
-                  <a:txBody>
-                    <a:bodyPr/>
-                    <a:lstStyle/>
-                    <a:p>
-                      <a:r>
-                        <a:rPr sz="1300">
-                          <a:solidFill>
-                            <a:srgbClr val="202124"/>
-                          </a:solidFill>
-                          <a:latin typeface="Yu Gothic"/>
-                          <a:ea typeface="Yu Gothic"/>
-                          <a:cs typeface="Yu Gothic"/>
-                        </a:rPr>
-                        <a:t/>
-                      </a:r>
-                    </a:p>
-                  </a:txBody>
-                  <a:tcPr anchor="ctr">
-                    <a:lnB w="9525" cap="flat">
-                      <a:solidFill>
-                        <a:srgbClr val="C8CDD6"/>
-                      </a:solidFill>
-                    </a:lnB>
-                    <a:solidFill>
-                      <a:srgbClr val="FFFFFF"/>
-                    </a:solidFill>
-                  </a:tcPr>
-                </a:tc>
-                <a:tc>
-                  <a:txBody>
-                    <a:bodyPr/>
-                    <a:lstStyle/>
-                    <a:p>
-                      <a:r>
-                        <a:rPr sz="1300">
-                          <a:solidFill>
-                            <a:srgbClr val="202124"/>
-                          </a:solidFill>
-                          <a:latin typeface="Yu Gothic"/>
-                          <a:ea typeface="Yu Gothic"/>
-                          <a:cs typeface="Yu Gothic"/>
-                        </a:rPr>
-                        <a:t/>
-                      </a:r>
-                    </a:p>
-                  </a:txBody>
-                  <a:tcPr anchor="ctr">
-                    <a:lnB w="9525" cap="flat">
-                      <a:solidFill>
-                        <a:srgbClr val="C8CDD6"/>
-                      </a:solidFill>
-                    </a:lnB>
-                    <a:solidFill>
-                      <a:srgbClr val="FFFFFF"/>
-                    </a:solidFill>
-                  </a:tcPr>
-                </a:tc>
-              </a:tr>
-              <a:tr h="731520">
-                <a:tc>
-                  <a:txBody>
-                    <a:bodyPr/>
-                    <a:lstStyle/>
-                    <a:p>
-                      <a:r>
-                        <a:rPr sz="1300">
-                          <a:solidFill>
-                            <a:srgbClr val="202124"/>
-                          </a:solidFill>
-                          <a:latin typeface="Yu Gothic"/>
-                          <a:ea typeface="Yu Gothic"/>
-                          <a:cs typeface="Yu Gothic"/>
-                        </a:rPr>
-                        <a:t>検証環境構築</a:t>
-                      </a:r>
-                    </a:p>
-                  </a:txBody>
-                  <a:tcPr anchor="ctr">
-                    <a:lnB w="9525" cap="flat">
-                      <a:solidFill>
-                        <a:srgbClr val="C8CDD6"/>
-                      </a:solidFill>
-                    </a:lnB>
-                    <a:solidFill>
-                      <a:srgbClr val="F3F5F9"/>
-                    </a:solidFill>
-                  </a:tcPr>
-                </a:tc>
-                <a:tc>
-                  <a:txBody>
-                    <a:bodyPr/>
-                    <a:lstStyle/>
-                    <a:p>
-                      <a:r>
-                        <a:rPr sz="1300">
-                          <a:solidFill>
-                            <a:srgbClr val="202124"/>
-                          </a:solidFill>
-                          <a:latin typeface="Yu Gothic"/>
-                          <a:ea typeface="Yu Gothic"/>
-                          <a:cs typeface="Yu Gothic"/>
-                        </a:rPr>
-                        <a:t>■</a:t>
-                      </a:r>
-                    </a:p>
-                  </a:txBody>
-                  <a:tcPr anchor="ctr">
-                    <a:lnB w="9525" cap="flat">
-                      <a:solidFill>
-                        <a:srgbClr val="C8CDD6"/>
-                      </a:solidFill>
-                    </a:lnB>
-                    <a:solidFill>
-                      <a:srgbClr val="F3F5F9"/>
-                    </a:solidFill>
-                  </a:tcPr>
-                </a:tc>
-                <a:tc>
-                  <a:txBody>
-                    <a:bodyPr/>
-                    <a:lstStyle/>
-                    <a:p>
-                      <a:r>
-                        <a:rPr sz="1300">
-                          <a:solidFill>
-                            <a:srgbClr val="202124"/>
-                          </a:solidFill>
-                          <a:latin typeface="Yu Gothic"/>
-                          <a:ea typeface="Yu Gothic"/>
-                          <a:cs typeface="Yu Gothic"/>
-                        </a:rPr>
-                        <a:t>■</a:t>
-                      </a:r>
-                    </a:p>
-                  </a:txBody>
-                  <a:tcPr anchor="ctr">
-                    <a:lnB w="9525" cap="flat">
-                      <a:solidFill>
-                        <a:srgbClr val="C8CDD6"/>
-                      </a:solidFill>
-                    </a:lnB>
-                    <a:solidFill>
-                      <a:srgbClr val="F3F5F9"/>
-                    </a:solidFill>
-                  </a:tcPr>
-                </a:tc>
-                <a:tc>
-                  <a:txBody>
-                    <a:bodyPr/>
-                    <a:lstStyle/>
-                    <a:p>
-                      <a:r>
-                        <a:rPr sz="1300">
-                          <a:solidFill>
-                            <a:srgbClr val="202124"/>
-                          </a:solidFill>
-                          <a:latin typeface="Yu Gothic"/>
-                          <a:ea typeface="Yu Gothic"/>
-                          <a:cs typeface="Yu Gothic"/>
-                        </a:rPr>
-                        <a:t/>
-                      </a:r>
-                    </a:p>
-                  </a:txBody>
-                  <a:tcPr anchor="ctr">
-                    <a:lnB w="9525" cap="flat">
-                      <a:solidFill>
-                        <a:srgbClr val="C8CDD6"/>
-                      </a:solidFill>
-                    </a:lnB>
-                    <a:solidFill>
-                      <a:srgbClr val="F3F5F9"/>
-                    </a:solidFill>
-                  </a:tcPr>
-                </a:tc>
-                <a:tc>
-                  <a:txBody>
-                    <a:bodyPr/>
-                    <a:lstStyle/>
-                    <a:p>
-                      <a:r>
-                        <a:rPr sz="1300">
-                          <a:solidFill>
-                            <a:srgbClr val="202124"/>
-                          </a:solidFill>
-                          <a:latin typeface="Yu Gothic"/>
-                          <a:ea typeface="Yu Gothic"/>
-                          <a:cs typeface="Yu Gothic"/>
-                        </a:rPr>
-                        <a:t/>
-                      </a:r>
-                    </a:p>
-                  </a:txBody>
-                  <a:tcPr anchor="ctr">
-                    <a:lnB w="9525" cap="flat">
-                      <a:solidFill>
-                        <a:srgbClr val="C8CDD6"/>
-                      </a:solidFill>
-                    </a:lnB>
-                    <a:solidFill>
-                      <a:srgbClr val="F3F5F9"/>
-                    </a:solidFill>
-                  </a:tcPr>
-                </a:tc>
-              </a:tr>
-              <a:tr h="731520">
-                <a:tc>
-                  <a:txBody>
-                    <a:bodyPr/>
-                    <a:lstStyle/>
-                    <a:p>
-                      <a:r>
-                        <a:rPr sz="1300">
-                          <a:solidFill>
-                            <a:srgbClr val="202124"/>
-                          </a:solidFill>
-                          <a:latin typeface="Yu Gothic"/>
-                          <a:ea typeface="Yu Gothic"/>
-                          <a:cs typeface="Yu Gothic"/>
-                        </a:rPr>
-                        <a:t>移行リハーサル</a:t>
-                      </a:r>
-                    </a:p>
-                  </a:txBody>
-                  <a:tcPr anchor="ctr">
-                    <a:lnB w="9525" cap="flat">
-                      <a:solidFill>
-                        <a:srgbClr val="C8CDD6"/>
-                      </a:solidFill>
-                    </a:lnB>
-                    <a:solidFill>
-                      <a:srgbClr val="FFFFFF"/>
-                    </a:solidFill>
-                  </a:tcPr>
-                </a:tc>
-                <a:tc>
-                  <a:txBody>
-                    <a:bodyPr/>
-                    <a:lstStyle/>
-                    <a:p>
-                      <a:r>
-                        <a:rPr sz="1300">
-                          <a:solidFill>
-                            <a:srgbClr val="202124"/>
-                          </a:solidFill>
-                          <a:latin typeface="Yu Gothic"/>
-                          <a:ea typeface="Yu Gothic"/>
-                          <a:cs typeface="Yu Gothic"/>
-                        </a:rPr>
-                        <a:t/>
-                      </a:r>
-                    </a:p>
-                  </a:txBody>
-                  <a:tcPr anchor="ctr">
-                    <a:lnB w="9525" cap="flat">
-                      <a:solidFill>
-                        <a:srgbClr val="C8CDD6"/>
-                      </a:solidFill>
-                    </a:lnB>
-                    <a:solidFill>
-                      <a:srgbClr val="FFFFFF"/>
-                    </a:solidFill>
-                  </a:tcPr>
-                </a:tc>
-                <a:tc>
-                  <a:txBody>
-                    <a:bodyPr/>
-                    <a:lstStyle/>
-                    <a:p>
-                      <a:r>
-                        <a:rPr sz="1300">
-                          <a:solidFill>
-                            <a:srgbClr val="202124"/>
-                          </a:solidFill>
-                          <a:latin typeface="Yu Gothic"/>
-                          <a:ea typeface="Yu Gothic"/>
-                          <a:cs typeface="Yu Gothic"/>
-                        </a:rPr>
-                        <a:t>■■</a:t>
-                      </a:r>
-                    </a:p>
-                  </a:txBody>
-                  <a:tcPr anchor="ctr">
-                    <a:lnB w="9525" cap="flat">
-                      <a:solidFill>
-                        <a:srgbClr val="C8CDD6"/>
-                      </a:solidFill>
-                    </a:lnB>
-                    <a:solidFill>
-                      <a:srgbClr val="FFFFFF"/>
-                    </a:solidFill>
-                  </a:tcPr>
-                </a:tc>
-                <a:tc>
-                  <a:txBody>
-                    <a:bodyPr/>
-                    <a:lstStyle/>
-                    <a:p>
-                      <a:r>
-                        <a:rPr sz="1300">
-                          <a:solidFill>
-                            <a:srgbClr val="202124"/>
-                          </a:solidFill>
-                          <a:latin typeface="Yu Gothic"/>
-                          <a:ea typeface="Yu Gothic"/>
-                          <a:cs typeface="Yu Gothic"/>
-                        </a:rPr>
-                        <a:t/>
-                      </a:r>
-                    </a:p>
-                  </a:txBody>
-                  <a:tcPr anchor="ctr">
-                    <a:lnB w="9525" cap="flat">
-                      <a:solidFill>
-                        <a:srgbClr val="C8CDD6"/>
-                      </a:solidFill>
-                    </a:lnB>
-                    <a:solidFill>
-                      <a:srgbClr val="FFFFFF"/>
-                    </a:solidFill>
-                  </a:tcPr>
-                </a:tc>
-                <a:tc>
-                  <a:txBody>
-                    <a:bodyPr/>
-                    <a:lstStyle/>
-                    <a:p>
-                      <a:r>
-                        <a:rPr sz="1300">
-                          <a:solidFill>
-                            <a:srgbClr val="202124"/>
-                          </a:solidFill>
-                          <a:latin typeface="Yu Gothic"/>
-                          <a:ea typeface="Yu Gothic"/>
-                          <a:cs typeface="Yu Gothic"/>
-                        </a:rPr>
-                        <a:t/>
-                      </a:r>
-                    </a:p>
-                  </a:txBody>
-                  <a:tcPr anchor="ctr">
-                    <a:lnB w="9525" cap="flat">
-                      <a:solidFill>
-                        <a:srgbClr val="C8CDD6"/>
-                      </a:solidFill>
-                    </a:lnB>
-                    <a:solidFill>
-                      <a:srgbClr val="FFFFFF"/>
-                    </a:solidFill>
-                  </a:tcPr>
-                </a:tc>
-              </a:tr>
-              <a:tr h="731520">
-                <a:tc>
-                  <a:txBody>
-                    <a:bodyPr/>
-                    <a:lstStyle/>
-                    <a:p>
-                      <a:r>
-                        <a:rPr sz="1300">
-                          <a:solidFill>
-                            <a:srgbClr val="202124"/>
-                          </a:solidFill>
-                          <a:latin typeface="Yu Gothic"/>
-                          <a:ea typeface="Yu Gothic"/>
-                          <a:cs typeface="Yu Gothic"/>
-                        </a:rPr>
-                        <a:t>本番移行</a:t>
-                      </a:r>
-                    </a:p>
-                  </a:txBody>
-                  <a:tcPr anchor="ctr">
-                    <a:lnB w="9525" cap="flat">
-                      <a:solidFill>
-                        <a:srgbClr val="C8CDD6"/>
-                      </a:solidFill>
-                    </a:lnB>
-                    <a:solidFill>
-                      <a:srgbClr val="F3F5F9"/>
-                    </a:solidFill>
-                  </a:tcPr>
-                </a:tc>
-                <a:tc>
-                  <a:txBody>
-                    <a:bodyPr/>
-                    <a:lstStyle/>
-                    <a:p>
-                      <a:r>
-                        <a:rPr sz="1300">
-                          <a:solidFill>
-                            <a:srgbClr val="202124"/>
-                          </a:solidFill>
-                          <a:latin typeface="Yu Gothic"/>
-                          <a:ea typeface="Yu Gothic"/>
-                          <a:cs typeface="Yu Gothic"/>
-                        </a:rPr>
-                        <a:t/>
-                      </a:r>
-                    </a:p>
-                  </a:txBody>
-                  <a:tcPr anchor="ctr">
-                    <a:lnB w="9525" cap="flat">
-                      <a:solidFill>
-                        <a:srgbClr val="C8CDD6"/>
-                      </a:solidFill>
-                    </a:lnB>
-                    <a:solidFill>
-                      <a:srgbClr val="F3F5F9"/>
-                    </a:solidFill>
-                  </a:tcPr>
-                </a:tc>
-                <a:tc>
-                  <a:txBody>
-                    <a:bodyPr/>
-                    <a:lstStyle/>
-                    <a:p>
-                      <a:r>
-                        <a:rPr sz="1300">
-                          <a:solidFill>
-                            <a:srgbClr val="202124"/>
-                          </a:solidFill>
-                          <a:latin typeface="Yu Gothic"/>
-                          <a:ea typeface="Yu Gothic"/>
-                          <a:cs typeface="Yu Gothic"/>
-                        </a:rPr>
-                        <a:t/>
-                      </a:r>
-                    </a:p>
-                  </a:txBody>
-                  <a:tcPr anchor="ctr">
-                    <a:lnB w="9525" cap="flat">
-                      <a:solidFill>
-                        <a:srgbClr val="C8CDD6"/>
-                      </a:solidFill>
-                    </a:lnB>
-                    <a:solidFill>
-                      <a:srgbClr val="F3F5F9"/>
-                    </a:solidFill>
-                  </a:tcPr>
-                </a:tc>
-                <a:tc>
-                  <a:txBody>
-                    <a:bodyPr/>
-                    <a:lstStyle/>
-                    <a:p>
-                      <a:r>
-                        <a:rPr sz="1300">
-                          <a:solidFill>
-                            <a:srgbClr val="202124"/>
-                          </a:solidFill>
-                          <a:latin typeface="Yu Gothic"/>
-                          <a:ea typeface="Yu Gothic"/>
-                          <a:cs typeface="Yu Gothic"/>
-                        </a:rPr>
-                        <a:t>■</a:t>
-                      </a:r>
-                    </a:p>
-                  </a:txBody>
-                  <a:tcPr anchor="ctr">
-                    <a:lnB w="9525" cap="flat">
-                      <a:solidFill>
-                        <a:srgbClr val="C8CDD6"/>
-                      </a:solidFill>
-                    </a:lnB>
-                    <a:solidFill>
-                      <a:srgbClr val="F3F5F9"/>
-                    </a:solidFill>
-                  </a:tcPr>
-                </a:tc>
-                <a:tc>
-                  <a:txBody>
-                    <a:bodyPr/>
-                    <a:lstStyle/>
-                    <a:p>
-                      <a:r>
-                        <a:rPr sz="1300">
-                          <a:solidFill>
-                            <a:srgbClr val="202124"/>
-                          </a:solidFill>
-                          <a:latin typeface="Yu Gothic"/>
-                          <a:ea typeface="Yu Gothic"/>
-                          <a:cs typeface="Yu Gothic"/>
-                        </a:rPr>
-                        <a:t/>
-                      </a:r>
-                    </a:p>
-                  </a:txBody>
-                  <a:tcPr anchor="ctr">
-                    <a:lnB w="9525" cap="flat">
-                      <a:solidFill>
-                        <a:srgbClr val="C8CDD6"/>
-                      </a:solidFill>
-                    </a:lnB>
-                    <a:solidFill>
-                      <a:srgbClr val="F3F5F9"/>
-                    </a:solidFill>
-                  </a:tcPr>
-                </a:tc>
-              </a:tr>
-              <a:tr h="731520">
-                <a:tc>
-                  <a:txBody>
-                    <a:bodyPr/>
-                    <a:lstStyle/>
-                    <a:p>
-                      <a:r>
-                        <a:rPr sz="1300">
-                          <a:solidFill>
-                            <a:srgbClr val="202124"/>
-                          </a:solidFill>
-                          <a:latin typeface="Yu Gothic"/>
-                          <a:ea typeface="Yu Gothic"/>
-                          <a:cs typeface="Yu Gothic"/>
-                        </a:rPr>
-                        <a:t>安定化・旧サーバ停止</a:t>
-                      </a:r>
-                    </a:p>
-                  </a:txBody>
-                  <a:tcPr anchor="ctr">
-                    <a:lnB w="9525" cap="flat">
-                      <a:solidFill>
-                        <a:srgbClr val="C8CDD6"/>
-                      </a:solidFill>
-                    </a:lnB>
-                    <a:solidFill>
-                      <a:srgbClr val="FFFFFF"/>
-                    </a:solidFill>
-                  </a:tcPr>
-                </a:tc>
-                <a:tc>
-                  <a:txBody>
-                    <a:bodyPr/>
-                    <a:lstStyle/>
-                    <a:p>
-                      <a:r>
-                        <a:rPr sz="1300">
-                          <a:solidFill>
-                            <a:srgbClr val="202124"/>
-                          </a:solidFill>
-                          <a:latin typeface="Yu Gothic"/>
-                          <a:ea typeface="Yu Gothic"/>
-                          <a:cs typeface="Yu Gothic"/>
-                        </a:rPr>
-                        <a:t/>
-                      </a:r>
-                    </a:p>
-                  </a:txBody>
-                  <a:tcPr anchor="ctr">
-                    <a:lnB w="9525" cap="flat">
-                      <a:solidFill>
-                        <a:srgbClr val="C8CDD6"/>
-                      </a:solidFill>
-                    </a:lnB>
-                    <a:solidFill>
-                      <a:srgbClr val="FFFFFF"/>
-                    </a:solidFill>
-                  </a:tcPr>
-                </a:tc>
-                <a:tc>
-                  <a:txBody>
-                    <a:bodyPr/>
-                    <a:lstStyle/>
-                    <a:p>
-                      <a:r>
-                        <a:rPr sz="1300">
-                          <a:solidFill>
-                            <a:srgbClr val="202124"/>
-                          </a:solidFill>
-                          <a:latin typeface="Yu Gothic"/>
-                          <a:ea typeface="Yu Gothic"/>
-                          <a:cs typeface="Yu Gothic"/>
-                        </a:rPr>
-                        <a:t/>
-                      </a:r>
-                    </a:p>
-                  </a:txBody>
-                  <a:tcPr anchor="ctr">
-                    <a:lnB w="9525" cap="flat">
-                      <a:solidFill>
-                        <a:srgbClr val="C8CDD6"/>
-                      </a:solidFill>
-                    </a:lnB>
-                    <a:solidFill>
-                      <a:srgbClr val="FFFFFF"/>
-                    </a:solidFill>
-                  </a:tcPr>
-                </a:tc>
-                <a:tc>
-                  <a:txBody>
-                    <a:bodyPr/>
-                    <a:lstStyle/>
-                    <a:p>
-                      <a:r>
-                        <a:rPr sz="1300">
-                          <a:solidFill>
-                            <a:srgbClr val="202124"/>
-                          </a:solidFill>
-                          <a:latin typeface="Yu Gothic"/>
-                          <a:ea typeface="Yu Gothic"/>
-                          <a:cs typeface="Yu Gothic"/>
-                        </a:rPr>
-                        <a:t>■</a:t>
-                      </a:r>
-                    </a:p>
-                  </a:txBody>
-                  <a:tcPr anchor="ctr">
-                    <a:lnB w="9525" cap="flat">
-                      <a:solidFill>
-                        <a:srgbClr val="C8CDD6"/>
-                      </a:solidFill>
-                    </a:lnB>
-                    <a:solidFill>
-                      <a:srgbClr val="FFFFFF"/>
-                    </a:solidFill>
-                  </a:tcPr>
-                </a:tc>
-                <a:tc>
-                  <a:txBody>
-                    <a:bodyPr/>
-                    <a:lstStyle/>
-                    <a:p>
-                      <a:r>
-                        <a:rPr sz="1300">
-                          <a:solidFill>
-                            <a:srgbClr val="202124"/>
-                          </a:solidFill>
-                          <a:latin typeface="Yu Gothic"/>
-                          <a:ea typeface="Yu Gothic"/>
-                          <a:cs typeface="Yu Gothic"/>
-                        </a:rPr>
-                        <a:t>■</a:t>
-                      </a:r>
-                    </a:p>
-                  </a:txBody>
-                  <a:tcPr anchor="ctr">
-                    <a:lnB w="9525" cap="flat">
-                      <a:solidFill>
-                        <a:srgbClr val="C8CDD6"/>
-                      </a:solidFill>
-                    </a:lnB>
-                    <a:solidFill>
-                      <a:srgbClr val="FFFFFF"/>
-                    </a:solidFill>
-                  </a:tcPr>
-                </a:tc>
-              </a:tr>
-            </a:tbl>
-          </a:graphicData>
-        </a:graphic>
-      </p:graphicFrame>
+        </p:nvGrpSpPr>
+        <p:grpSpPr>
+          <a:xfrm>
+            <a:off x="2505456" y="2066543"/>
+            <a:ext cx="2242565" cy="689457"/>
+            <a:chOff x="0" y="0"/>
+            <a:chExt cx="2242565" cy="689457"/>
+          </a:xfrm>
+        </p:grpSpPr>
+        <p:sp>
+          <p:nvSpPr>
+            <p:cNvPr id="13" name="Roadmap track 1 bar 1" descr="pptx-deck-generated"/>
+            <p:cNvSpPr/>
+            <p:nvPr/>
+          </p:nvSpPr>
+          <p:spPr>
+            <a:xfrm>
+              <a:off x="0" y="0"/>
+              <a:ext cx="2242565" cy="689457"/>
+            </a:xfrm>
+            <a:prstGeom prst="roundRect">
+              <a:avLst/>
+            </a:prstGeom>
+            <a:solidFill>
+              <a:schemeClr val="accent1"/>
+            </a:solidFill>
+          </p:spPr>
+          <p:style>
+            <a:lnRef idx="1">
+              <a:schemeClr val="accent1"/>
+            </a:lnRef>
+            <a:fillRef idx="3">
+              <a:schemeClr val="accent1"/>
+            </a:fillRef>
+            <a:effectRef idx="2">
+              <a:schemeClr val="accent1"/>
+            </a:effectRef>
+            <a:fontRef idx="minor">
+              <a:schemeClr val="lt1"/>
+            </a:fontRef>
+          </p:style>
+          <p:txBody>
+            <a:bodyPr rtlCol="0" anchor="ctr" wrap="square" lIns="82296" rIns="82296" tIns="36576" bIns="36576"/>
+            <a:lstStyle/>
+            <a:p>
+              <a:pPr algn="ctr">
+                <a:lnSpc>
+                  <a:spcPct val="100000"/>
+                </a:lnSpc>
+                <a:spcAft>
+                  <a:spcPts val="0"/>
+                </a:spcAft>
+              </a:pPr>
+              <a:r>
+                <a:rPr sz="1000" b="1">
+                  <a:solidFill>
+                    <a:schemeClr val="lt1"/>
+                  </a:solidFill>
+                  <a:latin typeface="Yu Gothic"/>
+                  <a:ea typeface="Yu Gothic"/>
+                </a:rPr>
+                <a:t>調査</a:t>
+              </a:r>
+            </a:p>
+          </p:txBody>
+        </p:sp>
+      </p:grpSp>
+      <p:sp>
+        <p:nvSpPr>
+          <p:cNvPr id="14" name="Roadmap track 2" descr="pptx-deck-generated"/>
+          <p:cNvSpPr txBox="1"/>
+          <p:nvPr/>
+        </p:nvSpPr>
+        <p:spPr>
+          <a:xfrm>
+            <a:off x="493776" y="2856585"/>
+            <a:ext cx="1920240" cy="780897"/>
+          </a:xfrm>
+          <a:prstGeom prst="rect">
+            <a:avLst/>
+          </a:prstGeom>
+          <a:noFill/>
+          <a:ln>
+            <a:noFill/>
+          </a:ln>
+        </p:spPr>
+        <p:txBody>
+          <a:bodyPr wrap="square" anchor="ctr" lIns="82296" rIns="82296" tIns="36576" bIns="36576">
+            <a:spAutoFit/>
+          </a:bodyPr>
+          <a:lstStyle/>
+          <a:p>
+            <a:pPr algn="l">
+              <a:lnSpc>
+                <a:spcPct val="100000"/>
+              </a:lnSpc>
+              <a:spcAft>
+                <a:spcPts val="0"/>
+              </a:spcAft>
+            </a:pPr>
+            <a:r>
+              <a:rPr sz="1000" b="1">
+                <a:solidFill>
+                  <a:schemeClr val="dk1"/>
+                </a:solidFill>
+                <a:latin typeface="Yu Gothic"/>
+                <a:ea typeface="Yu Gothic"/>
+              </a:rPr>
+              <a:t>検証環境構築</a:t>
+            </a:r>
+          </a:p>
+        </p:txBody>
+      </p:sp>
+      <p:grpSp>
+        <p:nvGrpSpPr>
+          <p:cNvPr id="15" name="Roadmap 11" descr="pptx-deck-generated"/>
+          <p:cNvGrpSpPr/>
+          <p:nvPr/>
+        </p:nvGrpSpPr>
+        <p:grpSpPr>
+          <a:xfrm>
+            <a:off x="2505456" y="2902305"/>
+            <a:ext cx="4558283" cy="689457"/>
+            <a:chOff x="0" y="0"/>
+            <a:chExt cx="4558283" cy="689457"/>
+          </a:xfrm>
+        </p:grpSpPr>
+        <p:sp>
+          <p:nvSpPr>
+            <p:cNvPr id="16" name="Roadmap track 2 bar 1" descr="pptx-deck-generated"/>
+            <p:cNvSpPr/>
+            <p:nvPr/>
+          </p:nvSpPr>
+          <p:spPr>
+            <a:xfrm>
+              <a:off x="0" y="0"/>
+              <a:ext cx="4558283" cy="689457"/>
+            </a:xfrm>
+            <a:prstGeom prst="roundRect">
+              <a:avLst/>
+            </a:prstGeom>
+            <a:solidFill>
+              <a:schemeClr val="accent1"/>
+            </a:solidFill>
+          </p:spPr>
+          <p:style>
+            <a:lnRef idx="1">
+              <a:schemeClr val="accent1"/>
+            </a:lnRef>
+            <a:fillRef idx="3">
+              <a:schemeClr val="accent1"/>
+            </a:fillRef>
+            <a:effectRef idx="2">
+              <a:schemeClr val="accent1"/>
+            </a:effectRef>
+            <a:fontRef idx="minor">
+              <a:schemeClr val="lt1"/>
+            </a:fontRef>
+          </p:style>
+          <p:txBody>
+            <a:bodyPr rtlCol="0" anchor="ctr" wrap="square" lIns="82296" rIns="82296" tIns="36576" bIns="36576"/>
+            <a:lstStyle/>
+            <a:p>
+              <a:pPr algn="ctr">
+                <a:lnSpc>
+                  <a:spcPct val="100000"/>
+                </a:lnSpc>
+                <a:spcAft>
+                  <a:spcPts val="0"/>
+                </a:spcAft>
+              </a:pPr>
+              <a:r>
+                <a:rPr sz="1000" b="1">
+                  <a:solidFill>
+                    <a:schemeClr val="lt1"/>
+                  </a:solidFill>
+                  <a:latin typeface="Yu Gothic"/>
+                  <a:ea typeface="Yu Gothic"/>
+                </a:rPr>
+                <a:t>構築</a:t>
+              </a:r>
+            </a:p>
+          </p:txBody>
+        </p:sp>
+      </p:grpSp>
+      <p:sp>
+        <p:nvSpPr>
+          <p:cNvPr id="17" name="Roadmap track 3" descr="pptx-deck-generated"/>
+          <p:cNvSpPr txBox="1"/>
+          <p:nvPr/>
+        </p:nvSpPr>
+        <p:spPr>
+          <a:xfrm>
+            <a:off x="493776" y="3692347"/>
+            <a:ext cx="1920240" cy="780897"/>
+          </a:xfrm>
+          <a:prstGeom prst="rect">
+            <a:avLst/>
+          </a:prstGeom>
+          <a:noFill/>
+          <a:ln>
+            <a:noFill/>
+          </a:ln>
+        </p:spPr>
+        <p:txBody>
+          <a:bodyPr wrap="square" anchor="ctr" lIns="82296" rIns="82296" tIns="36576" bIns="36576">
+            <a:spAutoFit/>
+          </a:bodyPr>
+          <a:lstStyle/>
+          <a:p>
+            <a:pPr algn="l">
+              <a:lnSpc>
+                <a:spcPct val="100000"/>
+              </a:lnSpc>
+              <a:spcAft>
+                <a:spcPts val="0"/>
+              </a:spcAft>
+            </a:pPr>
+            <a:r>
+              <a:rPr sz="1000" b="1">
+                <a:solidFill>
+                  <a:schemeClr val="dk1"/>
+                </a:solidFill>
+                <a:latin typeface="Yu Gothic"/>
+                <a:ea typeface="Yu Gothic"/>
+              </a:rPr>
+              <a:t>移行リハーサル</a:t>
+            </a:r>
+          </a:p>
+        </p:txBody>
+      </p:sp>
+      <p:grpSp>
+        <p:nvGrpSpPr>
+          <p:cNvPr id="18" name="Roadmap 21" descr="pptx-deck-generated"/>
+          <p:cNvGrpSpPr/>
+          <p:nvPr/>
+        </p:nvGrpSpPr>
+        <p:grpSpPr>
+          <a:xfrm>
+            <a:off x="4821174" y="3738067"/>
+            <a:ext cx="2242565" cy="689457"/>
+            <a:chOff x="0" y="0"/>
+            <a:chExt cx="2242565" cy="689457"/>
+          </a:xfrm>
+        </p:grpSpPr>
+        <p:sp>
+          <p:nvSpPr>
+            <p:cNvPr id="19" name="Roadmap track 3 bar 1" descr="pptx-deck-generated"/>
+            <p:cNvSpPr/>
+            <p:nvPr/>
+          </p:nvSpPr>
+          <p:spPr>
+            <a:xfrm>
+              <a:off x="0" y="0"/>
+              <a:ext cx="2242565" cy="689457"/>
+            </a:xfrm>
+            <a:prstGeom prst="roundRect">
+              <a:avLst/>
+            </a:prstGeom>
+            <a:solidFill>
+              <a:schemeClr val="accent1"/>
+            </a:solidFill>
+          </p:spPr>
+          <p:style>
+            <a:lnRef idx="1">
+              <a:schemeClr val="accent1"/>
+            </a:lnRef>
+            <a:fillRef idx="3">
+              <a:schemeClr val="accent1"/>
+            </a:fillRef>
+            <a:effectRef idx="2">
+              <a:schemeClr val="accent1"/>
+            </a:effectRef>
+            <a:fontRef idx="minor">
+              <a:schemeClr val="lt1"/>
+            </a:fontRef>
+          </p:style>
+          <p:txBody>
+            <a:bodyPr rtlCol="0" anchor="ctr" wrap="square" lIns="82296" rIns="82296" tIns="36576" bIns="36576"/>
+            <a:lstStyle/>
+            <a:p>
+              <a:pPr algn="ctr">
+                <a:lnSpc>
+                  <a:spcPct val="100000"/>
+                </a:lnSpc>
+                <a:spcAft>
+                  <a:spcPts val="0"/>
+                </a:spcAft>
+              </a:pPr>
+              <a:r>
+                <a:rPr sz="1000" b="1">
+                  <a:solidFill>
+                    <a:schemeClr val="lt1"/>
+                  </a:solidFill>
+                  <a:latin typeface="Yu Gothic"/>
+                  <a:ea typeface="Yu Gothic"/>
+                </a:rPr>
+                <a:t>2回</a:t>
+              </a:r>
+            </a:p>
+          </p:txBody>
+        </p:sp>
+      </p:grpSp>
+      <p:sp>
+        <p:nvSpPr>
+          <p:cNvPr id="20" name="Roadmap track 4" descr="pptx-deck-generated"/>
+          <p:cNvSpPr txBox="1"/>
+          <p:nvPr/>
+        </p:nvSpPr>
+        <p:spPr>
+          <a:xfrm>
+            <a:off x="493776" y="4528108"/>
+            <a:ext cx="1920240" cy="780897"/>
+          </a:xfrm>
+          <a:prstGeom prst="rect">
+            <a:avLst/>
+          </a:prstGeom>
+          <a:noFill/>
+          <a:ln>
+            <a:noFill/>
+          </a:ln>
+        </p:spPr>
+        <p:txBody>
+          <a:bodyPr wrap="square" anchor="ctr" lIns="82296" rIns="82296" tIns="36576" bIns="36576">
+            <a:spAutoFit/>
+          </a:bodyPr>
+          <a:lstStyle/>
+          <a:p>
+            <a:pPr algn="l">
+              <a:lnSpc>
+                <a:spcPct val="100000"/>
+              </a:lnSpc>
+              <a:spcAft>
+                <a:spcPts val="0"/>
+              </a:spcAft>
+            </a:pPr>
+            <a:r>
+              <a:rPr sz="1000" b="1">
+                <a:solidFill>
+                  <a:schemeClr val="dk1"/>
+                </a:solidFill>
+                <a:latin typeface="Yu Gothic"/>
+                <a:ea typeface="Yu Gothic"/>
+              </a:rPr>
+              <a:t>本番移行</a:t>
+            </a:r>
+          </a:p>
+        </p:txBody>
+      </p:sp>
+      <p:grpSp>
+        <p:nvGrpSpPr>
+          <p:cNvPr id="21" name="Roadmap 31" descr="pptx-deck-generated"/>
+          <p:cNvGrpSpPr/>
+          <p:nvPr/>
+        </p:nvGrpSpPr>
+        <p:grpSpPr>
+          <a:xfrm>
+            <a:off x="7136892" y="4573828"/>
+            <a:ext cx="2242565" cy="689457"/>
+            <a:chOff x="0" y="0"/>
+            <a:chExt cx="2242565" cy="689457"/>
+          </a:xfrm>
+        </p:grpSpPr>
+        <p:sp>
+          <p:nvSpPr>
+            <p:cNvPr id="22" name="Roadmap track 4 bar 1" descr="pptx-deck-generated"/>
+            <p:cNvSpPr/>
+            <p:nvPr/>
+          </p:nvSpPr>
+          <p:spPr>
+            <a:xfrm>
+              <a:off x="0" y="0"/>
+              <a:ext cx="2242565" cy="689457"/>
+            </a:xfrm>
+            <a:prstGeom prst="roundRect">
+              <a:avLst/>
+            </a:prstGeom>
+            <a:solidFill>
+              <a:schemeClr val="accent2"/>
+            </a:solidFill>
+          </p:spPr>
+          <p:style>
+            <a:lnRef idx="1">
+              <a:schemeClr val="accent1"/>
+            </a:lnRef>
+            <a:fillRef idx="3">
+              <a:schemeClr val="accent1"/>
+            </a:fillRef>
+            <a:effectRef idx="2">
+              <a:schemeClr val="accent1"/>
+            </a:effectRef>
+            <a:fontRef idx="minor">
+              <a:schemeClr val="lt1"/>
+            </a:fontRef>
+          </p:style>
+          <p:txBody>
+            <a:bodyPr rtlCol="0" anchor="ctr" wrap="square" lIns="82296" rIns="82296" tIns="36576" bIns="36576"/>
+            <a:lstStyle/>
+            <a:p>
+              <a:pPr algn="ctr">
+                <a:lnSpc>
+                  <a:spcPct val="100000"/>
+                </a:lnSpc>
+                <a:spcAft>
+                  <a:spcPts val="0"/>
+                </a:spcAft>
+              </a:pPr>
+              <a:r>
+                <a:rPr sz="1000" b="1">
+                  <a:solidFill>
+                    <a:schemeClr val="lt1"/>
+                  </a:solidFill>
+                  <a:latin typeface="Yu Gothic"/>
+                  <a:ea typeface="Yu Gothic"/>
+                </a:rPr>
+                <a:t>本番</a:t>
+              </a:r>
+            </a:p>
+          </p:txBody>
+        </p:sp>
+      </p:grpSp>
+      <p:sp>
+        <p:nvSpPr>
+          <p:cNvPr id="23" name="Roadmap track 5" descr="pptx-deck-generated"/>
+          <p:cNvSpPr txBox="1"/>
+          <p:nvPr/>
+        </p:nvSpPr>
+        <p:spPr>
+          <a:xfrm>
+            <a:off x="493776" y="5363870"/>
+            <a:ext cx="1920240" cy="780897"/>
+          </a:xfrm>
+          <a:prstGeom prst="rect">
+            <a:avLst/>
+          </a:prstGeom>
+          <a:noFill/>
+          <a:ln>
+            <a:noFill/>
+          </a:ln>
+        </p:spPr>
+        <p:txBody>
+          <a:bodyPr wrap="square" anchor="ctr" lIns="82296" rIns="82296" tIns="36576" bIns="36576">
+            <a:spAutoFit/>
+          </a:bodyPr>
+          <a:lstStyle/>
+          <a:p>
+            <a:pPr algn="l">
+              <a:lnSpc>
+                <a:spcPct val="100000"/>
+              </a:lnSpc>
+              <a:spcAft>
+                <a:spcPts val="0"/>
+              </a:spcAft>
+            </a:pPr>
+            <a:r>
+              <a:rPr sz="1000" b="1">
+                <a:solidFill>
+                  <a:schemeClr val="dk1"/>
+                </a:solidFill>
+                <a:latin typeface="Yu Gothic"/>
+                <a:ea typeface="Yu Gothic"/>
+              </a:rPr>
+              <a:t>安定化・旧サーバ停止</a:t>
+            </a:r>
+          </a:p>
+        </p:txBody>
+      </p:sp>
+      <p:grpSp>
+        <p:nvGrpSpPr>
+          <p:cNvPr id="24" name="Roadmap 41" descr="pptx-deck-generated"/>
+          <p:cNvGrpSpPr/>
+          <p:nvPr/>
+        </p:nvGrpSpPr>
+        <p:grpSpPr>
+          <a:xfrm>
+            <a:off x="7136892" y="5409590"/>
+            <a:ext cx="4558283" cy="689457"/>
+            <a:chOff x="0" y="0"/>
+            <a:chExt cx="4558283" cy="689457"/>
+          </a:xfrm>
+        </p:grpSpPr>
+        <p:sp>
+          <p:nvSpPr>
+            <p:cNvPr id="25" name="Roadmap track 5 bar 1" descr="pptx-deck-generated"/>
+            <p:cNvSpPr/>
+            <p:nvPr/>
+          </p:nvSpPr>
+          <p:spPr>
+            <a:xfrm>
+              <a:off x="0" y="0"/>
+              <a:ext cx="4558283" cy="689457"/>
+            </a:xfrm>
+            <a:prstGeom prst="roundRect">
+              <a:avLst/>
+            </a:prstGeom>
+            <a:solidFill>
+              <a:schemeClr val="accent1"/>
+            </a:solidFill>
+          </p:spPr>
+          <p:style>
+            <a:lnRef idx="1">
+              <a:schemeClr val="accent1"/>
+            </a:lnRef>
+            <a:fillRef idx="3">
+              <a:schemeClr val="accent1"/>
+            </a:fillRef>
+            <a:effectRef idx="2">
+              <a:schemeClr val="accent1"/>
+            </a:effectRef>
+            <a:fontRef idx="minor">
+              <a:schemeClr val="lt1"/>
+            </a:fontRef>
+          </p:style>
+          <p:txBody>
+            <a:bodyPr rtlCol="0" anchor="ctr" wrap="square" lIns="82296" rIns="82296" tIns="36576" bIns="36576"/>
+            <a:lstStyle/>
+            <a:p>
+              <a:pPr algn="ctr">
+                <a:lnSpc>
+                  <a:spcPct val="100000"/>
+                </a:lnSpc>
+                <a:spcAft>
+                  <a:spcPts val="0"/>
+                </a:spcAft>
+              </a:pPr>
+              <a:r>
+                <a:rPr sz="1000" b="1">
+                  <a:solidFill>
+                    <a:schemeClr val="lt1"/>
+                  </a:solidFill>
+                  <a:latin typeface="Yu Gothic"/>
+                  <a:ea typeface="Yu Gothic"/>
+                </a:rPr>
+                <a:t>安定化</a:t>
+              </a:r>
+            </a:p>
+          </p:txBody>
+        </p:sp>
+      </p:grpSp>
     </p:spTree>
   </p:cSld>
   <p:clrMapOvr>
@@ -8157,40 +9110,607 @@
       </p:sp>
       <p:sp>
         <p:nvSpPr>
-          <p:cNvPr id="3" name="Content Placeholder 2"/>
-          <p:cNvSpPr>
-            <a:spLocks noGrp="1"/>
-          </p:cNvSpPr>
-          <p:nvPr>
-            <p:ph idx="1"/>
-          </p:nvPr>
+          <p:cNvPr id="3" name="Component takeaway" descr="pptx-deck-generated"/>
+          <p:cNvSpPr/>
+          <p:nvPr/>
         </p:nvSpPr>
         <p:spPr>
           <a:xfrm>
-            <a:off x="457200" y="1600200"/>
-            <a:ext cx="11274552" cy="4525963"/>
+            <a:off x="457200" y="5660136"/>
+            <a:ext cx="11274552" cy="512064"/>
           </a:xfrm>
+          <a:prstGeom prst="roundRect">
+            <a:avLst/>
+          </a:prstGeom>
+          <a:solidFill>
+            <a:schemeClr val="accent1">
+              <a:lumMod val="15000"/>
+              <a:lumOff val="85000"/>
+            </a:schemeClr>
+          </a:solidFill>
+          <a:ln w="9525">
+            <a:solidFill>
+              <a:schemeClr val="lt1">
+                <a:lumMod val="85000"/>
+              </a:schemeClr>
+            </a:solidFill>
+          </a:ln>
         </p:spPr>
-        <p:txBody>
-          <a:bodyPr/>
+        <p:style>
+          <a:lnRef idx="1">
+            <a:schemeClr val="accent1"/>
+          </a:lnRef>
+          <a:fillRef idx="3">
+            <a:schemeClr val="accent1"/>
+          </a:fillRef>
+          <a:effectRef idx="2">
+            <a:schemeClr val="accent1"/>
+          </a:effectRef>
+          <a:fontRef idx="minor">
+            <a:schemeClr val="lt1"/>
+          </a:fontRef>
+        </p:style>
+        <p:txBody>
+          <a:bodyPr rtlCol="0" anchor="ctr"/>
           <a:lstStyle/>
           <a:p>
-            <a:r>
-              <a:t>判定項目: ログイン・チケット表示・添付取得・通知メール</a:t>
-            </a:r>
-          </a:p>
-          <a:p>
-            <a:r>
-              <a:t>不合格ならDNSを旧サーバへ戻し、旧DBで業務を再開</a:t>
-            </a:r>
-          </a:p>
-          <a:p>
-            <a:r>
+            <a:pPr algn="ctr"/>
+          </a:p>
+        </p:txBody>
+      </p:sp>
+      <p:sp>
+        <p:nvSpPr>
+          <p:cNvPr id="4" name="Takeaway accent" descr="pptx-deck-generated"/>
+          <p:cNvSpPr/>
+          <p:nvPr/>
+        </p:nvSpPr>
+        <p:spPr>
+          <a:xfrm>
+            <a:off x="457200" y="5660136"/>
+            <a:ext cx="82296" cy="512064"/>
+          </a:xfrm>
+          <a:prstGeom prst="rect">
+            <a:avLst/>
+          </a:prstGeom>
+          <a:solidFill>
+            <a:schemeClr val="accent1"/>
+          </a:solidFill>
+        </p:spPr>
+        <p:style>
+          <a:lnRef idx="1">
+            <a:schemeClr val="accent1"/>
+          </a:lnRef>
+          <a:fillRef idx="3">
+            <a:schemeClr val="accent1"/>
+          </a:fillRef>
+          <a:effectRef idx="2">
+            <a:schemeClr val="accent1"/>
+          </a:effectRef>
+          <a:fontRef idx="minor">
+            <a:schemeClr val="lt1"/>
+          </a:fontRef>
+        </p:style>
+        <p:txBody>
+          <a:bodyPr rtlCol="0" anchor="ctr"/>
+          <a:lstStyle/>
+          <a:p>
+            <a:pPr algn="ctr"/>
+          </a:p>
+        </p:txBody>
+      </p:sp>
+      <p:sp>
+        <p:nvSpPr>
+          <p:cNvPr id="5" name="Takeaway text" descr="pptx-deck-generated"/>
+          <p:cNvSpPr txBox="1"/>
+          <p:nvPr/>
+        </p:nvSpPr>
+        <p:spPr>
+          <a:xfrm>
+            <a:off x="603504" y="5687568"/>
+            <a:ext cx="11073384" cy="457200"/>
+          </a:xfrm>
+          <a:prstGeom prst="rect">
+            <a:avLst/>
+          </a:prstGeom>
+          <a:noFill/>
+          <a:ln>
+            <a:noFill/>
+          </a:ln>
+        </p:spPr>
+        <p:txBody>
+          <a:bodyPr wrap="square" anchor="ctr" lIns="82296" rIns="82296" tIns="36576" bIns="36576">
+            <a:spAutoFit/>
+          </a:bodyPr>
+          <a:lstStyle/>
+          <a:p>
+            <a:pPr algn="l">
+              <a:lnSpc>
+                <a:spcPct val="100000"/>
+              </a:lnSpc>
+              <a:spcAft>
+                <a:spcPts val="0"/>
+              </a:spcAft>
+            </a:pPr>
+            <a:r>
+              <a:rPr sz="1200" b="1">
+                <a:solidFill>
+                  <a:schemeClr val="dk1"/>
+                </a:solidFill>
+                <a:latin typeface="Yu Gothic"/>
+                <a:ea typeface="Yu Gothic"/>
+              </a:rPr>
               <a:t>旧サーバは1月末まで停止せず保全する</a:t>
             </a:r>
           </a:p>
         </p:txBody>
       </p:sp>
+      <p:grpSp>
+        <p:nvGrpSpPr>
+          <p:cNvPr id="6" name="Process 1" descr="pptx-deck-generated"/>
+          <p:cNvGrpSpPr/>
+          <p:nvPr/>
+        </p:nvGrpSpPr>
+        <p:grpSpPr>
+          <a:xfrm>
+            <a:off x="457200" y="1664207"/>
+            <a:ext cx="3575304" cy="3867912"/>
+            <a:chOff x="0" y="0"/>
+            <a:chExt cx="3575304" cy="3867912"/>
+          </a:xfrm>
+        </p:grpSpPr>
+        <p:sp>
+          <p:nvSpPr>
+            <p:cNvPr id="7" name="Process 1 box" descr="pptx-deck-generated"/>
+            <p:cNvSpPr/>
+            <p:nvPr/>
+          </p:nvSpPr>
+          <p:spPr>
+            <a:xfrm>
+              <a:off x="0" y="0"/>
+              <a:ext cx="3575304" cy="1097280"/>
+            </a:xfrm>
+            <a:prstGeom prst="roundRect">
+              <a:avLst/>
+            </a:prstGeom>
+            <a:solidFill>
+              <a:schemeClr val="accent1">
+                <a:lumMod val="15000"/>
+                <a:lumOff val="85000"/>
+              </a:schemeClr>
+            </a:solidFill>
+            <a:ln w="9525">
+              <a:solidFill>
+                <a:schemeClr val="accent1"/>
+              </a:solidFill>
+            </a:ln>
+          </p:spPr>
+          <p:style>
+            <a:lnRef idx="1">
+              <a:schemeClr val="accent1"/>
+            </a:lnRef>
+            <a:fillRef idx="3">
+              <a:schemeClr val="accent1"/>
+            </a:fillRef>
+            <a:effectRef idx="2">
+              <a:schemeClr val="accent1"/>
+            </a:effectRef>
+            <a:fontRef idx="minor">
+              <a:schemeClr val="lt1"/>
+            </a:fontRef>
+          </p:style>
+          <p:txBody>
+            <a:bodyPr rtlCol="0" anchor="ctr" wrap="square" lIns="82296" rIns="82296" tIns="36576" bIns="36576"/>
+            <a:lstStyle/>
+            <a:p>
+              <a:pPr algn="ctr">
+                <a:lnSpc>
+                  <a:spcPct val="100000"/>
+                </a:lnSpc>
+                <a:spcAft>
+                  <a:spcPts val="0"/>
+                </a:spcAft>
+              </a:pPr>
+              <a:r>
+                <a:rPr sz="1200" b="1">
+                  <a:solidFill>
+                    <a:schemeClr val="dk1"/>
+                  </a:solidFill>
+                  <a:latin typeface="Yu Gothic"/>
+                  <a:ea typeface="Yu Gothic"/>
+                </a:rPr>
+                <a:t>15:00 判定</a:t>
+              </a:r>
+            </a:p>
+          </p:txBody>
+        </p:sp>
+        <p:sp>
+          <p:nvSpPr>
+            <p:cNvPr id="8" name="Process 1 detail" descr="pptx-deck-generated"/>
+            <p:cNvSpPr txBox="1"/>
+            <p:nvPr/>
+          </p:nvSpPr>
+          <p:spPr>
+            <a:xfrm>
+              <a:off x="36576" y="1152145"/>
+              <a:ext cx="3502152" cy="2715767"/>
+            </a:xfrm>
+            <a:prstGeom prst="rect">
+              <a:avLst/>
+            </a:prstGeom>
+            <a:noFill/>
+            <a:ln>
+              <a:noFill/>
+            </a:ln>
+          </p:spPr>
+          <p:txBody>
+            <a:bodyPr wrap="square" anchor="ctr" lIns="82296" rIns="82296" tIns="36576" bIns="36576">
+              <a:spAutoFit/>
+            </a:bodyPr>
+            <a:lstStyle/>
+            <a:p>
+              <a:pPr algn="ctr">
+                <a:lnSpc>
+                  <a:spcPct val="100000"/>
+                </a:lnSpc>
+                <a:spcAft>
+                  <a:spcPts val="0"/>
+                </a:spcAft>
+              </a:pPr>
+              <a:r>
+                <a:rPr sz="1000" b="0">
+                  <a:solidFill>
+                    <a:schemeClr val="dk1">
+                      <a:lumMod val="65000"/>
+                      <a:lumOff val="35000"/>
+                    </a:schemeClr>
+                  </a:solidFill>
+                  <a:latin typeface="Yu Gothic"/>
+                  <a:ea typeface="Yu Gothic"/>
+                </a:rPr>
+                <a:t>• ログイン・チケット表示・添付取得・通知メール</a:t>
+              </a:r>
+            </a:p>
+          </p:txBody>
+        </p:sp>
+      </p:grpSp>
+      <p:sp>
+        <p:nvSpPr>
+          <p:cNvPr id="9" name="Process arrow 1" descr="pptx-deck-generated"/>
+          <p:cNvSpPr/>
+          <p:nvPr/>
+        </p:nvSpPr>
+        <p:spPr>
+          <a:xfrm>
+            <a:off x="4059936" y="1965960"/>
+            <a:ext cx="237744" cy="310896"/>
+          </a:xfrm>
+          <a:prstGeom prst="rightArrow">
+            <a:avLst/>
+          </a:prstGeom>
+          <a:solidFill>
+            <a:schemeClr val="accent1"/>
+          </a:solidFill>
+        </p:spPr>
+        <p:style>
+          <a:lnRef idx="1">
+            <a:schemeClr val="accent1"/>
+          </a:lnRef>
+          <a:fillRef idx="3">
+            <a:schemeClr val="accent1"/>
+          </a:fillRef>
+          <a:effectRef idx="2">
+            <a:schemeClr val="accent1"/>
+          </a:effectRef>
+          <a:fontRef idx="minor">
+            <a:schemeClr val="lt1"/>
+          </a:fontRef>
+        </p:style>
+        <p:txBody>
+          <a:bodyPr rtlCol="0" anchor="ctr"/>
+          <a:lstStyle/>
+          <a:p>
+            <a:pPr algn="ctr"/>
+          </a:p>
+        </p:txBody>
+      </p:sp>
+      <p:grpSp>
+        <p:nvGrpSpPr>
+          <p:cNvPr id="10" name="Process 2" descr="pptx-deck-generated"/>
+          <p:cNvGrpSpPr/>
+          <p:nvPr/>
+        </p:nvGrpSpPr>
+        <p:grpSpPr>
+          <a:xfrm>
+            <a:off x="4306824" y="1664207"/>
+            <a:ext cx="3575304" cy="3867912"/>
+            <a:chOff x="0" y="0"/>
+            <a:chExt cx="3575304" cy="3867912"/>
+          </a:xfrm>
+        </p:grpSpPr>
+        <p:sp>
+          <p:nvSpPr>
+            <p:cNvPr id="11" name="Process 2 box" descr="pptx-deck-generated"/>
+            <p:cNvSpPr/>
+            <p:nvPr/>
+          </p:nvSpPr>
+          <p:spPr>
+            <a:xfrm>
+              <a:off x="0" y="0"/>
+              <a:ext cx="3575304" cy="1097280"/>
+            </a:xfrm>
+            <a:prstGeom prst="roundRect">
+              <a:avLst/>
+            </a:prstGeom>
+            <a:solidFill>
+              <a:schemeClr val="accent1">
+                <a:lumMod val="15000"/>
+                <a:lumOff val="85000"/>
+              </a:schemeClr>
+            </a:solidFill>
+            <a:ln w="9525">
+              <a:solidFill>
+                <a:schemeClr val="accent1"/>
+              </a:solidFill>
+            </a:ln>
+          </p:spPr>
+          <p:style>
+            <a:lnRef idx="1">
+              <a:schemeClr val="accent1"/>
+            </a:lnRef>
+            <a:fillRef idx="3">
+              <a:schemeClr val="accent1"/>
+            </a:fillRef>
+            <a:effectRef idx="2">
+              <a:schemeClr val="accent1"/>
+            </a:effectRef>
+            <a:fontRef idx="minor">
+              <a:schemeClr val="lt1"/>
+            </a:fontRef>
+          </p:style>
+          <p:txBody>
+            <a:bodyPr rtlCol="0" anchor="ctr" wrap="square" lIns="82296" rIns="82296" tIns="36576" bIns="36576"/>
+            <a:lstStyle/>
+            <a:p>
+              <a:pPr algn="ctr">
+                <a:lnSpc>
+                  <a:spcPct val="100000"/>
+                </a:lnSpc>
+                <a:spcAft>
+                  <a:spcPts val="0"/>
+                </a:spcAft>
+              </a:pPr>
+              <a:r>
+                <a:rPr sz="1200" b="1">
+                  <a:solidFill>
+                    <a:schemeClr val="dk1"/>
+                  </a:solidFill>
+                  <a:latin typeface="Yu Gothic"/>
+                  <a:ea typeface="Yu Gothic"/>
+                </a:rPr>
+                <a:t>不合格なら</a:t>
+              </a:r>
+            </a:p>
+          </p:txBody>
+        </p:sp>
+        <p:sp>
+          <p:nvSpPr>
+            <p:cNvPr id="12" name="Process 2 detail" descr="pptx-deck-generated"/>
+            <p:cNvSpPr txBox="1"/>
+            <p:nvPr/>
+          </p:nvSpPr>
+          <p:spPr>
+            <a:xfrm>
+              <a:off x="36576" y="1152145"/>
+              <a:ext cx="3502152" cy="2715767"/>
+            </a:xfrm>
+            <a:prstGeom prst="rect">
+              <a:avLst/>
+            </a:prstGeom>
+            <a:noFill/>
+            <a:ln>
+              <a:noFill/>
+            </a:ln>
+          </p:spPr>
+          <p:txBody>
+            <a:bodyPr wrap="square" anchor="ctr" lIns="82296" rIns="82296" tIns="36576" bIns="36576">
+              <a:spAutoFit/>
+            </a:bodyPr>
+            <a:lstStyle/>
+            <a:p>
+              <a:pPr algn="ctr">
+                <a:lnSpc>
+                  <a:spcPct val="100000"/>
+                </a:lnSpc>
+                <a:spcAft>
+                  <a:spcPts val="0"/>
+                </a:spcAft>
+              </a:pPr>
+              <a:r>
+                <a:rPr sz="1000" b="0">
+                  <a:solidFill>
+                    <a:schemeClr val="dk1">
+                      <a:lumMod val="65000"/>
+                      <a:lumOff val="35000"/>
+                    </a:schemeClr>
+                  </a:solidFill>
+                  <a:latin typeface="Yu Gothic"/>
+                  <a:ea typeface="Yu Gothic"/>
+                </a:rPr>
+                <a:t>• DNSを旧サーバへ戻す</a:t>
+              </a:r>
+            </a:p>
+          </p:txBody>
+        </p:sp>
+      </p:grpSp>
+      <p:sp>
+        <p:nvSpPr>
+          <p:cNvPr id="13" name="Process arrow 2" descr="pptx-deck-generated"/>
+          <p:cNvSpPr/>
+          <p:nvPr/>
+        </p:nvSpPr>
+        <p:spPr>
+          <a:xfrm>
+            <a:off x="7909560" y="1965960"/>
+            <a:ext cx="237744" cy="310896"/>
+          </a:xfrm>
+          <a:prstGeom prst="rightArrow">
+            <a:avLst/>
+          </a:prstGeom>
+          <a:solidFill>
+            <a:schemeClr val="accent1"/>
+          </a:solidFill>
+        </p:spPr>
+        <p:style>
+          <a:lnRef idx="1">
+            <a:schemeClr val="accent1"/>
+          </a:lnRef>
+          <a:fillRef idx="3">
+            <a:schemeClr val="accent1"/>
+          </a:fillRef>
+          <a:effectRef idx="2">
+            <a:schemeClr val="accent1"/>
+          </a:effectRef>
+          <a:fontRef idx="minor">
+            <a:schemeClr val="lt1"/>
+          </a:fontRef>
+        </p:style>
+        <p:txBody>
+          <a:bodyPr rtlCol="0" anchor="ctr"/>
+          <a:lstStyle/>
+          <a:p>
+            <a:pPr algn="ctr"/>
+          </a:p>
+        </p:txBody>
+      </p:sp>
+      <p:grpSp>
+        <p:nvGrpSpPr>
+          <p:cNvPr id="14" name="Process 3" descr="pptx-deck-generated"/>
+          <p:cNvGrpSpPr/>
+          <p:nvPr/>
+        </p:nvGrpSpPr>
+        <p:grpSpPr>
+          <a:xfrm>
+            <a:off x="8156448" y="1664207"/>
+            <a:ext cx="3575304" cy="3867912"/>
+            <a:chOff x="0" y="0"/>
+            <a:chExt cx="3575304" cy="3867912"/>
+          </a:xfrm>
+        </p:grpSpPr>
+        <p:sp>
+          <p:nvSpPr>
+            <p:cNvPr id="15" name="Process 3 box" descr="pptx-deck-generated"/>
+            <p:cNvSpPr/>
+            <p:nvPr/>
+          </p:nvSpPr>
+          <p:spPr>
+            <a:xfrm>
+              <a:off x="0" y="0"/>
+              <a:ext cx="3575304" cy="1097280"/>
+            </a:xfrm>
+            <a:prstGeom prst="roundRect">
+              <a:avLst/>
+            </a:prstGeom>
+            <a:solidFill>
+              <a:schemeClr val="accent1">
+                <a:lumMod val="15000"/>
+                <a:lumOff val="85000"/>
+              </a:schemeClr>
+            </a:solidFill>
+            <a:ln w="9525">
+              <a:solidFill>
+                <a:schemeClr val="accent1"/>
+              </a:solidFill>
+            </a:ln>
+          </p:spPr>
+          <p:style>
+            <a:lnRef idx="1">
+              <a:schemeClr val="accent1"/>
+            </a:lnRef>
+            <a:fillRef idx="3">
+              <a:schemeClr val="accent1"/>
+            </a:fillRef>
+            <a:effectRef idx="2">
+              <a:schemeClr val="accent1"/>
+            </a:effectRef>
+            <a:fontRef idx="minor">
+              <a:schemeClr val="lt1"/>
+            </a:fontRef>
+          </p:style>
+          <p:txBody>
+            <a:bodyPr rtlCol="0" anchor="ctr" wrap="square" lIns="82296" rIns="82296" tIns="36576" bIns="36576"/>
+            <a:lstStyle/>
+            <a:p>
+              <a:pPr algn="ctr">
+                <a:lnSpc>
+                  <a:spcPct val="100000"/>
+                </a:lnSpc>
+                <a:spcAft>
+                  <a:spcPts val="0"/>
+                </a:spcAft>
+              </a:pPr>
+              <a:r>
+                <a:rPr sz="1200" b="1">
+                  <a:solidFill>
+                    <a:schemeClr val="dk1"/>
+                  </a:solidFill>
+                  <a:latin typeface="Yu Gothic"/>
+                  <a:ea typeface="Yu Gothic"/>
+                </a:rPr>
+                <a:t>業務再開</a:t>
+              </a:r>
+            </a:p>
+          </p:txBody>
+        </p:sp>
+        <p:sp>
+          <p:nvSpPr>
+            <p:cNvPr id="16" name="Process 3 detail" descr="pptx-deck-generated"/>
+            <p:cNvSpPr txBox="1"/>
+            <p:nvPr/>
+          </p:nvSpPr>
+          <p:spPr>
+            <a:xfrm>
+              <a:off x="36575" y="1152145"/>
+              <a:ext cx="3502152" cy="2715767"/>
+            </a:xfrm>
+            <a:prstGeom prst="rect">
+              <a:avLst/>
+            </a:prstGeom>
+            <a:noFill/>
+            <a:ln>
+              <a:noFill/>
+            </a:ln>
+          </p:spPr>
+          <p:txBody>
+            <a:bodyPr wrap="square" anchor="ctr" lIns="82296" rIns="82296" tIns="36576" bIns="36576">
+              <a:spAutoFit/>
+            </a:bodyPr>
+            <a:lstStyle/>
+            <a:p>
+              <a:pPr algn="ctr">
+                <a:lnSpc>
+                  <a:spcPct val="100000"/>
+                </a:lnSpc>
+                <a:spcAft>
+                  <a:spcPts val="0"/>
+                </a:spcAft>
+              </a:pPr>
+              <a:r>
+                <a:rPr sz="1000" b="0">
+                  <a:solidFill>
+                    <a:schemeClr val="dk1">
+                      <a:lumMod val="65000"/>
+                      <a:lumOff val="35000"/>
+                    </a:schemeClr>
+                  </a:solidFill>
+                  <a:latin typeface="Yu Gothic"/>
+                  <a:ea typeface="Yu Gothic"/>
+                </a:rPr>
+                <a:t>• 旧DBで業務を再開</a:t>
+              </a:r>
+            </a:p>
+          </p:txBody>
+        </p:sp>
+      </p:grpSp>
     </p:spTree>
   </p:cSld>
   <p:clrMapOvr>

--- a/skills/pptx-deck/examples/redmine-migration/redmine-migration.pptx
+++ b/skills/pptx-deck/examples/redmine-migration/redmine-migration.pptx
@@ -4660,169 +4660,35 @@
           </a:p>
         </p:txBody>
       </p:sp>
-      <p:sp>
-        <p:nvSpPr>
-          <p:cNvPr id="3" name="Component takeaway" descr="pptx-deck-generated"/>
-          <p:cNvSpPr/>
-          <p:nvPr/>
-        </p:nvSpPr>
-        <p:spPr>
-          <a:xfrm>
-            <a:off x="457200" y="5660136"/>
-            <a:ext cx="11274552" cy="512064"/>
-          </a:xfrm>
-          <a:prstGeom prst="roundRect">
-            <a:avLst/>
-          </a:prstGeom>
-          <a:solidFill>
-            <a:schemeClr val="accent1">
-              <a:lumMod val="15000"/>
-              <a:lumOff val="85000"/>
-            </a:schemeClr>
-          </a:solidFill>
-          <a:ln w="9525">
-            <a:solidFill>
-              <a:schemeClr val="lt1">
-                <a:lumMod val="85000"/>
-              </a:schemeClr>
-            </a:solidFill>
-          </a:ln>
-        </p:spPr>
-        <p:style>
-          <a:lnRef idx="1">
-            <a:schemeClr val="accent1"/>
-          </a:lnRef>
-          <a:fillRef idx="3">
-            <a:schemeClr val="accent1"/>
-          </a:fillRef>
-          <a:effectRef idx="2">
-            <a:schemeClr val="accent1"/>
-          </a:effectRef>
-          <a:fontRef idx="minor">
-            <a:schemeClr val="lt1"/>
-          </a:fontRef>
-        </p:style>
-        <p:txBody>
-          <a:bodyPr rtlCol="0" anchor="ctr"/>
-          <a:lstStyle/>
-          <a:p>
-            <a:pPr algn="ctr"/>
-          </a:p>
-        </p:txBody>
-      </p:sp>
-      <p:sp>
-        <p:nvSpPr>
-          <p:cNvPr id="4" name="Takeaway accent" descr="pptx-deck-generated"/>
-          <p:cNvSpPr/>
-          <p:nvPr/>
-        </p:nvSpPr>
-        <p:spPr>
-          <a:xfrm>
-            <a:off x="457200" y="5660136"/>
-            <a:ext cx="82296" cy="512064"/>
-          </a:xfrm>
-          <a:prstGeom prst="rect">
-            <a:avLst/>
-          </a:prstGeom>
-          <a:solidFill>
-            <a:schemeClr val="accent1"/>
-          </a:solidFill>
-        </p:spPr>
-        <p:style>
-          <a:lnRef idx="1">
-            <a:schemeClr val="accent1"/>
-          </a:lnRef>
-          <a:fillRef idx="3">
-            <a:schemeClr val="accent1"/>
-          </a:fillRef>
-          <a:effectRef idx="2">
-            <a:schemeClr val="accent1"/>
-          </a:effectRef>
-          <a:fontRef idx="minor">
-            <a:schemeClr val="lt1"/>
-          </a:fontRef>
-        </p:style>
-        <p:txBody>
-          <a:bodyPr rtlCol="0" anchor="ctr"/>
-          <a:lstStyle/>
-          <a:p>
-            <a:pPr algn="ctr"/>
-          </a:p>
-        </p:txBody>
-      </p:sp>
-      <p:sp>
-        <p:nvSpPr>
-          <p:cNvPr id="5" name="Takeaway text" descr="pptx-deck-generated"/>
-          <p:cNvSpPr txBox="1"/>
-          <p:nvPr/>
-        </p:nvSpPr>
-        <p:spPr>
-          <a:xfrm>
-            <a:off x="603504" y="5687568"/>
-            <a:ext cx="11073384" cy="457200"/>
-          </a:xfrm>
-          <a:prstGeom prst="rect">
-            <a:avLst/>
-          </a:prstGeom>
-          <a:noFill/>
-          <a:ln>
-            <a:noFill/>
-          </a:ln>
-        </p:spPr>
-        <p:txBody>
-          <a:bodyPr wrap="square" anchor="ctr" lIns="82296" rIns="82296" tIns="36576" bIns="36576">
-            <a:spAutoFit/>
-          </a:bodyPr>
-          <a:lstStyle/>
-          <a:p>
-            <a:pPr algn="l">
-              <a:lnSpc>
-                <a:spcPct val="100000"/>
-              </a:lnSpc>
-              <a:spcAft>
-                <a:spcPts val="0"/>
-              </a:spcAft>
-            </a:pPr>
-            <a:r>
-              <a:rPr sz="1200" b="1">
-                <a:solidFill>
-                  <a:schemeClr val="dk1"/>
-                </a:solidFill>
-                <a:latin typeface="Yu Gothic"/>
-                <a:ea typeface="Yu Gothic"/>
-              </a:rPr>
-              <a:t>利用者約300名・添付約120GB（想定値）が脆弱性にさらされたままになる</a:t>
-            </a:r>
-          </a:p>
-        </p:txBody>
-      </p:sp>
       <p:grpSp>
         <p:nvGrpSpPr>
-          <p:cNvPr id="6" name="Cards 1" descr="pptx-deck-generated"/>
+          <p:cNvPr id="3" name="Cards 1" descr="pptx-deck-generated"/>
           <p:cNvGrpSpPr/>
           <p:nvPr/>
         </p:nvGrpSpPr>
         <p:grpSpPr>
           <a:xfrm>
             <a:off x="457200" y="1554480"/>
-            <a:ext cx="3648456" cy="3995927"/>
+            <a:ext cx="3648456" cy="1146048"/>
             <a:chOff x="0" y="0"/>
-            <a:chExt cx="3648456" cy="3995927"/>
+            <a:chExt cx="3648456" cy="1146048"/>
           </a:xfrm>
         </p:grpSpPr>
         <p:sp>
           <p:nvSpPr>
-            <p:cNvPr id="7" name="Card 1 panel" descr="pptx-deck-generated"/>
+            <p:cNvPr id="4" name="Card 1 panel" descr="pptx-deck-generated"/>
             <p:cNvSpPr/>
             <p:nvPr/>
           </p:nvSpPr>
           <p:spPr>
             <a:xfrm>
               <a:off x="0" y="0"/>
-              <a:ext cx="3648456" cy="3995927"/>
+              <a:ext cx="3648456" cy="1146048"/>
             </a:xfrm>
             <a:prstGeom prst="roundRect">
-              <a:avLst/>
+              <a:avLst>
+                <a:gd name="adj" fmla="val 4787"/>
+              </a:avLst>
             </a:prstGeom>
             <a:solidFill>
               <a:schemeClr val="lt1"/>
@@ -4835,20 +4701,6 @@
               </a:solidFill>
             </a:ln>
           </p:spPr>
-          <p:style>
-            <a:lnRef idx="1">
-              <a:schemeClr val="accent1"/>
-            </a:lnRef>
-            <a:fillRef idx="3">
-              <a:schemeClr val="accent1"/>
-            </a:fillRef>
-            <a:effectRef idx="2">
-              <a:schemeClr val="accent1"/>
-            </a:effectRef>
-            <a:fontRef idx="minor">
-              <a:schemeClr val="lt1"/>
-            </a:fontRef>
-          </p:style>
           <p:txBody>
             <a:bodyPr rtlCol="0" anchor="ctr"/>
             <a:lstStyle/>
@@ -4859,54 +4711,14 @@
         </p:sp>
         <p:sp>
           <p:nvSpPr>
-            <p:cNvPr id="8" name="Card 1 accent" descr="pptx-deck-generated"/>
-            <p:cNvSpPr/>
-            <p:nvPr/>
-          </p:nvSpPr>
-          <p:spPr>
-            <a:xfrm>
-              <a:off x="0" y="0"/>
-              <a:ext cx="3648456" cy="73152"/>
-            </a:xfrm>
-            <a:prstGeom prst="rect">
-              <a:avLst/>
-            </a:prstGeom>
-            <a:solidFill>
-              <a:schemeClr val="accent1"/>
-            </a:solidFill>
-          </p:spPr>
-          <p:style>
-            <a:lnRef idx="1">
-              <a:schemeClr val="accent1"/>
-            </a:lnRef>
-            <a:fillRef idx="3">
-              <a:schemeClr val="accent1"/>
-            </a:fillRef>
-            <a:effectRef idx="2">
-              <a:schemeClr val="accent1"/>
-            </a:effectRef>
-            <a:fontRef idx="minor">
-              <a:schemeClr val="lt1"/>
-            </a:fontRef>
-          </p:style>
-          <p:txBody>
-            <a:bodyPr rtlCol="0" anchor="ctr"/>
-            <a:lstStyle/>
-            <a:p>
-              <a:pPr algn="ctr"/>
-            </a:p>
-          </p:txBody>
-        </p:sp>
-        <p:sp>
-          <p:nvSpPr>
-            <p:cNvPr id="9" name="Card 1 heading" descr="pptx-deck-generated"/>
+            <p:cNvPr id="5" name="Card 1 heading" descr="pptx-deck-generated"/>
             <p:cNvSpPr txBox="1"/>
             <p:nvPr/>
           </p:nvSpPr>
           <p:spPr>
             <a:xfrm>
-              <a:off x="128016" y="137159"/>
-              <a:ext cx="3392424" cy="438912"/>
+              <a:off x="109728" y="73152"/>
+              <a:ext cx="3429000" cy="457200"/>
             </a:xfrm>
             <a:prstGeom prst="rect">
               <a:avLst/>
@@ -4917,7 +4729,7 @@
             </a:ln>
           </p:spPr>
           <p:txBody>
-            <a:bodyPr wrap="square" anchor="ctr" lIns="82296" rIns="82296" tIns="36576" bIns="36576">
+            <a:bodyPr wrap="square" anchor="t" lIns="109728" rIns="109728" tIns="73152" bIns="73152">
               <a:spAutoFit/>
             </a:bodyPr>
             <a:lstStyle/>
@@ -4931,7 +4743,7 @@
                 </a:spcAft>
               </a:pPr>
               <a:r>
-                <a:rPr sz="1600" b="1">
+                <a:rPr sz="1800" b="1">
                   <a:solidFill>
                     <a:schemeClr val="accent1"/>
                   </a:solidFill>
@@ -4945,14 +4757,14 @@
         </p:sp>
         <p:sp>
           <p:nvSpPr>
-            <p:cNvPr id="10" name="Card 1 copy" descr="pptx-deck-generated"/>
+            <p:cNvPr id="6" name="Card 1 body" descr="pptx-deck-generated"/>
             <p:cNvSpPr txBox="1"/>
             <p:nvPr/>
           </p:nvSpPr>
           <p:spPr>
             <a:xfrm>
-              <a:off x="128016" y="640080"/>
-              <a:ext cx="3392424" cy="3246119"/>
+              <a:off x="109728" y="530352"/>
+              <a:ext cx="3429000" cy="432816"/>
             </a:xfrm>
             <a:prstGeom prst="rect">
               <a:avLst/>
@@ -4963,7 +4775,7 @@
             </a:ln>
           </p:spPr>
           <p:txBody>
-            <a:bodyPr wrap="square" anchor="ctr" lIns="82296" rIns="82296" tIns="36576" bIns="36576">
+            <a:bodyPr wrap="square" anchor="t" lIns="109728" rIns="109728" tIns="73152" bIns="73152">
               <a:spAutoFit/>
             </a:bodyPr>
             <a:lstStyle/>
@@ -4977,46 +4789,74 @@
                 </a:spcAft>
               </a:pPr>
               <a:r>
-                <a:rPr sz="1200" b="0">
+                <a:rPr sz="1400" b="0">
                   <a:solidFill>
                     <a:schemeClr val="dk1"/>
                   </a:solidFill>
                   <a:latin typeface="Yu Gothic"/>
                   <a:ea typeface="Yu Gothic"/>
                 </a:rPr>
-                <a:t>• CentOS 7 / 2024年6月保守終了</a:t>
+                <a:t>CentOS 7 / 2024年6月保守終了</a:t>
               </a:r>
+            </a:p>
+          </p:txBody>
+        </p:sp>
+        <p:sp>
+          <p:nvSpPr>
+            <p:cNvPr id="7" name="Card 1 accent" descr="pptx-deck-generated"/>
+            <p:cNvSpPr/>
+            <p:nvPr/>
+          </p:nvSpPr>
+          <p:spPr>
+            <a:xfrm>
+              <a:off x="54864" y="54864"/>
+              <a:ext cx="3538728" cy="54864"/>
+            </a:xfrm>
+            <a:prstGeom prst="rect">
+              <a:avLst/>
+            </a:prstGeom>
+            <a:solidFill>
+              <a:schemeClr val="accent1"/>
+            </a:solidFill>
+          </p:spPr>
+          <p:txBody>
+            <a:bodyPr rtlCol="0" anchor="ctr"/>
+            <a:lstStyle/>
+            <a:p>
+              <a:pPr algn="ctr"/>
             </a:p>
           </p:txBody>
         </p:sp>
       </p:grpSp>
       <p:grpSp>
         <p:nvGrpSpPr>
-          <p:cNvPr id="11" name="Cards 2" descr="pptx-deck-generated"/>
+          <p:cNvPr id="8" name="Cards 2" descr="pptx-deck-generated"/>
           <p:cNvGrpSpPr/>
           <p:nvPr/>
         </p:nvGrpSpPr>
         <p:grpSpPr>
           <a:xfrm>
             <a:off x="4270248" y="1554480"/>
-            <a:ext cx="3648456" cy="3995927"/>
+            <a:ext cx="3648456" cy="1146048"/>
             <a:chOff x="0" y="0"/>
-            <a:chExt cx="3648456" cy="3995927"/>
+            <a:chExt cx="3648456" cy="1146048"/>
           </a:xfrm>
         </p:grpSpPr>
         <p:sp>
           <p:nvSpPr>
-            <p:cNvPr id="12" name="Card 2 panel" descr="pptx-deck-generated"/>
+            <p:cNvPr id="9" name="Card 2 panel" descr="pptx-deck-generated"/>
             <p:cNvSpPr/>
             <p:nvPr/>
           </p:nvSpPr>
           <p:spPr>
             <a:xfrm>
               <a:off x="0" y="0"/>
-              <a:ext cx="3648456" cy="3995927"/>
+              <a:ext cx="3648456" cy="1146048"/>
             </a:xfrm>
             <a:prstGeom prst="roundRect">
-              <a:avLst/>
+              <a:avLst>
+                <a:gd name="adj" fmla="val 4787"/>
+              </a:avLst>
             </a:prstGeom>
             <a:solidFill>
               <a:schemeClr val="lt1"/>
@@ -5029,20 +4869,6 @@
               </a:solidFill>
             </a:ln>
           </p:spPr>
-          <p:style>
-            <a:lnRef idx="1">
-              <a:schemeClr val="accent1"/>
-            </a:lnRef>
-            <a:fillRef idx="3">
-              <a:schemeClr val="accent1"/>
-            </a:fillRef>
-            <a:effectRef idx="2">
-              <a:schemeClr val="accent1"/>
-            </a:effectRef>
-            <a:fontRef idx="minor">
-              <a:schemeClr val="lt1"/>
-            </a:fontRef>
-          </p:style>
           <p:txBody>
             <a:bodyPr rtlCol="0" anchor="ctr"/>
             <a:lstStyle/>
@@ -5053,54 +4879,14 @@
         </p:sp>
         <p:sp>
           <p:nvSpPr>
-            <p:cNvPr id="13" name="Card 2 accent" descr="pptx-deck-generated"/>
-            <p:cNvSpPr/>
-            <p:nvPr/>
-          </p:nvSpPr>
-          <p:spPr>
-            <a:xfrm>
-              <a:off x="0" y="0"/>
-              <a:ext cx="3648456" cy="73152"/>
-            </a:xfrm>
-            <a:prstGeom prst="rect">
-              <a:avLst/>
-            </a:prstGeom>
-            <a:solidFill>
-              <a:schemeClr val="accent1"/>
-            </a:solidFill>
-          </p:spPr>
-          <p:style>
-            <a:lnRef idx="1">
-              <a:schemeClr val="accent1"/>
-            </a:lnRef>
-            <a:fillRef idx="3">
-              <a:schemeClr val="accent1"/>
-            </a:fillRef>
-            <a:effectRef idx="2">
-              <a:schemeClr val="accent1"/>
-            </a:effectRef>
-            <a:fontRef idx="minor">
-              <a:schemeClr val="lt1"/>
-            </a:fontRef>
-          </p:style>
-          <p:txBody>
-            <a:bodyPr rtlCol="0" anchor="ctr"/>
-            <a:lstStyle/>
-            <a:p>
-              <a:pPr algn="ctr"/>
-            </a:p>
-          </p:txBody>
-        </p:sp>
-        <p:sp>
-          <p:nvSpPr>
-            <p:cNvPr id="14" name="Card 2 heading" descr="pptx-deck-generated"/>
+            <p:cNvPr id="10" name="Card 2 heading" descr="pptx-deck-generated"/>
             <p:cNvSpPr txBox="1"/>
             <p:nvPr/>
           </p:nvSpPr>
           <p:spPr>
             <a:xfrm>
-              <a:off x="128016" y="137159"/>
-              <a:ext cx="3392424" cy="438912"/>
+              <a:off x="109728" y="73152"/>
+              <a:ext cx="3429000" cy="457200"/>
             </a:xfrm>
             <a:prstGeom prst="rect">
               <a:avLst/>
@@ -5111,7 +4897,7 @@
             </a:ln>
           </p:spPr>
           <p:txBody>
-            <a:bodyPr wrap="square" anchor="ctr" lIns="82296" rIns="82296" tIns="36576" bIns="36576">
+            <a:bodyPr wrap="square" anchor="t" lIns="109728" rIns="109728" tIns="73152" bIns="73152">
               <a:spAutoFit/>
             </a:bodyPr>
             <a:lstStyle/>
@@ -5125,7 +4911,7 @@
                 </a:spcAft>
               </a:pPr>
               <a:r>
-                <a:rPr sz="1600" b="1">
+                <a:rPr sz="1800" b="1">
                   <a:solidFill>
                     <a:schemeClr val="accent1"/>
                   </a:solidFill>
@@ -5139,14 +4925,14 @@
         </p:sp>
         <p:sp>
           <p:nvSpPr>
-            <p:cNvPr id="15" name="Card 2 copy" descr="pptx-deck-generated"/>
+            <p:cNvPr id="11" name="Card 2 body" descr="pptx-deck-generated"/>
             <p:cNvSpPr txBox="1"/>
             <p:nvPr/>
           </p:nvSpPr>
           <p:spPr>
             <a:xfrm>
-              <a:off x="128016" y="640080"/>
-              <a:ext cx="3392424" cy="3246119"/>
+              <a:off x="109728" y="530352"/>
+              <a:ext cx="3429000" cy="432816"/>
             </a:xfrm>
             <a:prstGeom prst="rect">
               <a:avLst/>
@@ -5157,7 +4943,7 @@
             </a:ln>
           </p:spPr>
           <p:txBody>
-            <a:bodyPr wrap="square" anchor="ctr" lIns="82296" rIns="82296" tIns="36576" bIns="36576">
+            <a:bodyPr wrap="square" anchor="t" lIns="109728" rIns="109728" tIns="73152" bIns="73152">
               <a:spAutoFit/>
             </a:bodyPr>
             <a:lstStyle/>
@@ -5171,46 +4957,74 @@
                 </a:spcAft>
               </a:pPr>
               <a:r>
-                <a:rPr sz="1200" b="0">
+                <a:rPr sz="1400" b="0">
                   <a:solidFill>
                     <a:schemeClr val="dk1"/>
                   </a:solidFill>
                   <a:latin typeface="Yu Gothic"/>
                   <a:ea typeface="Yu Gothic"/>
                 </a:rPr>
-                <a:t>• Ruby 2.7・MySQL 5.7 / 保守終了</a:t>
+                <a:t>Ruby 2.7・MySQL 5.7 / 保守終了</a:t>
               </a:r>
+            </a:p>
+          </p:txBody>
+        </p:sp>
+        <p:sp>
+          <p:nvSpPr>
+            <p:cNvPr id="12" name="Card 2 accent" descr="pptx-deck-generated"/>
+            <p:cNvSpPr/>
+            <p:nvPr/>
+          </p:nvSpPr>
+          <p:spPr>
+            <a:xfrm>
+              <a:off x="54864" y="54864"/>
+              <a:ext cx="3538728" cy="54864"/>
+            </a:xfrm>
+            <a:prstGeom prst="rect">
+              <a:avLst/>
+            </a:prstGeom>
+            <a:solidFill>
+              <a:schemeClr val="accent1"/>
+            </a:solidFill>
+          </p:spPr>
+          <p:txBody>
+            <a:bodyPr rtlCol="0" anchor="ctr"/>
+            <a:lstStyle/>
+            <a:p>
+              <a:pPr algn="ctr"/>
             </a:p>
           </p:txBody>
         </p:sp>
       </p:grpSp>
       <p:grpSp>
         <p:nvGrpSpPr>
-          <p:cNvPr id="16" name="Cards 3" descr="pptx-deck-generated"/>
+          <p:cNvPr id="13" name="Cards 3" descr="pptx-deck-generated"/>
           <p:cNvGrpSpPr/>
           <p:nvPr/>
         </p:nvGrpSpPr>
         <p:grpSpPr>
           <a:xfrm>
             <a:off x="8083296" y="1554480"/>
-            <a:ext cx="3648456" cy="3995927"/>
+            <a:ext cx="3648456" cy="1146048"/>
             <a:chOff x="0" y="0"/>
-            <a:chExt cx="3648456" cy="3995927"/>
+            <a:chExt cx="3648456" cy="1146048"/>
           </a:xfrm>
         </p:grpSpPr>
         <p:sp>
           <p:nvSpPr>
-            <p:cNvPr id="17" name="Card 3 panel" descr="pptx-deck-generated"/>
+            <p:cNvPr id="14" name="Card 3 panel" descr="pptx-deck-generated"/>
             <p:cNvSpPr/>
             <p:nvPr/>
           </p:nvSpPr>
           <p:spPr>
             <a:xfrm>
               <a:off x="0" y="0"/>
-              <a:ext cx="3648456" cy="3995927"/>
+              <a:ext cx="3648456" cy="1146048"/>
             </a:xfrm>
             <a:prstGeom prst="roundRect">
-              <a:avLst/>
+              <a:avLst>
+                <a:gd name="adj" fmla="val 4787"/>
+              </a:avLst>
             </a:prstGeom>
             <a:solidFill>
               <a:schemeClr val="lt1"/>
@@ -5223,20 +5037,6 @@
               </a:solidFill>
             </a:ln>
           </p:spPr>
-          <p:style>
-            <a:lnRef idx="1">
-              <a:schemeClr val="accent1"/>
-            </a:lnRef>
-            <a:fillRef idx="3">
-              <a:schemeClr val="accent1"/>
-            </a:fillRef>
-            <a:effectRef idx="2">
-              <a:schemeClr val="accent1"/>
-            </a:effectRef>
-            <a:fontRef idx="minor">
-              <a:schemeClr val="lt1"/>
-            </a:fontRef>
-          </p:style>
           <p:txBody>
             <a:bodyPr rtlCol="0" anchor="ctr"/>
             <a:lstStyle/>
@@ -5247,54 +5047,14 @@
         </p:sp>
         <p:sp>
           <p:nvSpPr>
-            <p:cNvPr id="18" name="Card 3 accent" descr="pptx-deck-generated"/>
-            <p:cNvSpPr/>
-            <p:nvPr/>
-          </p:nvSpPr>
-          <p:spPr>
-            <a:xfrm>
-              <a:off x="0" y="0"/>
-              <a:ext cx="3648456" cy="73152"/>
-            </a:xfrm>
-            <a:prstGeom prst="rect">
-              <a:avLst/>
-            </a:prstGeom>
-            <a:solidFill>
-              <a:schemeClr val="accent1"/>
-            </a:solidFill>
-          </p:spPr>
-          <p:style>
-            <a:lnRef idx="1">
-              <a:schemeClr val="accent1"/>
-            </a:lnRef>
-            <a:fillRef idx="3">
-              <a:schemeClr val="accent1"/>
-            </a:fillRef>
-            <a:effectRef idx="2">
-              <a:schemeClr val="accent1"/>
-            </a:effectRef>
-            <a:fontRef idx="minor">
-              <a:schemeClr val="lt1"/>
-            </a:fontRef>
-          </p:style>
-          <p:txBody>
-            <a:bodyPr rtlCol="0" anchor="ctr"/>
-            <a:lstStyle/>
-            <a:p>
-              <a:pPr algn="ctr"/>
-            </a:p>
-          </p:txBody>
-        </p:sp>
-        <p:sp>
-          <p:nvSpPr>
-            <p:cNvPr id="19" name="Card 3 heading" descr="pptx-deck-generated"/>
+            <p:cNvPr id="15" name="Card 3 heading" descr="pptx-deck-generated"/>
             <p:cNvSpPr txBox="1"/>
             <p:nvPr/>
           </p:nvSpPr>
           <p:spPr>
             <a:xfrm>
-              <a:off x="128016" y="137159"/>
-              <a:ext cx="3392424" cy="438912"/>
+              <a:off x="109727" y="73152"/>
+              <a:ext cx="3429000" cy="457200"/>
             </a:xfrm>
             <a:prstGeom prst="rect">
               <a:avLst/>
@@ -5305,7 +5065,7 @@
             </a:ln>
           </p:spPr>
           <p:txBody>
-            <a:bodyPr wrap="square" anchor="ctr" lIns="82296" rIns="82296" tIns="36576" bIns="36576">
+            <a:bodyPr wrap="square" anchor="t" lIns="109728" rIns="109728" tIns="73152" bIns="73152">
               <a:spAutoFit/>
             </a:bodyPr>
             <a:lstStyle/>
@@ -5319,7 +5079,7 @@
                 </a:spcAft>
               </a:pPr>
               <a:r>
-                <a:rPr sz="1600" b="1">
+                <a:rPr sz="1800" b="1">
                   <a:solidFill>
                     <a:schemeClr val="accent1"/>
                   </a:solidFill>
@@ -5333,14 +5093,14 @@
         </p:sp>
         <p:sp>
           <p:nvSpPr>
-            <p:cNvPr id="20" name="Card 3 copy" descr="pptx-deck-generated"/>
+            <p:cNvPr id="16" name="Card 3 body" descr="pptx-deck-generated"/>
             <p:cNvSpPr txBox="1"/>
             <p:nvPr/>
           </p:nvSpPr>
           <p:spPr>
             <a:xfrm>
-              <a:off x="128016" y="640080"/>
-              <a:ext cx="3392424" cy="3246119"/>
+              <a:off x="109727" y="530352"/>
+              <a:ext cx="3429000" cy="432816"/>
             </a:xfrm>
             <a:prstGeom prst="rect">
               <a:avLst/>
@@ -5351,7 +5111,7 @@
             </a:ln>
           </p:spPr>
           <p:txBody>
-            <a:bodyPr wrap="square" anchor="ctr" lIns="82296" rIns="82296" tIns="36576" bIns="36576">
+            <a:bodyPr wrap="square" anchor="t" lIns="109728" rIns="109728" tIns="73152" bIns="73152">
               <a:spAutoFit/>
             </a:bodyPr>
             <a:lstStyle/>
@@ -5365,19 +5125,152 @@
                 </a:spcAft>
               </a:pPr>
               <a:r>
-                <a:rPr sz="1200" b="0">
+                <a:rPr sz="1400" b="0">
                   <a:solidFill>
                     <a:schemeClr val="dk1"/>
                   </a:solidFill>
                   <a:latin typeface="Yu Gothic"/>
                   <a:ea typeface="Yu Gothic"/>
                 </a:rPr>
-                <a:t>• Redmine 4.2 / 更新対象外</a:t>
+                <a:t>Redmine 4.2 / 更新対象外</a:t>
               </a:r>
             </a:p>
           </p:txBody>
         </p:sp>
+        <p:sp>
+          <p:nvSpPr>
+            <p:cNvPr id="17" name="Card 3 accent" descr="pptx-deck-generated"/>
+            <p:cNvSpPr/>
+            <p:nvPr/>
+          </p:nvSpPr>
+          <p:spPr>
+            <a:xfrm>
+              <a:off x="54864" y="54864"/>
+              <a:ext cx="3538728" cy="54864"/>
+            </a:xfrm>
+            <a:prstGeom prst="rect">
+              <a:avLst/>
+            </a:prstGeom>
+            <a:solidFill>
+              <a:schemeClr val="accent1"/>
+            </a:solidFill>
+          </p:spPr>
+          <p:txBody>
+            <a:bodyPr rtlCol="0" anchor="ctr"/>
+            <a:lstStyle/>
+            <a:p>
+              <a:pPr algn="ctr"/>
+            </a:p>
+          </p:txBody>
+        </p:sp>
       </p:grpSp>
+      <p:sp>
+        <p:nvSpPr>
+          <p:cNvPr id="18" name="Component takeaway" descr="pptx-deck-generated"/>
+          <p:cNvSpPr/>
+          <p:nvPr/>
+        </p:nvSpPr>
+        <p:spPr>
+          <a:xfrm>
+            <a:off x="457200" y="2929128"/>
+            <a:ext cx="11274552" cy="457200"/>
+          </a:xfrm>
+          <a:prstGeom prst="roundRect">
+            <a:avLst>
+              <a:gd name="adj" fmla="val 12000"/>
+            </a:avLst>
+          </a:prstGeom>
+          <a:solidFill>
+            <a:schemeClr val="lt2"/>
+          </a:solidFill>
+          <a:ln w="9525">
+            <a:solidFill>
+              <a:schemeClr val="lt1">
+                <a:lumMod val="85000"/>
+              </a:schemeClr>
+            </a:solidFill>
+          </a:ln>
+        </p:spPr>
+        <p:txBody>
+          <a:bodyPr rtlCol="0" anchor="ctr"/>
+          <a:lstStyle/>
+          <a:p>
+            <a:pPr algn="ctr"/>
+          </a:p>
+        </p:txBody>
+      </p:sp>
+      <p:sp>
+        <p:nvSpPr>
+          <p:cNvPr id="19" name="Takeaway accent" descr="pptx-deck-generated"/>
+          <p:cNvSpPr/>
+          <p:nvPr/>
+        </p:nvSpPr>
+        <p:spPr>
+          <a:xfrm>
+            <a:off x="457200" y="2929128"/>
+            <a:ext cx="82296" cy="457200"/>
+          </a:xfrm>
+          <a:prstGeom prst="rect">
+            <a:avLst/>
+          </a:prstGeom>
+          <a:solidFill>
+            <a:schemeClr val="accent1"/>
+          </a:solidFill>
+        </p:spPr>
+        <p:txBody>
+          <a:bodyPr rtlCol="0" anchor="ctr"/>
+          <a:lstStyle/>
+          <a:p>
+            <a:pPr algn="ctr"/>
+          </a:p>
+        </p:txBody>
+      </p:sp>
+      <p:sp>
+        <p:nvSpPr>
+          <p:cNvPr id="20" name="Takeaway text" descr="pptx-deck-generated"/>
+          <p:cNvSpPr txBox="1"/>
+          <p:nvPr/>
+        </p:nvSpPr>
+        <p:spPr>
+          <a:xfrm>
+            <a:off x="603504" y="2929128"/>
+            <a:ext cx="11073384" cy="457200"/>
+          </a:xfrm>
+          <a:prstGeom prst="rect">
+            <a:avLst/>
+          </a:prstGeom>
+          <a:noFill/>
+          <a:ln>
+            <a:noFill/>
+          </a:ln>
+        </p:spPr>
+        <p:txBody>
+          <a:bodyPr wrap="square" anchor="t" lIns="109728" rIns="109728" tIns="73152" bIns="73152">
+            <a:spAutoFit/>
+          </a:bodyPr>
+          <a:lstStyle/>
+          <a:p>
+            <a:pPr algn="l">
+              <a:lnSpc>
+                <a:spcPct val="100000"/>
+              </a:lnSpc>
+              <a:spcAft>
+                <a:spcPts val="0"/>
+              </a:spcAft>
+            </a:pPr>
+            <a:r>
+              <a:rPr sz="1400" b="1">
+                <a:solidFill>
+                  <a:schemeClr val="dk1"/>
+                </a:solidFill>
+                <a:latin typeface="Yu Gothic"/>
+                <a:ea typeface="Yu Gothic"/>
+              </a:rPr>
+              <a:t>利用者約300名・添付約120GB（想定値）が脆弱性にさらされたままになる</a:t>
+            </a:r>
+          </a:p>
+        </p:txBody>
+      </p:sp>
     </p:spTree>
   </p:cSld>
   <p:clrMapOvr>
@@ -5430,10 +5323,10 @@
         </p:nvGrpSpPr>
         <p:grpSpPr>
           <a:xfrm>
-            <a:off x="457200" y="1627632"/>
-            <a:ext cx="5308092" cy="4471416"/>
+            <a:off x="457200" y="1554480"/>
+            <a:ext cx="5308092" cy="1952752"/>
             <a:chOff x="0" y="0"/>
-            <a:chExt cx="5308092" cy="4471416"/>
+            <a:chExt cx="5308092" cy="1952752"/>
           </a:xfrm>
         </p:grpSpPr>
         <p:sp>
@@ -5445,18 +5338,15 @@
           <p:spPr>
             <a:xfrm>
               <a:off x="0" y="0"/>
-              <a:ext cx="5308092" cy="4471416"/>
+              <a:ext cx="5308092" cy="1952752"/>
             </a:xfrm>
             <a:prstGeom prst="roundRect">
-              <a:avLst/>
+              <a:avLst>
+                <a:gd name="adj" fmla="val 2810"/>
+              </a:avLst>
             </a:prstGeom>
             <a:solidFill>
-              <a:schemeClr val="dk1">
-                <a:lumMod val="65000"/>
-                <a:lumOff val="35000"/>
-                <a:lumMod val="15000"/>
-                <a:lumOff val="85000"/>
-              </a:schemeClr>
+              <a:schemeClr val="lt2"/>
             </a:solidFill>
             <a:ln w="9525">
               <a:solidFill>
@@ -5466,20 +5356,6 @@
               </a:solidFill>
             </a:ln>
           </p:spPr>
-          <p:style>
-            <a:lnRef idx="1">
-              <a:schemeClr val="accent1"/>
-            </a:lnRef>
-            <a:fillRef idx="3">
-              <a:schemeClr val="accent1"/>
-            </a:fillRef>
-            <a:effectRef idx="2">
-              <a:schemeClr val="accent1"/>
-            </a:effectRef>
-            <a:fontRef idx="minor">
-              <a:schemeClr val="lt1"/>
-            </a:fontRef>
-          </p:style>
           <p:txBody>
             <a:bodyPr rtlCol="0" anchor="ctr"/>
             <a:lstStyle/>
@@ -5497,31 +5373,20 @@
           <p:spPr>
             <a:xfrm>
               <a:off x="0" y="0"/>
-              <a:ext cx="5308092" cy="603504"/>
+              <a:ext cx="5308092" cy="457200"/>
             </a:xfrm>
-            <a:prstGeom prst="roundRect">
+            <a:prstGeom prst="rect">
               <a:avLst/>
             </a:prstGeom>
             <a:solidFill>
-              <a:schemeClr val="accent1"/>
+              <a:schemeClr val="dk1">
+                <a:lumMod val="65000"/>
+                <a:lumOff val="35000"/>
+              </a:schemeClr>
             </a:solidFill>
           </p:spPr>
-          <p:style>
-            <a:lnRef idx="1">
-              <a:schemeClr val="accent1"/>
-            </a:lnRef>
-            <a:fillRef idx="3">
-              <a:schemeClr val="accent1"/>
-            </a:fillRef>
-            <a:effectRef idx="2">
-              <a:schemeClr val="accent1"/>
-            </a:effectRef>
-            <a:fontRef idx="minor">
-              <a:schemeClr val="lt1"/>
-            </a:fontRef>
-          </p:style>
           <p:txBody>
-            <a:bodyPr rtlCol="0" anchor="ctr" wrap="square" lIns="82296" rIns="82296" tIns="36576" bIns="36576"/>
+            <a:bodyPr rtlCol="0" anchor="t" wrap="square" lIns="109728" rIns="109728" tIns="73152" bIns="73152"/>
             <a:lstStyle/>
             <a:p>
               <a:pPr algn="l">
@@ -5533,7 +5398,7 @@
                 </a:spcAft>
               </a:pPr>
               <a:r>
-                <a:rPr sz="1600" b="1">
+                <a:rPr sz="1800" b="1">
                   <a:solidFill>
                     <a:schemeClr val="lt1"/>
                   </a:solidFill>
@@ -5553,8 +5418,8 @@
           </p:nvSpPr>
           <p:spPr>
             <a:xfrm>
-              <a:off x="155448" y="731520"/>
-              <a:ext cx="4997196" cy="3685031"/>
+              <a:off x="155448" y="530352"/>
+              <a:ext cx="4997196" cy="1367535"/>
             </a:xfrm>
             <a:prstGeom prst="rect">
               <a:avLst/>
@@ -5565,88 +5430,92 @@
             </a:ln>
           </p:spPr>
           <p:txBody>
-            <a:bodyPr wrap="square" anchor="ctr" lIns="82296" rIns="82296" tIns="36576" bIns="36576">
+            <a:bodyPr wrap="square" anchor="t" lIns="109728" rIns="109728" tIns="73152" bIns="73152">
               <a:spAutoFit/>
             </a:bodyPr>
             <a:lstStyle/>
             <a:p>
-              <a:pPr algn="l">
+              <a:pPr algn="l" marL="201168" indent="-109728">
                 <a:lnSpc>
                   <a:spcPct val="100000"/>
                 </a:lnSpc>
                 <a:spcAft>
-                  <a:spcPts val="0"/>
+                  <a:spcPts val="400"/>
                 </a:spcAft>
+                <a:buChar char="•"/>
               </a:pPr>
               <a:r>
-                <a:rPr sz="1200" b="0">
+                <a:rPr sz="1400" b="0">
                   <a:solidFill>
                     <a:schemeClr val="dk1"/>
                   </a:solidFill>
                   <a:latin typeface="Yu Gothic"/>
                   <a:ea typeface="Yu Gothic"/>
                 </a:rPr>
-                <a:t>• CentOS 7</a:t>
+                <a:t>CentOS 7</a:t>
               </a:r>
             </a:p>
             <a:p>
-              <a:pPr algn="l">
+              <a:pPr algn="l" marL="201168" indent="-109728">
                 <a:lnSpc>
                   <a:spcPct val="100000"/>
                 </a:lnSpc>
                 <a:spcAft>
-                  <a:spcPts val="0"/>
+                  <a:spcPts val="400"/>
                 </a:spcAft>
+                <a:buChar char="•"/>
               </a:pPr>
               <a:r>
-                <a:rPr sz="1200" b="0">
+                <a:rPr sz="1400" b="0">
                   <a:solidFill>
                     <a:schemeClr val="dk1"/>
                   </a:solidFill>
                   <a:latin typeface="Yu Gothic"/>
                   <a:ea typeface="Yu Gothic"/>
                 </a:rPr>
-                <a:t>• Redmine 4.2</a:t>
+                <a:t>Redmine 4.2</a:t>
               </a:r>
             </a:p>
             <a:p>
-              <a:pPr algn="l">
+              <a:pPr algn="l" marL="201168" indent="-109728">
                 <a:lnSpc>
                   <a:spcPct val="100000"/>
                 </a:lnSpc>
                 <a:spcAft>
-                  <a:spcPts val="0"/>
+                  <a:spcPts val="400"/>
                 </a:spcAft>
+                <a:buChar char="•"/>
               </a:pPr>
               <a:r>
-                <a:rPr sz="1200" b="0">
+                <a:rPr sz="1400" b="0">
                   <a:solidFill>
                     <a:schemeClr val="dk1"/>
                   </a:solidFill>
                   <a:latin typeface="Yu Gothic"/>
                   <a:ea typeface="Yu Gothic"/>
                 </a:rPr>
-                <a:t>• MySQL 5.7</a:t>
+                <a:t>MySQL 5.7</a:t>
               </a:r>
             </a:p>
             <a:p>
-              <a:pPr algn="l">
+              <a:pPr algn="l" marL="201168" indent="-109728">
                 <a:lnSpc>
                   <a:spcPct val="100000"/>
                 </a:lnSpc>
                 <a:spcAft>
-                  <a:spcPts val="0"/>
+                  <a:spcPts val="400"/>
                 </a:spcAft>
+                <a:buChar char="•"/>
               </a:pPr>
               <a:r>
-                <a:rPr sz="1200" b="0">
+                <a:rPr sz="1400" b="0">
                   <a:solidFill>
                     <a:schemeClr val="dk1"/>
                   </a:solidFill>
                   <a:latin typeface="Yu Gothic"/>
                   <a:ea typeface="Yu Gothic"/>
                 </a:rPr>
-                <a:t>• 手作業のバックアップ</a:t>
+                <a:t>手作業のバックアップ</a:t>
               </a:r>
             </a:p>
           </p:txBody>
@@ -5660,10 +5529,10 @@
         </p:nvGrpSpPr>
         <p:grpSpPr>
           <a:xfrm>
-            <a:off x="6423659" y="1627632"/>
-            <a:ext cx="5308092" cy="4471416"/>
+            <a:off x="6423659" y="1554480"/>
+            <a:ext cx="5308092" cy="1952752"/>
             <a:chOff x="0" y="0"/>
-            <a:chExt cx="5308092" cy="4471416"/>
+            <a:chExt cx="5308092" cy="1952752"/>
           </a:xfrm>
         </p:grpSpPr>
         <p:sp>
@@ -5675,16 +5544,15 @@
           <p:spPr>
             <a:xfrm>
               <a:off x="0" y="0"/>
-              <a:ext cx="5308092" cy="4471416"/>
+              <a:ext cx="5308092" cy="1952752"/>
             </a:xfrm>
             <a:prstGeom prst="roundRect">
-              <a:avLst/>
+              <a:avLst>
+                <a:gd name="adj" fmla="val 2810"/>
+              </a:avLst>
             </a:prstGeom>
             <a:solidFill>
-              <a:schemeClr val="accent1">
-                <a:lumMod val="15000"/>
-                <a:lumOff val="85000"/>
-              </a:schemeClr>
+              <a:schemeClr val="lt2"/>
             </a:solidFill>
             <a:ln w="9525">
               <a:solidFill>
@@ -5694,20 +5562,6 @@
               </a:solidFill>
             </a:ln>
           </p:spPr>
-          <p:style>
-            <a:lnRef idx="1">
-              <a:schemeClr val="accent1"/>
-            </a:lnRef>
-            <a:fillRef idx="3">
-              <a:schemeClr val="accent1"/>
-            </a:fillRef>
-            <a:effectRef idx="2">
-              <a:schemeClr val="accent1"/>
-            </a:effectRef>
-            <a:fontRef idx="minor">
-              <a:schemeClr val="lt1"/>
-            </a:fontRef>
-          </p:style>
           <p:txBody>
             <a:bodyPr rtlCol="0" anchor="ctr"/>
             <a:lstStyle/>
@@ -5725,31 +5579,17 @@
           <p:spPr>
             <a:xfrm>
               <a:off x="0" y="0"/>
-              <a:ext cx="5308092" cy="603504"/>
+              <a:ext cx="5308092" cy="457200"/>
             </a:xfrm>
-            <a:prstGeom prst="roundRect">
+            <a:prstGeom prst="rect">
               <a:avLst/>
             </a:prstGeom>
             <a:solidFill>
-              <a:schemeClr val="accent2"/>
+              <a:schemeClr val="accent1"/>
             </a:solidFill>
           </p:spPr>
-          <p:style>
-            <a:lnRef idx="1">
-              <a:schemeClr val="accent1"/>
-            </a:lnRef>
-            <a:fillRef idx="3">
-              <a:schemeClr val="accent1"/>
-            </a:fillRef>
-            <a:effectRef idx="2">
-              <a:schemeClr val="accent1"/>
-            </a:effectRef>
-            <a:fontRef idx="minor">
-              <a:schemeClr val="lt1"/>
-            </a:fontRef>
-          </p:style>
           <p:txBody>
-            <a:bodyPr rtlCol="0" anchor="ctr" wrap="square" lIns="82296" rIns="82296" tIns="36576" bIns="36576"/>
+            <a:bodyPr rtlCol="0" anchor="t" wrap="square" lIns="109728" rIns="109728" tIns="73152" bIns="73152"/>
             <a:lstStyle/>
             <a:p>
               <a:pPr algn="l">
@@ -5761,7 +5601,7 @@
                 </a:spcAft>
               </a:pPr>
               <a:r>
-                <a:rPr sz="1600" b="1">
+                <a:rPr sz="1800" b="1">
                   <a:solidFill>
                     <a:schemeClr val="lt1"/>
                   </a:solidFill>
@@ -5781,8 +5621,8 @@
           </p:nvSpPr>
           <p:spPr>
             <a:xfrm>
-              <a:off x="155448" y="731520"/>
-              <a:ext cx="4997196" cy="3685031"/>
+              <a:off x="155448" y="530352"/>
+              <a:ext cx="4997196" cy="1367535"/>
             </a:xfrm>
             <a:prstGeom prst="rect">
               <a:avLst/>
@@ -5793,88 +5633,92 @@
             </a:ln>
           </p:spPr>
           <p:txBody>
-            <a:bodyPr wrap="square" anchor="ctr" lIns="82296" rIns="82296" tIns="36576" bIns="36576">
+            <a:bodyPr wrap="square" anchor="t" lIns="109728" rIns="109728" tIns="73152" bIns="73152">
               <a:spAutoFit/>
             </a:bodyPr>
             <a:lstStyle/>
             <a:p>
-              <a:pPr algn="l">
+              <a:pPr algn="l" marL="201168" indent="-109728">
                 <a:lnSpc>
                   <a:spcPct val="100000"/>
                 </a:lnSpc>
                 <a:spcAft>
-                  <a:spcPts val="0"/>
+                  <a:spcPts val="400"/>
                 </a:spcAft>
+                <a:buChar char="•"/>
               </a:pPr>
               <a:r>
-                <a:rPr sz="1200" b="0">
+                <a:rPr sz="1400" b="0">
                   <a:solidFill>
                     <a:schemeClr val="dk1"/>
                   </a:solidFill>
                   <a:latin typeface="Yu Gothic"/>
                   <a:ea typeface="Yu Gothic"/>
                 </a:rPr>
-                <a:t>• Ubuntu 24.04 LTS</a:t>
+                <a:t>Ubuntu 24.04 LTS</a:t>
               </a:r>
             </a:p>
             <a:p>
-              <a:pPr algn="l">
+              <a:pPr algn="l" marL="201168" indent="-109728">
                 <a:lnSpc>
                   <a:spcPct val="100000"/>
                 </a:lnSpc>
                 <a:spcAft>
-                  <a:spcPts val="0"/>
+                  <a:spcPts val="400"/>
                 </a:spcAft>
+                <a:buChar char="•"/>
               </a:pPr>
               <a:r>
-                <a:rPr sz="1200" b="0">
+                <a:rPr sz="1400" b="0">
                   <a:solidFill>
                     <a:schemeClr val="dk1"/>
                   </a:solidFill>
                   <a:latin typeface="Yu Gothic"/>
                   <a:ea typeface="Yu Gothic"/>
                 </a:rPr>
-                <a:t>• Redmine 6.x（計画時点の最新安定版）</a:t>
+                <a:t>Redmine 6.x（計画時点の最新安定版）</a:t>
               </a:r>
             </a:p>
             <a:p>
-              <a:pPr algn="l">
+              <a:pPr algn="l" marL="201168" indent="-109728">
                 <a:lnSpc>
                   <a:spcPct val="100000"/>
                 </a:lnSpc>
                 <a:spcAft>
-                  <a:spcPts val="0"/>
+                  <a:spcPts val="400"/>
                 </a:spcAft>
+                <a:buChar char="•"/>
               </a:pPr>
               <a:r>
-                <a:rPr sz="1200" b="0">
+                <a:rPr sz="1400" b="0">
                   <a:solidFill>
                     <a:schemeClr val="dk1"/>
                   </a:solidFill>
                   <a:latin typeface="Yu Gothic"/>
                   <a:ea typeface="Yu Gothic"/>
                 </a:rPr>
-                <a:t>• MySQL 8.0</a:t>
+                <a:t>MySQL 8.0</a:t>
               </a:r>
             </a:p>
             <a:p>
-              <a:pPr algn="l">
+              <a:pPr algn="l" marL="201168" indent="-109728">
                 <a:lnSpc>
                   <a:spcPct val="100000"/>
                 </a:lnSpc>
                 <a:spcAft>
-                  <a:spcPts val="0"/>
+                  <a:spcPts val="400"/>
                 </a:spcAft>
+                <a:buChar char="•"/>
               </a:pPr>
               <a:r>
-                <a:rPr sz="1200" b="0">
+                <a:rPr sz="1400" b="0">
                   <a:solidFill>
                     <a:schemeClr val="dk1"/>
                   </a:solidFill>
                   <a:latin typeface="Yu Gothic"/>
                   <a:ea typeface="Yu Gothic"/>
                 </a:rPr>
-                <a:t>• 自動バックアップと復元手順書</a:t>
+                <a:t>自動バックアップと復元手順書</a:t>
               </a:r>
             </a:p>
           </p:txBody>
@@ -5888,8 +5732,8 @@
         </p:nvSpPr>
         <p:spPr>
           <a:xfrm>
-            <a:off x="5911596" y="3493922"/>
-            <a:ext cx="365760" cy="384048"/>
+            <a:off x="5911596" y="2374635"/>
+            <a:ext cx="365760" cy="256032"/>
           </a:xfrm>
           <a:prstGeom prst="rightArrow">
             <a:avLst/>
@@ -5898,20 +5742,6 @@
             <a:schemeClr val="accent2"/>
           </a:solidFill>
         </p:spPr>
-        <p:style>
-          <a:lnRef idx="1">
-            <a:schemeClr val="accent1"/>
-          </a:lnRef>
-          <a:fillRef idx="3">
-            <a:schemeClr val="accent1"/>
-          </a:fillRef>
-          <a:effectRef idx="2">
-            <a:schemeClr val="accent1"/>
-          </a:effectRef>
-          <a:fontRef idx="minor">
-            <a:schemeClr val="lt1"/>
-          </a:fontRef>
-        </p:style>
         <p:txBody>
           <a:bodyPr rtlCol="0" anchor="ctr"/>
           <a:lstStyle/>
@@ -7525,22 +7355,8 @@
             <a:schemeClr val="accent1"/>
           </a:solidFill>
         </p:spPr>
-        <p:style>
-          <a:lnRef idx="1">
-            <a:schemeClr val="accent1"/>
-          </a:lnRef>
-          <a:fillRef idx="3">
-            <a:schemeClr val="accent1"/>
-          </a:fillRef>
-          <a:effectRef idx="2">
-            <a:schemeClr val="accent1"/>
-          </a:effectRef>
-          <a:fontRef idx="minor">
-            <a:schemeClr val="lt1"/>
-          </a:fontRef>
-        </p:style>
-        <p:txBody>
-          <a:bodyPr rtlCol="0" anchor="ctr" wrap="square" lIns="82296" rIns="82296" tIns="36576" bIns="36576"/>
+        <p:txBody>
+          <a:bodyPr rtlCol="0" anchor="ctr" wrap="square" lIns="109728" rIns="109728" tIns="73152" bIns="73152"/>
           <a:lstStyle/>
           <a:p>
             <a:pPr algn="ctr">
@@ -7552,7 +7368,7 @@
               </a:spcAft>
             </a:pPr>
             <a:r>
-              <a:rPr sz="1000" b="1">
+              <a:rPr sz="1200" b="1">
                 <a:solidFill>
                   <a:schemeClr val="lt1"/>
                 </a:solidFill>
@@ -7566,49 +7382,7 @@
       </p:sp>
       <p:sp>
         <p:nvSpPr>
-          <p:cNvPr id="4" name="Roadmap grid 1" descr="pptx-deck-generated"/>
-          <p:cNvSpPr/>
-          <p:nvPr/>
-        </p:nvSpPr>
-        <p:spPr>
-          <a:xfrm>
-            <a:off x="2468880" y="1993391"/>
-            <a:ext cx="9144" cy="4178808"/>
-          </a:xfrm>
-          <a:prstGeom prst="rect">
-            <a:avLst/>
-          </a:prstGeom>
-          <a:solidFill>
-            <a:schemeClr val="lt1">
-              <a:lumMod val="85000"/>
-            </a:schemeClr>
-          </a:solidFill>
-        </p:spPr>
-        <p:style>
-          <a:lnRef idx="1">
-            <a:schemeClr val="accent1"/>
-          </a:lnRef>
-          <a:fillRef idx="3">
-            <a:schemeClr val="accent1"/>
-          </a:fillRef>
-          <a:effectRef idx="2">
-            <a:schemeClr val="accent1"/>
-          </a:effectRef>
-          <a:fontRef idx="minor">
-            <a:schemeClr val="lt1"/>
-          </a:fontRef>
-        </p:style>
-        <p:txBody>
-          <a:bodyPr rtlCol="0" anchor="ctr"/>
-          <a:lstStyle/>
-          <a:p>
-            <a:pPr algn="ctr"/>
-          </a:p>
-        </p:txBody>
-      </p:sp>
-      <p:sp>
-        <p:nvSpPr>
-          <p:cNvPr id="5" name="Roadmap period 2" descr="pptx-deck-generated"/>
+          <p:cNvPr id="4" name="Roadmap period 2" descr="pptx-deck-generated"/>
           <p:cNvSpPr/>
           <p:nvPr/>
         </p:nvSpPr>
@@ -7624,22 +7398,8 @@
             <a:schemeClr val="accent1"/>
           </a:solidFill>
         </p:spPr>
-        <p:style>
-          <a:lnRef idx="1">
-            <a:schemeClr val="accent1"/>
-          </a:lnRef>
-          <a:fillRef idx="3">
-            <a:schemeClr val="accent1"/>
-          </a:fillRef>
-          <a:effectRef idx="2">
-            <a:schemeClr val="accent1"/>
-          </a:effectRef>
-          <a:fontRef idx="minor">
-            <a:schemeClr val="lt1"/>
-          </a:fontRef>
-        </p:style>
-        <p:txBody>
-          <a:bodyPr rtlCol="0" anchor="ctr" wrap="square" lIns="82296" rIns="82296" tIns="36576" bIns="36576"/>
+        <p:txBody>
+          <a:bodyPr rtlCol="0" anchor="ctr" wrap="square" lIns="109728" rIns="109728" tIns="73152" bIns="73152"/>
           <a:lstStyle/>
           <a:p>
             <a:pPr algn="ctr">
@@ -7651,7 +7411,7 @@
               </a:spcAft>
             </a:pPr>
             <a:r>
-              <a:rPr sz="1000" b="1">
+              <a:rPr sz="1200" b="1">
                 <a:solidFill>
                   <a:schemeClr val="lt1"/>
                 </a:solidFill>
@@ -7665,49 +7425,7 @@
       </p:sp>
       <p:sp>
         <p:nvSpPr>
-          <p:cNvPr id="6" name="Roadmap grid 2" descr="pptx-deck-generated"/>
-          <p:cNvSpPr/>
-          <p:nvPr/>
-        </p:nvSpPr>
-        <p:spPr>
-          <a:xfrm>
-            <a:off x="4784598" y="1993391"/>
-            <a:ext cx="9144" cy="4178808"/>
-          </a:xfrm>
-          <a:prstGeom prst="rect">
-            <a:avLst/>
-          </a:prstGeom>
-          <a:solidFill>
-            <a:schemeClr val="lt1">
-              <a:lumMod val="85000"/>
-            </a:schemeClr>
-          </a:solidFill>
-        </p:spPr>
-        <p:style>
-          <a:lnRef idx="1">
-            <a:schemeClr val="accent1"/>
-          </a:lnRef>
-          <a:fillRef idx="3">
-            <a:schemeClr val="accent1"/>
-          </a:fillRef>
-          <a:effectRef idx="2">
-            <a:schemeClr val="accent1"/>
-          </a:effectRef>
-          <a:fontRef idx="minor">
-            <a:schemeClr val="lt1"/>
-          </a:fontRef>
-        </p:style>
-        <p:txBody>
-          <a:bodyPr rtlCol="0" anchor="ctr"/>
-          <a:lstStyle/>
-          <a:p>
-            <a:pPr algn="ctr"/>
-          </a:p>
-        </p:txBody>
-      </p:sp>
-      <p:sp>
-        <p:nvSpPr>
-          <p:cNvPr id="7" name="Roadmap period 3" descr="pptx-deck-generated"/>
+          <p:cNvPr id="5" name="Roadmap period 3" descr="pptx-deck-generated"/>
           <p:cNvSpPr/>
           <p:nvPr/>
         </p:nvSpPr>
@@ -7723,22 +7441,8 @@
             <a:schemeClr val="accent1"/>
           </a:solidFill>
         </p:spPr>
-        <p:style>
-          <a:lnRef idx="1">
-            <a:schemeClr val="accent1"/>
-          </a:lnRef>
-          <a:fillRef idx="3">
-            <a:schemeClr val="accent1"/>
-          </a:fillRef>
-          <a:effectRef idx="2">
-            <a:schemeClr val="accent1"/>
-          </a:effectRef>
-          <a:fontRef idx="minor">
-            <a:schemeClr val="lt1"/>
-          </a:fontRef>
-        </p:style>
-        <p:txBody>
-          <a:bodyPr rtlCol="0" anchor="ctr" wrap="square" lIns="82296" rIns="82296" tIns="36576" bIns="36576"/>
+        <p:txBody>
+          <a:bodyPr rtlCol="0" anchor="ctr" wrap="square" lIns="109728" rIns="109728" tIns="73152" bIns="73152"/>
           <a:lstStyle/>
           <a:p>
             <a:pPr algn="ctr">
@@ -7750,7 +7454,7 @@
               </a:spcAft>
             </a:pPr>
             <a:r>
-              <a:rPr sz="1000" b="1">
+              <a:rPr sz="1200" b="1">
                 <a:solidFill>
                   <a:schemeClr val="lt1"/>
                 </a:solidFill>
@@ -7764,49 +7468,7 @@
       </p:sp>
       <p:sp>
         <p:nvSpPr>
-          <p:cNvPr id="8" name="Roadmap grid 3" descr="pptx-deck-generated"/>
-          <p:cNvSpPr/>
-          <p:nvPr/>
-        </p:nvSpPr>
-        <p:spPr>
-          <a:xfrm>
-            <a:off x="7100316" y="1993391"/>
-            <a:ext cx="9144" cy="4178808"/>
-          </a:xfrm>
-          <a:prstGeom prst="rect">
-            <a:avLst/>
-          </a:prstGeom>
-          <a:solidFill>
-            <a:schemeClr val="lt1">
-              <a:lumMod val="85000"/>
-            </a:schemeClr>
-          </a:solidFill>
-        </p:spPr>
-        <p:style>
-          <a:lnRef idx="1">
-            <a:schemeClr val="accent1"/>
-          </a:lnRef>
-          <a:fillRef idx="3">
-            <a:schemeClr val="accent1"/>
-          </a:fillRef>
-          <a:effectRef idx="2">
-            <a:schemeClr val="accent1"/>
-          </a:effectRef>
-          <a:fontRef idx="minor">
-            <a:schemeClr val="lt1"/>
-          </a:fontRef>
-        </p:style>
-        <p:txBody>
-          <a:bodyPr rtlCol="0" anchor="ctr"/>
-          <a:lstStyle/>
-          <a:p>
-            <a:pPr algn="ctr"/>
-          </a:p>
-        </p:txBody>
-      </p:sp>
-      <p:sp>
-        <p:nvSpPr>
-          <p:cNvPr id="9" name="Roadmap period 4" descr="pptx-deck-generated"/>
+          <p:cNvPr id="6" name="Roadmap period 4" descr="pptx-deck-generated"/>
           <p:cNvSpPr/>
           <p:nvPr/>
         </p:nvSpPr>
@@ -7822,22 +7484,8 @@
             <a:schemeClr val="accent1"/>
           </a:solidFill>
         </p:spPr>
-        <p:style>
-          <a:lnRef idx="1">
-            <a:schemeClr val="accent1"/>
-          </a:lnRef>
-          <a:fillRef idx="3">
-            <a:schemeClr val="accent1"/>
-          </a:fillRef>
-          <a:effectRef idx="2">
-            <a:schemeClr val="accent1"/>
-          </a:effectRef>
-          <a:fontRef idx="minor">
-            <a:schemeClr val="lt1"/>
-          </a:fontRef>
-        </p:style>
-        <p:txBody>
-          <a:bodyPr rtlCol="0" anchor="ctr" wrap="square" lIns="82296" rIns="82296" tIns="36576" bIns="36576"/>
+        <p:txBody>
+          <a:bodyPr rtlCol="0" anchor="ctr" wrap="square" lIns="109728" rIns="109728" tIns="73152" bIns="73152"/>
           <a:lstStyle/>
           <a:p>
             <a:pPr algn="ctr">
@@ -7849,7 +7497,7 @@
               </a:spcAft>
             </a:pPr>
             <a:r>
-              <a:rPr sz="1000" b="1">
+              <a:rPr sz="1200" b="1">
                 <a:solidFill>
                   <a:schemeClr val="lt1"/>
                 </a:solidFill>
@@ -7863,38 +7511,22 @@
       </p:sp>
       <p:sp>
         <p:nvSpPr>
-          <p:cNvPr id="10" name="Roadmap grid 4" descr="pptx-deck-generated"/>
+          <p:cNvPr id="7" name="Roadmap row 2" descr="pptx-deck-generated"/>
           <p:cNvSpPr/>
           <p:nvPr/>
         </p:nvSpPr>
         <p:spPr>
           <a:xfrm>
-            <a:off x="9416034" y="1993391"/>
-            <a:ext cx="9144" cy="4178808"/>
+            <a:off x="457200" y="2596896"/>
+            <a:ext cx="11274552" cy="603504"/>
           </a:xfrm>
           <a:prstGeom prst="rect">
             <a:avLst/>
           </a:prstGeom>
           <a:solidFill>
-            <a:schemeClr val="lt1">
-              <a:lumMod val="85000"/>
-            </a:schemeClr>
+            <a:schemeClr val="lt2"/>
           </a:solidFill>
         </p:spPr>
-        <p:style>
-          <a:lnRef idx="1">
-            <a:schemeClr val="accent1"/>
-          </a:lnRef>
-          <a:fillRef idx="3">
-            <a:schemeClr val="accent1"/>
-          </a:fillRef>
-          <a:effectRef idx="2">
-            <a:schemeClr val="accent1"/>
-          </a:effectRef>
-          <a:fontRef idx="minor">
-            <a:schemeClr val="lt1"/>
-          </a:fontRef>
-        </p:style>
         <p:txBody>
           <a:bodyPr rtlCol="0" anchor="ctr"/>
           <a:lstStyle/>
@@ -7905,14 +7537,155 @@
       </p:sp>
       <p:sp>
         <p:nvSpPr>
-          <p:cNvPr id="11" name="Roadmap track 1" descr="pptx-deck-generated"/>
+          <p:cNvPr id="8" name="Roadmap row 4" descr="pptx-deck-generated"/>
+          <p:cNvSpPr/>
+          <p:nvPr/>
+        </p:nvSpPr>
+        <p:spPr>
+          <a:xfrm>
+            <a:off x="457200" y="3803904"/>
+            <a:ext cx="11274552" cy="603504"/>
+          </a:xfrm>
+          <a:prstGeom prst="rect">
+            <a:avLst/>
+          </a:prstGeom>
+          <a:solidFill>
+            <a:schemeClr val="lt2"/>
+          </a:solidFill>
+        </p:spPr>
+        <p:txBody>
+          <a:bodyPr rtlCol="0" anchor="ctr"/>
+          <a:lstStyle/>
+          <a:p>
+            <a:pPr algn="ctr"/>
+          </a:p>
+        </p:txBody>
+      </p:sp>
+      <p:cxnSp>
+        <p:nvCxnSpPr>
+          <p:cNvPr id="9" name="Roadmap grid 1" descr="pptx-deck-generated"/>
+          <p:cNvCxnSpPr/>
+          <p:nvPr/>
+        </p:nvCxnSpPr>
+        <p:spPr>
+          <a:xfrm>
+            <a:off x="2468880" y="1993391"/>
+            <a:ext cx="0" cy="3017521"/>
+          </a:xfrm>
+          <a:prstGeom prst="line">
+            <a:avLst/>
+          </a:prstGeom>
+          <a:ln w="9525">
+            <a:solidFill>
+              <a:schemeClr val="lt1">
+                <a:lumMod val="85000"/>
+              </a:schemeClr>
+            </a:solidFill>
+          </a:ln>
+        </p:spPr>
+      </p:cxnSp>
+      <p:cxnSp>
+        <p:nvCxnSpPr>
+          <p:cNvPr id="10" name="Roadmap grid 2" descr="pptx-deck-generated"/>
+          <p:cNvCxnSpPr/>
+          <p:nvPr/>
+        </p:nvCxnSpPr>
+        <p:spPr>
+          <a:xfrm>
+            <a:off x="4784598" y="1993391"/>
+            <a:ext cx="0" cy="3017521"/>
+          </a:xfrm>
+          <a:prstGeom prst="line">
+            <a:avLst/>
+          </a:prstGeom>
+          <a:ln w="9525">
+            <a:solidFill>
+              <a:schemeClr val="lt1">
+                <a:lumMod val="85000"/>
+              </a:schemeClr>
+            </a:solidFill>
+          </a:ln>
+        </p:spPr>
+      </p:cxnSp>
+      <p:cxnSp>
+        <p:nvCxnSpPr>
+          <p:cNvPr id="11" name="Roadmap grid 3" descr="pptx-deck-generated"/>
+          <p:cNvCxnSpPr/>
+          <p:nvPr/>
+        </p:nvCxnSpPr>
+        <p:spPr>
+          <a:xfrm>
+            <a:off x="7100316" y="1993391"/>
+            <a:ext cx="0" cy="3017521"/>
+          </a:xfrm>
+          <a:prstGeom prst="line">
+            <a:avLst/>
+          </a:prstGeom>
+          <a:ln w="9525">
+            <a:solidFill>
+              <a:schemeClr val="lt1">
+                <a:lumMod val="85000"/>
+              </a:schemeClr>
+            </a:solidFill>
+          </a:ln>
+        </p:spPr>
+      </p:cxnSp>
+      <p:cxnSp>
+        <p:nvCxnSpPr>
+          <p:cNvPr id="12" name="Roadmap grid 4" descr="pptx-deck-generated"/>
+          <p:cNvCxnSpPr/>
+          <p:nvPr/>
+        </p:nvCxnSpPr>
+        <p:spPr>
+          <a:xfrm>
+            <a:off x="9416034" y="1993391"/>
+            <a:ext cx="0" cy="3017521"/>
+          </a:xfrm>
+          <a:prstGeom prst="line">
+            <a:avLst/>
+          </a:prstGeom>
+          <a:ln w="9525">
+            <a:solidFill>
+              <a:schemeClr val="lt1">
+                <a:lumMod val="85000"/>
+              </a:schemeClr>
+            </a:solidFill>
+          </a:ln>
+        </p:spPr>
+      </p:cxnSp>
+      <p:cxnSp>
+        <p:nvCxnSpPr>
+          <p:cNvPr id="13" name="Roadmap grid 5" descr="pptx-deck-generated"/>
+          <p:cNvCxnSpPr/>
+          <p:nvPr/>
+        </p:nvCxnSpPr>
+        <p:spPr>
+          <a:xfrm>
+            <a:off x="11731751" y="1993391"/>
+            <a:ext cx="0" cy="3017521"/>
+          </a:xfrm>
+          <a:prstGeom prst="line">
+            <a:avLst/>
+          </a:prstGeom>
+          <a:ln w="9525">
+            <a:solidFill>
+              <a:schemeClr val="lt1">
+                <a:lumMod val="85000"/>
+              </a:schemeClr>
+            </a:solidFill>
+          </a:ln>
+        </p:spPr>
+      </p:cxnSp>
+      <p:sp>
+        <p:nvSpPr>
+          <p:cNvPr id="14" name="Roadmap track 1" descr="pptx-deck-generated"/>
           <p:cNvSpPr txBox="1"/>
           <p:nvPr/>
         </p:nvSpPr>
         <p:spPr>
           <a:xfrm>
             <a:off x="493776" y="2020823"/>
-            <a:ext cx="1920240" cy="780897"/>
+            <a:ext cx="1920240" cy="548640"/>
           </a:xfrm>
           <a:prstGeom prst="rect">
             <a:avLst/>
@@ -7923,7 +7696,7 @@
           </a:ln>
         </p:spPr>
         <p:txBody>
-          <a:bodyPr wrap="square" anchor="ctr" lIns="82296" rIns="82296" tIns="36576" bIns="36576">
+          <a:bodyPr wrap="square" anchor="t" lIns="109728" rIns="109728" tIns="73152" bIns="73152">
             <a:spAutoFit/>
           </a:bodyPr>
           <a:lstStyle/>
@@ -7937,7 +7710,7 @@
               </a:spcAft>
             </a:pPr>
             <a:r>
-              <a:rPr sz="1000" b="1">
+              <a:rPr sz="1400" b="1">
                 <a:solidFill>
                   <a:schemeClr val="dk1"/>
                 </a:solidFill>
@@ -7951,52 +7724,40 @@
       </p:sp>
       <p:grpSp>
         <p:nvGrpSpPr>
-          <p:cNvPr id="12" name="Roadmap 1" descr="pptx-deck-generated"/>
+          <p:cNvPr id="15" name="Roadmap 1" descr="pptx-deck-generated"/>
           <p:cNvGrpSpPr/>
           <p:nvPr/>
         </p:nvGrpSpPr>
         <p:grpSpPr>
           <a:xfrm>
-            <a:off x="2505456" y="2066543"/>
-            <a:ext cx="2242565" cy="689457"/>
+            <a:off x="2505456" y="2103120"/>
+            <a:ext cx="2242565" cy="384048"/>
             <a:chOff x="0" y="0"/>
-            <a:chExt cx="2242565" cy="689457"/>
+            <a:chExt cx="2242565" cy="384048"/>
           </a:xfrm>
         </p:grpSpPr>
         <p:sp>
           <p:nvSpPr>
-            <p:cNvPr id="13" name="Roadmap track 1 bar 1" descr="pptx-deck-generated"/>
+            <p:cNvPr id="16" name="Roadmap track 1 bar 1" descr="pptx-deck-generated"/>
             <p:cNvSpPr/>
             <p:nvPr/>
           </p:nvSpPr>
           <p:spPr>
             <a:xfrm>
               <a:off x="0" y="0"/>
-              <a:ext cx="2242565" cy="689457"/>
+              <a:ext cx="2242565" cy="384048"/>
             </a:xfrm>
             <a:prstGeom prst="roundRect">
-              <a:avLst/>
+              <a:avLst>
+                <a:gd name="adj" fmla="val 14286"/>
+              </a:avLst>
             </a:prstGeom>
             <a:solidFill>
               <a:schemeClr val="accent1"/>
             </a:solidFill>
           </p:spPr>
-          <p:style>
-            <a:lnRef idx="1">
-              <a:schemeClr val="accent1"/>
-            </a:lnRef>
-            <a:fillRef idx="3">
-              <a:schemeClr val="accent1"/>
-            </a:fillRef>
-            <a:effectRef idx="2">
-              <a:schemeClr val="accent1"/>
-            </a:effectRef>
-            <a:fontRef idx="minor">
-              <a:schemeClr val="lt1"/>
-            </a:fontRef>
-          </p:style>
           <p:txBody>
-            <a:bodyPr rtlCol="0" anchor="ctr" wrap="square" lIns="82296" rIns="82296" tIns="36576" bIns="36576"/>
+            <a:bodyPr rtlCol="0" anchor="ctr" wrap="square" lIns="109728" rIns="109728" tIns="73152" bIns="73152"/>
             <a:lstStyle/>
             <a:p>
               <a:pPr algn="ctr">
@@ -8008,7 +7769,7 @@
                 </a:spcAft>
               </a:pPr>
               <a:r>
-                <a:rPr sz="1000" b="1">
+                <a:rPr sz="1200" b="1">
                   <a:solidFill>
                     <a:schemeClr val="lt1"/>
                   </a:solidFill>
@@ -8023,14 +7784,14 @@
       </p:grpSp>
       <p:sp>
         <p:nvSpPr>
-          <p:cNvPr id="14" name="Roadmap track 2" descr="pptx-deck-generated"/>
+          <p:cNvPr id="17" name="Roadmap track 2" descr="pptx-deck-generated"/>
           <p:cNvSpPr txBox="1"/>
           <p:nvPr/>
         </p:nvSpPr>
         <p:spPr>
           <a:xfrm>
-            <a:off x="493776" y="2856585"/>
-            <a:ext cx="1920240" cy="780897"/>
+            <a:off x="493776" y="2624327"/>
+            <a:ext cx="1920240" cy="548640"/>
           </a:xfrm>
           <a:prstGeom prst="rect">
             <a:avLst/>
@@ -8041,7 +7802,7 @@
           </a:ln>
         </p:spPr>
         <p:txBody>
-          <a:bodyPr wrap="square" anchor="ctr" lIns="82296" rIns="82296" tIns="36576" bIns="36576">
+          <a:bodyPr wrap="square" anchor="t" lIns="109728" rIns="109728" tIns="73152" bIns="73152">
             <a:spAutoFit/>
           </a:bodyPr>
           <a:lstStyle/>
@@ -8055,7 +7816,7 @@
               </a:spcAft>
             </a:pPr>
             <a:r>
-              <a:rPr sz="1000" b="1">
+              <a:rPr sz="1400" b="1">
                 <a:solidFill>
                   <a:schemeClr val="dk1"/>
                 </a:solidFill>
@@ -8069,52 +7830,40 @@
       </p:sp>
       <p:grpSp>
         <p:nvGrpSpPr>
-          <p:cNvPr id="15" name="Roadmap 11" descr="pptx-deck-generated"/>
+          <p:cNvPr id="18" name="Roadmap 11" descr="pptx-deck-generated"/>
           <p:cNvGrpSpPr/>
           <p:nvPr/>
         </p:nvGrpSpPr>
         <p:grpSpPr>
           <a:xfrm>
-            <a:off x="2505456" y="2902305"/>
-            <a:ext cx="4558283" cy="689457"/>
+            <a:off x="2505456" y="2706624"/>
+            <a:ext cx="4558283" cy="384048"/>
             <a:chOff x="0" y="0"/>
-            <a:chExt cx="4558283" cy="689457"/>
+            <a:chExt cx="4558283" cy="384048"/>
           </a:xfrm>
         </p:grpSpPr>
         <p:sp>
           <p:nvSpPr>
-            <p:cNvPr id="16" name="Roadmap track 2 bar 1" descr="pptx-deck-generated"/>
+            <p:cNvPr id="19" name="Roadmap track 2 bar 1" descr="pptx-deck-generated"/>
             <p:cNvSpPr/>
             <p:nvPr/>
           </p:nvSpPr>
           <p:spPr>
             <a:xfrm>
               <a:off x="0" y="0"/>
-              <a:ext cx="4558283" cy="689457"/>
+              <a:ext cx="4558283" cy="384048"/>
             </a:xfrm>
             <a:prstGeom prst="roundRect">
-              <a:avLst/>
+              <a:avLst>
+                <a:gd name="adj" fmla="val 14286"/>
+              </a:avLst>
             </a:prstGeom>
             <a:solidFill>
               <a:schemeClr val="accent1"/>
             </a:solidFill>
           </p:spPr>
-          <p:style>
-            <a:lnRef idx="1">
-              <a:schemeClr val="accent1"/>
-            </a:lnRef>
-            <a:fillRef idx="3">
-              <a:schemeClr val="accent1"/>
-            </a:fillRef>
-            <a:effectRef idx="2">
-              <a:schemeClr val="accent1"/>
-            </a:effectRef>
-            <a:fontRef idx="minor">
-              <a:schemeClr val="lt1"/>
-            </a:fontRef>
-          </p:style>
           <p:txBody>
-            <a:bodyPr rtlCol="0" anchor="ctr" wrap="square" lIns="82296" rIns="82296" tIns="36576" bIns="36576"/>
+            <a:bodyPr rtlCol="0" anchor="ctr" wrap="square" lIns="109728" rIns="109728" tIns="73152" bIns="73152"/>
             <a:lstStyle/>
             <a:p>
               <a:pPr algn="ctr">
@@ -8126,7 +7875,7 @@
                 </a:spcAft>
               </a:pPr>
               <a:r>
-                <a:rPr sz="1000" b="1">
+                <a:rPr sz="1200" b="1">
                   <a:solidFill>
                     <a:schemeClr val="lt1"/>
                   </a:solidFill>
@@ -8141,14 +7890,14 @@
       </p:grpSp>
       <p:sp>
         <p:nvSpPr>
-          <p:cNvPr id="17" name="Roadmap track 3" descr="pptx-deck-generated"/>
+          <p:cNvPr id="20" name="Roadmap track 3" descr="pptx-deck-generated"/>
           <p:cNvSpPr txBox="1"/>
           <p:nvPr/>
         </p:nvSpPr>
         <p:spPr>
           <a:xfrm>
-            <a:off x="493776" y="3692347"/>
-            <a:ext cx="1920240" cy="780897"/>
+            <a:off x="493776" y="3227832"/>
+            <a:ext cx="1920240" cy="548640"/>
           </a:xfrm>
           <a:prstGeom prst="rect">
             <a:avLst/>
@@ -8159,7 +7908,7 @@
           </a:ln>
         </p:spPr>
         <p:txBody>
-          <a:bodyPr wrap="square" anchor="ctr" lIns="82296" rIns="82296" tIns="36576" bIns="36576">
+          <a:bodyPr wrap="square" anchor="t" lIns="109728" rIns="109728" tIns="73152" bIns="73152">
             <a:spAutoFit/>
           </a:bodyPr>
           <a:lstStyle/>
@@ -8173,7 +7922,7 @@
               </a:spcAft>
             </a:pPr>
             <a:r>
-              <a:rPr sz="1000" b="1">
+              <a:rPr sz="1400" b="1">
                 <a:solidFill>
                   <a:schemeClr val="dk1"/>
                 </a:solidFill>
@@ -8187,52 +7936,40 @@
       </p:sp>
       <p:grpSp>
         <p:nvGrpSpPr>
-          <p:cNvPr id="18" name="Roadmap 21" descr="pptx-deck-generated"/>
+          <p:cNvPr id="21" name="Roadmap 21" descr="pptx-deck-generated"/>
           <p:cNvGrpSpPr/>
           <p:nvPr/>
         </p:nvGrpSpPr>
         <p:grpSpPr>
           <a:xfrm>
-            <a:off x="4821174" y="3738067"/>
-            <a:ext cx="2242565" cy="689457"/>
+            <a:off x="4821174" y="3310128"/>
+            <a:ext cx="2242565" cy="384048"/>
             <a:chOff x="0" y="0"/>
-            <a:chExt cx="2242565" cy="689457"/>
+            <a:chExt cx="2242565" cy="384048"/>
           </a:xfrm>
         </p:grpSpPr>
         <p:sp>
           <p:nvSpPr>
-            <p:cNvPr id="19" name="Roadmap track 3 bar 1" descr="pptx-deck-generated"/>
+            <p:cNvPr id="22" name="Roadmap track 3 bar 1" descr="pptx-deck-generated"/>
             <p:cNvSpPr/>
             <p:nvPr/>
           </p:nvSpPr>
           <p:spPr>
             <a:xfrm>
               <a:off x="0" y="0"/>
-              <a:ext cx="2242565" cy="689457"/>
+              <a:ext cx="2242565" cy="384048"/>
             </a:xfrm>
             <a:prstGeom prst="roundRect">
-              <a:avLst/>
+              <a:avLst>
+                <a:gd name="adj" fmla="val 14286"/>
+              </a:avLst>
             </a:prstGeom>
             <a:solidFill>
               <a:schemeClr val="accent1"/>
             </a:solidFill>
           </p:spPr>
-          <p:style>
-            <a:lnRef idx="1">
-              <a:schemeClr val="accent1"/>
-            </a:lnRef>
-            <a:fillRef idx="3">
-              <a:schemeClr val="accent1"/>
-            </a:fillRef>
-            <a:effectRef idx="2">
-              <a:schemeClr val="accent1"/>
-            </a:effectRef>
-            <a:fontRef idx="minor">
-              <a:schemeClr val="lt1"/>
-            </a:fontRef>
-          </p:style>
           <p:txBody>
-            <a:bodyPr rtlCol="0" anchor="ctr" wrap="square" lIns="82296" rIns="82296" tIns="36576" bIns="36576"/>
+            <a:bodyPr rtlCol="0" anchor="ctr" wrap="square" lIns="109728" rIns="109728" tIns="73152" bIns="73152"/>
             <a:lstStyle/>
             <a:p>
               <a:pPr algn="ctr">
@@ -8244,7 +7981,7 @@
                 </a:spcAft>
               </a:pPr>
               <a:r>
-                <a:rPr sz="1000" b="1">
+                <a:rPr sz="1200" b="1">
                   <a:solidFill>
                     <a:schemeClr val="lt1"/>
                   </a:solidFill>
@@ -8259,14 +7996,14 @@
       </p:grpSp>
       <p:sp>
         <p:nvSpPr>
-          <p:cNvPr id="20" name="Roadmap track 4" descr="pptx-deck-generated"/>
+          <p:cNvPr id="23" name="Roadmap track 4" descr="pptx-deck-generated"/>
           <p:cNvSpPr txBox="1"/>
           <p:nvPr/>
         </p:nvSpPr>
         <p:spPr>
           <a:xfrm>
-            <a:off x="493776" y="4528108"/>
-            <a:ext cx="1920240" cy="780897"/>
+            <a:off x="493776" y="3831336"/>
+            <a:ext cx="1920240" cy="548640"/>
           </a:xfrm>
           <a:prstGeom prst="rect">
             <a:avLst/>
@@ -8277,7 +8014,7 @@
           </a:ln>
         </p:spPr>
         <p:txBody>
-          <a:bodyPr wrap="square" anchor="ctr" lIns="82296" rIns="82296" tIns="36576" bIns="36576">
+          <a:bodyPr wrap="square" anchor="t" lIns="109728" rIns="109728" tIns="73152" bIns="73152">
             <a:spAutoFit/>
           </a:bodyPr>
           <a:lstStyle/>
@@ -8291,7 +8028,7 @@
               </a:spcAft>
             </a:pPr>
             <a:r>
-              <a:rPr sz="1000" b="1">
+              <a:rPr sz="1400" b="1">
                 <a:solidFill>
                   <a:schemeClr val="dk1"/>
                 </a:solidFill>
@@ -8305,52 +8042,40 @@
       </p:sp>
       <p:grpSp>
         <p:nvGrpSpPr>
-          <p:cNvPr id="21" name="Roadmap 31" descr="pptx-deck-generated"/>
+          <p:cNvPr id="24" name="Roadmap 31" descr="pptx-deck-generated"/>
           <p:cNvGrpSpPr/>
           <p:nvPr/>
         </p:nvGrpSpPr>
         <p:grpSpPr>
           <a:xfrm>
-            <a:off x="7136892" y="4573828"/>
-            <a:ext cx="2242565" cy="689457"/>
+            <a:off x="7136892" y="3913632"/>
+            <a:ext cx="2242565" cy="384048"/>
             <a:chOff x="0" y="0"/>
-            <a:chExt cx="2242565" cy="689457"/>
+            <a:chExt cx="2242565" cy="384048"/>
           </a:xfrm>
         </p:grpSpPr>
         <p:sp>
           <p:nvSpPr>
-            <p:cNvPr id="22" name="Roadmap track 4 bar 1" descr="pptx-deck-generated"/>
+            <p:cNvPr id="25" name="Roadmap track 4 bar 1" descr="pptx-deck-generated"/>
             <p:cNvSpPr/>
             <p:nvPr/>
           </p:nvSpPr>
           <p:spPr>
             <a:xfrm>
               <a:off x="0" y="0"/>
-              <a:ext cx="2242565" cy="689457"/>
+              <a:ext cx="2242565" cy="384048"/>
             </a:xfrm>
             <a:prstGeom prst="roundRect">
-              <a:avLst/>
+              <a:avLst>
+                <a:gd name="adj" fmla="val 14286"/>
+              </a:avLst>
             </a:prstGeom>
             <a:solidFill>
               <a:schemeClr val="accent2"/>
             </a:solidFill>
           </p:spPr>
-          <p:style>
-            <a:lnRef idx="1">
-              <a:schemeClr val="accent1"/>
-            </a:lnRef>
-            <a:fillRef idx="3">
-              <a:schemeClr val="accent1"/>
-            </a:fillRef>
-            <a:effectRef idx="2">
-              <a:schemeClr val="accent1"/>
-            </a:effectRef>
-            <a:fontRef idx="minor">
-              <a:schemeClr val="lt1"/>
-            </a:fontRef>
-          </p:style>
           <p:txBody>
-            <a:bodyPr rtlCol="0" anchor="ctr" wrap="square" lIns="82296" rIns="82296" tIns="36576" bIns="36576"/>
+            <a:bodyPr rtlCol="0" anchor="ctr" wrap="square" lIns="109728" rIns="109728" tIns="73152" bIns="73152"/>
             <a:lstStyle/>
             <a:p>
               <a:pPr algn="ctr">
@@ -8362,7 +8087,7 @@
                 </a:spcAft>
               </a:pPr>
               <a:r>
-                <a:rPr sz="1000" b="1">
+                <a:rPr sz="1200" b="1">
                   <a:solidFill>
                     <a:schemeClr val="lt1"/>
                   </a:solidFill>
@@ -8377,14 +8102,14 @@
       </p:grpSp>
       <p:sp>
         <p:nvSpPr>
-          <p:cNvPr id="23" name="Roadmap track 5" descr="pptx-deck-generated"/>
+          <p:cNvPr id="26" name="Roadmap track 5" descr="pptx-deck-generated"/>
           <p:cNvSpPr txBox="1"/>
           <p:nvPr/>
         </p:nvSpPr>
         <p:spPr>
           <a:xfrm>
-            <a:off x="493776" y="5363870"/>
-            <a:ext cx="1920240" cy="780897"/>
+            <a:off x="493776" y="4434840"/>
+            <a:ext cx="1920240" cy="548640"/>
           </a:xfrm>
           <a:prstGeom prst="rect">
             <a:avLst/>
@@ -8395,7 +8120,7 @@
           </a:ln>
         </p:spPr>
         <p:txBody>
-          <a:bodyPr wrap="square" anchor="ctr" lIns="82296" rIns="82296" tIns="36576" bIns="36576">
+          <a:bodyPr wrap="square" anchor="t" lIns="109728" rIns="109728" tIns="73152" bIns="73152">
             <a:spAutoFit/>
           </a:bodyPr>
           <a:lstStyle/>
@@ -8409,7 +8134,7 @@
               </a:spcAft>
             </a:pPr>
             <a:r>
-              <a:rPr sz="1000" b="1">
+              <a:rPr sz="1300" b="1">
                 <a:solidFill>
                   <a:schemeClr val="dk1"/>
                 </a:solidFill>
@@ -8423,52 +8148,40 @@
       </p:sp>
       <p:grpSp>
         <p:nvGrpSpPr>
-          <p:cNvPr id="24" name="Roadmap 41" descr="pptx-deck-generated"/>
+          <p:cNvPr id="27" name="Roadmap 41" descr="pptx-deck-generated"/>
           <p:cNvGrpSpPr/>
           <p:nvPr/>
         </p:nvGrpSpPr>
         <p:grpSpPr>
           <a:xfrm>
-            <a:off x="7136892" y="5409590"/>
-            <a:ext cx="4558283" cy="689457"/>
+            <a:off x="7136892" y="4517136"/>
+            <a:ext cx="4558283" cy="384048"/>
             <a:chOff x="0" y="0"/>
-            <a:chExt cx="4558283" cy="689457"/>
+            <a:chExt cx="4558283" cy="384048"/>
           </a:xfrm>
         </p:grpSpPr>
         <p:sp>
           <p:nvSpPr>
-            <p:cNvPr id="25" name="Roadmap track 5 bar 1" descr="pptx-deck-generated"/>
+            <p:cNvPr id="28" name="Roadmap track 5 bar 1" descr="pptx-deck-generated"/>
             <p:cNvSpPr/>
             <p:nvPr/>
           </p:nvSpPr>
           <p:spPr>
             <a:xfrm>
               <a:off x="0" y="0"/>
-              <a:ext cx="4558283" cy="689457"/>
+              <a:ext cx="4558283" cy="384048"/>
             </a:xfrm>
             <a:prstGeom prst="roundRect">
-              <a:avLst/>
+              <a:avLst>
+                <a:gd name="adj" fmla="val 14286"/>
+              </a:avLst>
             </a:prstGeom>
             <a:solidFill>
               <a:schemeClr val="accent1"/>
             </a:solidFill>
           </p:spPr>
-          <p:style>
-            <a:lnRef idx="1">
-              <a:schemeClr val="accent1"/>
-            </a:lnRef>
-            <a:fillRef idx="3">
-              <a:schemeClr val="accent1"/>
-            </a:fillRef>
-            <a:effectRef idx="2">
-              <a:schemeClr val="accent1"/>
-            </a:effectRef>
-            <a:fontRef idx="minor">
-              <a:schemeClr val="lt1"/>
-            </a:fontRef>
-          </p:style>
           <p:txBody>
-            <a:bodyPr rtlCol="0" anchor="ctr" wrap="square" lIns="82296" rIns="82296" tIns="36576" bIns="36576"/>
+            <a:bodyPr rtlCol="0" anchor="ctr" wrap="square" lIns="109728" rIns="109728" tIns="73152" bIns="73152"/>
             <a:lstStyle/>
             <a:p>
               <a:pPr algn="ctr">
@@ -8480,7 +8193,7 @@
                 </a:spcAft>
               </a:pPr>
               <a:r>
-                <a:rPr sz="1000" b="1">
+                <a:rPr sz="1200" b="1">
                   <a:solidFill>
                     <a:schemeClr val="lt1"/>
                   </a:solidFill>
@@ -9108,175 +8821,38 @@
           </a:p>
         </p:txBody>
       </p:sp>
-      <p:sp>
-        <p:nvSpPr>
-          <p:cNvPr id="3" name="Component takeaway" descr="pptx-deck-generated"/>
-          <p:cNvSpPr/>
-          <p:nvPr/>
-        </p:nvSpPr>
-        <p:spPr>
-          <a:xfrm>
-            <a:off x="457200" y="5660136"/>
-            <a:ext cx="11274552" cy="512064"/>
-          </a:xfrm>
-          <a:prstGeom prst="roundRect">
-            <a:avLst/>
-          </a:prstGeom>
-          <a:solidFill>
-            <a:schemeClr val="accent1">
-              <a:lumMod val="15000"/>
-              <a:lumOff val="85000"/>
-            </a:schemeClr>
-          </a:solidFill>
-          <a:ln w="9525">
-            <a:solidFill>
-              <a:schemeClr val="lt1">
-                <a:lumMod val="85000"/>
-              </a:schemeClr>
-            </a:solidFill>
-          </a:ln>
-        </p:spPr>
-        <p:style>
-          <a:lnRef idx="1">
-            <a:schemeClr val="accent1"/>
-          </a:lnRef>
-          <a:fillRef idx="3">
-            <a:schemeClr val="accent1"/>
-          </a:fillRef>
-          <a:effectRef idx="2">
-            <a:schemeClr val="accent1"/>
-          </a:effectRef>
-          <a:fontRef idx="minor">
-            <a:schemeClr val="lt1"/>
-          </a:fontRef>
-        </p:style>
-        <p:txBody>
-          <a:bodyPr rtlCol="0" anchor="ctr"/>
-          <a:lstStyle/>
-          <a:p>
-            <a:pPr algn="ctr"/>
-          </a:p>
-        </p:txBody>
-      </p:sp>
-      <p:sp>
-        <p:nvSpPr>
-          <p:cNvPr id="4" name="Takeaway accent" descr="pptx-deck-generated"/>
-          <p:cNvSpPr/>
-          <p:nvPr/>
-        </p:nvSpPr>
-        <p:spPr>
-          <a:xfrm>
-            <a:off x="457200" y="5660136"/>
-            <a:ext cx="82296" cy="512064"/>
-          </a:xfrm>
-          <a:prstGeom prst="rect">
-            <a:avLst/>
-          </a:prstGeom>
-          <a:solidFill>
-            <a:schemeClr val="accent1"/>
-          </a:solidFill>
-        </p:spPr>
-        <p:style>
-          <a:lnRef idx="1">
-            <a:schemeClr val="accent1"/>
-          </a:lnRef>
-          <a:fillRef idx="3">
-            <a:schemeClr val="accent1"/>
-          </a:fillRef>
-          <a:effectRef idx="2">
-            <a:schemeClr val="accent1"/>
-          </a:effectRef>
-          <a:fontRef idx="minor">
-            <a:schemeClr val="lt1"/>
-          </a:fontRef>
-        </p:style>
-        <p:txBody>
-          <a:bodyPr rtlCol="0" anchor="ctr"/>
-          <a:lstStyle/>
-          <a:p>
-            <a:pPr algn="ctr"/>
-          </a:p>
-        </p:txBody>
-      </p:sp>
-      <p:sp>
-        <p:nvSpPr>
-          <p:cNvPr id="5" name="Takeaway text" descr="pptx-deck-generated"/>
-          <p:cNvSpPr txBox="1"/>
-          <p:nvPr/>
-        </p:nvSpPr>
-        <p:spPr>
-          <a:xfrm>
-            <a:off x="603504" y="5687568"/>
-            <a:ext cx="11073384" cy="457200"/>
-          </a:xfrm>
-          <a:prstGeom prst="rect">
-            <a:avLst/>
-          </a:prstGeom>
-          <a:noFill/>
-          <a:ln>
-            <a:noFill/>
-          </a:ln>
-        </p:spPr>
-        <p:txBody>
-          <a:bodyPr wrap="square" anchor="ctr" lIns="82296" rIns="82296" tIns="36576" bIns="36576">
-            <a:spAutoFit/>
-          </a:bodyPr>
-          <a:lstStyle/>
-          <a:p>
-            <a:pPr algn="l">
-              <a:lnSpc>
-                <a:spcPct val="100000"/>
-              </a:lnSpc>
-              <a:spcAft>
-                <a:spcPts val="0"/>
-              </a:spcAft>
-            </a:pPr>
-            <a:r>
-              <a:rPr sz="1200" b="1">
-                <a:solidFill>
-                  <a:schemeClr val="dk1"/>
-                </a:solidFill>
-                <a:latin typeface="Yu Gothic"/>
-                <a:ea typeface="Yu Gothic"/>
-              </a:rPr>
-              <a:t>旧サーバは1月末まで停止せず保全する</a:t>
-            </a:r>
-          </a:p>
-        </p:txBody>
-      </p:sp>
       <p:grpSp>
         <p:nvGrpSpPr>
-          <p:cNvPr id="6" name="Process 1" descr="pptx-deck-generated"/>
+          <p:cNvPr id="3" name="Process 1" descr="pptx-deck-generated"/>
           <p:cNvGrpSpPr/>
           <p:nvPr/>
         </p:nvGrpSpPr>
         <p:grpSpPr>
           <a:xfrm>
-            <a:off x="457200" y="1664207"/>
-            <a:ext cx="3575304" cy="3867912"/>
+            <a:off x="457200" y="1554480"/>
+            <a:ext cx="3575304" cy="1261872"/>
             <a:chOff x="0" y="0"/>
-            <a:chExt cx="3575304" cy="3867912"/>
+            <a:chExt cx="3575304" cy="1261872"/>
           </a:xfrm>
         </p:grpSpPr>
         <p:sp>
           <p:nvSpPr>
-            <p:cNvPr id="7" name="Process 1 box" descr="pptx-deck-generated"/>
+            <p:cNvPr id="4" name="Process 1 box" descr="pptx-deck-generated"/>
             <p:cNvSpPr/>
             <p:nvPr/>
           </p:nvSpPr>
           <p:spPr>
             <a:xfrm>
               <a:off x="0" y="0"/>
-              <a:ext cx="3575304" cy="1097280"/>
+              <a:ext cx="3575304" cy="1261872"/>
             </a:xfrm>
             <a:prstGeom prst="roundRect">
-              <a:avLst/>
+              <a:avLst>
+                <a:gd name="adj" fmla="val 4348"/>
+              </a:avLst>
             </a:prstGeom>
             <a:solidFill>
-              <a:schemeClr val="accent1">
-                <a:lumMod val="15000"/>
-                <a:lumOff val="85000"/>
-              </a:schemeClr>
+              <a:schemeClr val="lt2"/>
             </a:solidFill>
             <a:ln w="9525">
               <a:solidFill>
@@ -9284,25 +8860,40 @@
               </a:solidFill>
             </a:ln>
           </p:spPr>
-          <p:style>
-            <a:lnRef idx="1">
-              <a:schemeClr val="accent1"/>
-            </a:lnRef>
-            <a:fillRef idx="3">
-              <a:schemeClr val="accent1"/>
-            </a:fillRef>
-            <a:effectRef idx="2">
-              <a:schemeClr val="accent1"/>
-            </a:effectRef>
-            <a:fontRef idx="minor">
-              <a:schemeClr val="lt1"/>
-            </a:fontRef>
-          </p:style>
           <p:txBody>
-            <a:bodyPr rtlCol="0" anchor="ctr" wrap="square" lIns="82296" rIns="82296" tIns="36576" bIns="36576"/>
+            <a:bodyPr rtlCol="0" anchor="ctr"/>
             <a:lstStyle/>
             <a:p>
-              <a:pPr algn="ctr">
+              <a:pPr algn="ctr"/>
+            </a:p>
+          </p:txBody>
+        </p:sp>
+        <p:sp>
+          <p:nvSpPr>
+            <p:cNvPr id="5" name="Process 1 label" descr="pptx-deck-generated"/>
+            <p:cNvSpPr txBox="1"/>
+            <p:nvPr/>
+          </p:nvSpPr>
+          <p:spPr>
+            <a:xfrm>
+              <a:off x="109728" y="73152"/>
+              <a:ext cx="3355848" cy="396239"/>
+            </a:xfrm>
+            <a:prstGeom prst="rect">
+              <a:avLst/>
+            </a:prstGeom>
+            <a:noFill/>
+            <a:ln>
+              <a:noFill/>
+            </a:ln>
+          </p:spPr>
+          <p:txBody>
+            <a:bodyPr wrap="square" anchor="t" lIns="109728" rIns="109728" tIns="73152" bIns="73152">
+              <a:spAutoFit/>
+            </a:bodyPr>
+            <a:lstStyle/>
+            <a:p>
+              <a:pPr algn="l">
                 <a:lnSpc>
                   <a:spcPct val="100000"/>
                 </a:lnSpc>
@@ -9311,7 +8902,7 @@
                 </a:spcAft>
               </a:pPr>
               <a:r>
-                <a:rPr sz="1200" b="1">
+                <a:rPr sz="1400" b="1">
                   <a:solidFill>
                     <a:schemeClr val="dk1"/>
                   </a:solidFill>
@@ -9325,14 +8916,14 @@
         </p:sp>
         <p:sp>
           <p:nvSpPr>
-            <p:cNvPr id="8" name="Process 1 detail" descr="pptx-deck-generated"/>
+            <p:cNvPr id="6" name="Process 1 detail" descr="pptx-deck-generated"/>
             <p:cNvSpPr txBox="1"/>
             <p:nvPr/>
           </p:nvSpPr>
           <p:spPr>
             <a:xfrm>
-              <a:off x="36576" y="1152145"/>
-              <a:ext cx="3502152" cy="2715767"/>
+              <a:off x="109728" y="505967"/>
+              <a:ext cx="3355848" cy="682752"/>
             </a:xfrm>
             <a:prstGeom prst="rect">
               <a:avLst/>
@@ -9343,12 +8934,12 @@
             </a:ln>
           </p:spPr>
           <p:txBody>
-            <a:bodyPr wrap="square" anchor="ctr" lIns="82296" rIns="82296" tIns="36576" bIns="36576">
+            <a:bodyPr wrap="square" anchor="t" lIns="109728" rIns="109728" tIns="73152" bIns="73152">
               <a:spAutoFit/>
             </a:bodyPr>
             <a:lstStyle/>
             <a:p>
-              <a:pPr algn="ctr">
+              <a:pPr algn="l">
                 <a:lnSpc>
                   <a:spcPct val="100000"/>
                 </a:lnSpc>
@@ -9357,17 +8948,14 @@
                 </a:spcAft>
               </a:pPr>
               <a:r>
-                <a:rPr sz="1000" b="0">
+                <a:rPr sz="1400" b="0">
                   <a:solidFill>
-                    <a:schemeClr val="dk1">
-                      <a:lumMod val="65000"/>
-                      <a:lumOff val="35000"/>
-                    </a:schemeClr>
+                    <a:schemeClr val="dk1"/>
                   </a:solidFill>
                   <a:latin typeface="Yu Gothic"/>
                   <a:ea typeface="Yu Gothic"/>
                 </a:rPr>
-                <a:t>• ログイン・チケット表示・添付取得・通知メール</a:t>
+                <a:t>ログイン・チケット表示・添付取得・通知メール</a:t>
               </a:r>
             </a:p>
           </p:txBody>
@@ -9375,36 +8963,22 @@
       </p:grpSp>
       <p:sp>
         <p:nvSpPr>
-          <p:cNvPr id="9" name="Process arrow 1" descr="pptx-deck-generated"/>
+          <p:cNvPr id="7" name="Process arrow 1" descr="pptx-deck-generated"/>
           <p:cNvSpPr/>
           <p:nvPr/>
         </p:nvSpPr>
         <p:spPr>
-          <a:xfrm>
-            <a:off x="4059936" y="1965960"/>
-            <a:ext cx="237744" cy="310896"/>
-          </a:xfrm>
-          <a:prstGeom prst="rightArrow">
+          <a:xfrm rot="5400000">
+            <a:off x="4069080" y="2075688"/>
+            <a:ext cx="219456" cy="219456"/>
+          </a:xfrm>
+          <a:prstGeom prst="triangle">
             <a:avLst/>
           </a:prstGeom>
           <a:solidFill>
             <a:schemeClr val="accent1"/>
           </a:solidFill>
         </p:spPr>
-        <p:style>
-          <a:lnRef idx="1">
-            <a:schemeClr val="accent1"/>
-          </a:lnRef>
-          <a:fillRef idx="3">
-            <a:schemeClr val="accent1"/>
-          </a:fillRef>
-          <a:effectRef idx="2">
-            <a:schemeClr val="accent1"/>
-          </a:effectRef>
-          <a:fontRef idx="minor">
-            <a:schemeClr val="lt1"/>
-          </a:fontRef>
-        </p:style>
         <p:txBody>
           <a:bodyPr rtlCol="0" anchor="ctr"/>
           <a:lstStyle/>
@@ -9415,37 +8989,36 @@
       </p:sp>
       <p:grpSp>
         <p:nvGrpSpPr>
-          <p:cNvPr id="10" name="Process 2" descr="pptx-deck-generated"/>
+          <p:cNvPr id="8" name="Process 2" descr="pptx-deck-generated"/>
           <p:cNvGrpSpPr/>
           <p:nvPr/>
         </p:nvGrpSpPr>
         <p:grpSpPr>
           <a:xfrm>
-            <a:off x="4306824" y="1664207"/>
-            <a:ext cx="3575304" cy="3867912"/>
+            <a:off x="4306824" y="1554480"/>
+            <a:ext cx="3575304" cy="1261872"/>
             <a:chOff x="0" y="0"/>
-            <a:chExt cx="3575304" cy="3867912"/>
+            <a:chExt cx="3575304" cy="1261872"/>
           </a:xfrm>
         </p:grpSpPr>
         <p:sp>
           <p:nvSpPr>
-            <p:cNvPr id="11" name="Process 2 box" descr="pptx-deck-generated"/>
+            <p:cNvPr id="9" name="Process 2 box" descr="pptx-deck-generated"/>
             <p:cNvSpPr/>
             <p:nvPr/>
           </p:nvSpPr>
           <p:spPr>
             <a:xfrm>
               <a:off x="0" y="0"/>
-              <a:ext cx="3575304" cy="1097280"/>
+              <a:ext cx="3575304" cy="1261872"/>
             </a:xfrm>
             <a:prstGeom prst="roundRect">
-              <a:avLst/>
+              <a:avLst>
+                <a:gd name="adj" fmla="val 4348"/>
+              </a:avLst>
             </a:prstGeom>
             <a:solidFill>
-              <a:schemeClr val="accent1">
-                <a:lumMod val="15000"/>
-                <a:lumOff val="85000"/>
-              </a:schemeClr>
+              <a:schemeClr val="lt2"/>
             </a:solidFill>
             <a:ln w="9525">
               <a:solidFill>
@@ -9453,25 +9026,40 @@
               </a:solidFill>
             </a:ln>
           </p:spPr>
-          <p:style>
-            <a:lnRef idx="1">
-              <a:schemeClr val="accent1"/>
-            </a:lnRef>
-            <a:fillRef idx="3">
-              <a:schemeClr val="accent1"/>
-            </a:fillRef>
-            <a:effectRef idx="2">
-              <a:schemeClr val="accent1"/>
-            </a:effectRef>
-            <a:fontRef idx="minor">
-              <a:schemeClr val="lt1"/>
-            </a:fontRef>
-          </p:style>
           <p:txBody>
-            <a:bodyPr rtlCol="0" anchor="ctr" wrap="square" lIns="82296" rIns="82296" tIns="36576" bIns="36576"/>
+            <a:bodyPr rtlCol="0" anchor="ctr"/>
             <a:lstStyle/>
             <a:p>
-              <a:pPr algn="ctr">
+              <a:pPr algn="ctr"/>
+            </a:p>
+          </p:txBody>
+        </p:sp>
+        <p:sp>
+          <p:nvSpPr>
+            <p:cNvPr id="10" name="Process 2 label" descr="pptx-deck-generated"/>
+            <p:cNvSpPr txBox="1"/>
+            <p:nvPr/>
+          </p:nvSpPr>
+          <p:spPr>
+            <a:xfrm>
+              <a:off x="109728" y="73152"/>
+              <a:ext cx="3355848" cy="396239"/>
+            </a:xfrm>
+            <a:prstGeom prst="rect">
+              <a:avLst/>
+            </a:prstGeom>
+            <a:noFill/>
+            <a:ln>
+              <a:noFill/>
+            </a:ln>
+          </p:spPr>
+          <p:txBody>
+            <a:bodyPr wrap="square" anchor="t" lIns="109728" rIns="109728" tIns="73152" bIns="73152">
+              <a:spAutoFit/>
+            </a:bodyPr>
+            <a:lstStyle/>
+            <a:p>
+              <a:pPr algn="l">
                 <a:lnSpc>
                   <a:spcPct val="100000"/>
                 </a:lnSpc>
@@ -9480,7 +9068,7 @@
                 </a:spcAft>
               </a:pPr>
               <a:r>
-                <a:rPr sz="1200" b="1">
+                <a:rPr sz="1400" b="1">
                   <a:solidFill>
                     <a:schemeClr val="dk1"/>
                   </a:solidFill>
@@ -9494,14 +9082,14 @@
         </p:sp>
         <p:sp>
           <p:nvSpPr>
-            <p:cNvPr id="12" name="Process 2 detail" descr="pptx-deck-generated"/>
+            <p:cNvPr id="11" name="Process 2 detail" descr="pptx-deck-generated"/>
             <p:cNvSpPr txBox="1"/>
             <p:nvPr/>
           </p:nvSpPr>
           <p:spPr>
             <a:xfrm>
-              <a:off x="36576" y="1152145"/>
-              <a:ext cx="3502152" cy="2715767"/>
+              <a:off x="109728" y="505967"/>
+              <a:ext cx="3355848" cy="682752"/>
             </a:xfrm>
             <a:prstGeom prst="rect">
               <a:avLst/>
@@ -9512,12 +9100,12 @@
             </a:ln>
           </p:spPr>
           <p:txBody>
-            <a:bodyPr wrap="square" anchor="ctr" lIns="82296" rIns="82296" tIns="36576" bIns="36576">
+            <a:bodyPr wrap="square" anchor="t" lIns="109728" rIns="109728" tIns="73152" bIns="73152">
               <a:spAutoFit/>
             </a:bodyPr>
             <a:lstStyle/>
             <a:p>
-              <a:pPr algn="ctr">
+              <a:pPr algn="l">
                 <a:lnSpc>
                   <a:spcPct val="100000"/>
                 </a:lnSpc>
@@ -9526,17 +9114,14 @@
                 </a:spcAft>
               </a:pPr>
               <a:r>
-                <a:rPr sz="1000" b="0">
+                <a:rPr sz="1400" b="0">
                   <a:solidFill>
-                    <a:schemeClr val="dk1">
-                      <a:lumMod val="65000"/>
-                      <a:lumOff val="35000"/>
-                    </a:schemeClr>
+                    <a:schemeClr val="dk1"/>
                   </a:solidFill>
                   <a:latin typeface="Yu Gothic"/>
                   <a:ea typeface="Yu Gothic"/>
                 </a:rPr>
-                <a:t>• DNSを旧サーバへ戻す</a:t>
+                <a:t>DNSを旧サーバへ戻す</a:t>
               </a:r>
             </a:p>
           </p:txBody>
@@ -9544,36 +9129,22 @@
       </p:grpSp>
       <p:sp>
         <p:nvSpPr>
-          <p:cNvPr id="13" name="Process arrow 2" descr="pptx-deck-generated"/>
+          <p:cNvPr id="12" name="Process arrow 2" descr="pptx-deck-generated"/>
           <p:cNvSpPr/>
           <p:nvPr/>
         </p:nvSpPr>
         <p:spPr>
-          <a:xfrm>
-            <a:off x="7909560" y="1965960"/>
-            <a:ext cx="237744" cy="310896"/>
-          </a:xfrm>
-          <a:prstGeom prst="rightArrow">
+          <a:xfrm rot="5400000">
+            <a:off x="7918704" y="2075688"/>
+            <a:ext cx="219456" cy="219456"/>
+          </a:xfrm>
+          <a:prstGeom prst="triangle">
             <a:avLst/>
           </a:prstGeom>
           <a:solidFill>
             <a:schemeClr val="accent1"/>
           </a:solidFill>
         </p:spPr>
-        <p:style>
-          <a:lnRef idx="1">
-            <a:schemeClr val="accent1"/>
-          </a:lnRef>
-          <a:fillRef idx="3">
-            <a:schemeClr val="accent1"/>
-          </a:fillRef>
-          <a:effectRef idx="2">
-            <a:schemeClr val="accent1"/>
-          </a:effectRef>
-          <a:fontRef idx="minor">
-            <a:schemeClr val="lt1"/>
-          </a:fontRef>
-        </p:style>
         <p:txBody>
           <a:bodyPr rtlCol="0" anchor="ctr"/>
           <a:lstStyle/>
@@ -9584,37 +9155,36 @@
       </p:sp>
       <p:grpSp>
         <p:nvGrpSpPr>
-          <p:cNvPr id="14" name="Process 3" descr="pptx-deck-generated"/>
+          <p:cNvPr id="13" name="Process 3" descr="pptx-deck-generated"/>
           <p:cNvGrpSpPr/>
           <p:nvPr/>
         </p:nvGrpSpPr>
         <p:grpSpPr>
           <a:xfrm>
-            <a:off x="8156448" y="1664207"/>
-            <a:ext cx="3575304" cy="3867912"/>
+            <a:off x="8156448" y="1554480"/>
+            <a:ext cx="3575304" cy="1261872"/>
             <a:chOff x="0" y="0"/>
-            <a:chExt cx="3575304" cy="3867912"/>
+            <a:chExt cx="3575304" cy="1261872"/>
           </a:xfrm>
         </p:grpSpPr>
         <p:sp>
           <p:nvSpPr>
-            <p:cNvPr id="15" name="Process 3 box" descr="pptx-deck-generated"/>
+            <p:cNvPr id="14" name="Process 3 box" descr="pptx-deck-generated"/>
             <p:cNvSpPr/>
             <p:nvPr/>
           </p:nvSpPr>
           <p:spPr>
             <a:xfrm>
               <a:off x="0" y="0"/>
-              <a:ext cx="3575304" cy="1097280"/>
+              <a:ext cx="3575304" cy="1261872"/>
             </a:xfrm>
             <a:prstGeom prst="roundRect">
-              <a:avLst/>
+              <a:avLst>
+                <a:gd name="adj" fmla="val 4348"/>
+              </a:avLst>
             </a:prstGeom>
             <a:solidFill>
-              <a:schemeClr val="accent1">
-                <a:lumMod val="15000"/>
-                <a:lumOff val="85000"/>
-              </a:schemeClr>
+              <a:schemeClr val="lt2"/>
             </a:solidFill>
             <a:ln w="9525">
               <a:solidFill>
@@ -9622,25 +9192,40 @@
               </a:solidFill>
             </a:ln>
           </p:spPr>
-          <p:style>
-            <a:lnRef idx="1">
-              <a:schemeClr val="accent1"/>
-            </a:lnRef>
-            <a:fillRef idx="3">
-              <a:schemeClr val="accent1"/>
-            </a:fillRef>
-            <a:effectRef idx="2">
-              <a:schemeClr val="accent1"/>
-            </a:effectRef>
-            <a:fontRef idx="minor">
-              <a:schemeClr val="lt1"/>
-            </a:fontRef>
-          </p:style>
           <p:txBody>
-            <a:bodyPr rtlCol="0" anchor="ctr" wrap="square" lIns="82296" rIns="82296" tIns="36576" bIns="36576"/>
+            <a:bodyPr rtlCol="0" anchor="ctr"/>
             <a:lstStyle/>
             <a:p>
-              <a:pPr algn="ctr">
+              <a:pPr algn="ctr"/>
+            </a:p>
+          </p:txBody>
+        </p:sp>
+        <p:sp>
+          <p:nvSpPr>
+            <p:cNvPr id="15" name="Process 3 label" descr="pptx-deck-generated"/>
+            <p:cNvSpPr txBox="1"/>
+            <p:nvPr/>
+          </p:nvSpPr>
+          <p:spPr>
+            <a:xfrm>
+              <a:off x="109727" y="73152"/>
+              <a:ext cx="3355848" cy="396239"/>
+            </a:xfrm>
+            <a:prstGeom prst="rect">
+              <a:avLst/>
+            </a:prstGeom>
+            <a:noFill/>
+            <a:ln>
+              <a:noFill/>
+            </a:ln>
+          </p:spPr>
+          <p:txBody>
+            <a:bodyPr wrap="square" anchor="t" lIns="109728" rIns="109728" tIns="73152" bIns="73152">
+              <a:spAutoFit/>
+            </a:bodyPr>
+            <a:lstStyle/>
+            <a:p>
+              <a:pPr algn="l">
                 <a:lnSpc>
                   <a:spcPct val="100000"/>
                 </a:lnSpc>
@@ -9649,7 +9234,7 @@
                 </a:spcAft>
               </a:pPr>
               <a:r>
-                <a:rPr sz="1200" b="1">
+                <a:rPr sz="1400" b="1">
                   <a:solidFill>
                     <a:schemeClr val="dk1"/>
                   </a:solidFill>
@@ -9669,8 +9254,8 @@
           </p:nvSpPr>
           <p:spPr>
             <a:xfrm>
-              <a:off x="36575" y="1152145"/>
-              <a:ext cx="3502152" cy="2715767"/>
+              <a:off x="109727" y="505967"/>
+              <a:ext cx="3355848" cy="682752"/>
             </a:xfrm>
             <a:prstGeom prst="rect">
               <a:avLst/>
@@ -9681,12 +9266,12 @@
             </a:ln>
           </p:spPr>
           <p:txBody>
-            <a:bodyPr wrap="square" anchor="ctr" lIns="82296" rIns="82296" tIns="36576" bIns="36576">
+            <a:bodyPr wrap="square" anchor="t" lIns="109728" rIns="109728" tIns="73152" bIns="73152">
               <a:spAutoFit/>
             </a:bodyPr>
             <a:lstStyle/>
             <a:p>
-              <a:pPr algn="ctr">
+              <a:pPr algn="l">
                 <a:lnSpc>
                   <a:spcPct val="100000"/>
                 </a:lnSpc>
@@ -9695,22 +9280,126 @@
                 </a:spcAft>
               </a:pPr>
               <a:r>
-                <a:rPr sz="1000" b="0">
+                <a:rPr sz="1400" b="0">
                   <a:solidFill>
-                    <a:schemeClr val="dk1">
-                      <a:lumMod val="65000"/>
-                      <a:lumOff val="35000"/>
-                    </a:schemeClr>
+                    <a:schemeClr val="dk1"/>
                   </a:solidFill>
                   <a:latin typeface="Yu Gothic"/>
                   <a:ea typeface="Yu Gothic"/>
                 </a:rPr>
-                <a:t>• 旧DBで業務を再開</a:t>
+                <a:t>旧DBで業務を再開</a:t>
               </a:r>
             </a:p>
           </p:txBody>
         </p:sp>
       </p:grpSp>
+      <p:sp>
+        <p:nvSpPr>
+          <p:cNvPr id="17" name="Component takeaway" descr="pptx-deck-generated"/>
+          <p:cNvSpPr/>
+          <p:nvPr/>
+        </p:nvSpPr>
+        <p:spPr>
+          <a:xfrm>
+            <a:off x="457200" y="3044952"/>
+            <a:ext cx="11274552" cy="457200"/>
+          </a:xfrm>
+          <a:prstGeom prst="roundRect">
+            <a:avLst>
+              <a:gd name="adj" fmla="val 12000"/>
+            </a:avLst>
+          </a:prstGeom>
+          <a:solidFill>
+            <a:schemeClr val="lt2"/>
+          </a:solidFill>
+          <a:ln w="9525">
+            <a:solidFill>
+              <a:schemeClr val="lt1">
+                <a:lumMod val="85000"/>
+              </a:schemeClr>
+            </a:solidFill>
+          </a:ln>
+        </p:spPr>
+        <p:txBody>
+          <a:bodyPr rtlCol="0" anchor="ctr"/>
+          <a:lstStyle/>
+          <a:p>
+            <a:pPr algn="ctr"/>
+          </a:p>
+        </p:txBody>
+      </p:sp>
+      <p:sp>
+        <p:nvSpPr>
+          <p:cNvPr id="18" name="Takeaway accent" descr="pptx-deck-generated"/>
+          <p:cNvSpPr/>
+          <p:nvPr/>
+        </p:nvSpPr>
+        <p:spPr>
+          <a:xfrm>
+            <a:off x="457200" y="3044952"/>
+            <a:ext cx="82296" cy="457200"/>
+          </a:xfrm>
+          <a:prstGeom prst="rect">
+            <a:avLst/>
+          </a:prstGeom>
+          <a:solidFill>
+            <a:schemeClr val="accent1"/>
+          </a:solidFill>
+        </p:spPr>
+        <p:txBody>
+          <a:bodyPr rtlCol="0" anchor="ctr"/>
+          <a:lstStyle/>
+          <a:p>
+            <a:pPr algn="ctr"/>
+          </a:p>
+        </p:txBody>
+      </p:sp>
+      <p:sp>
+        <p:nvSpPr>
+          <p:cNvPr id="19" name="Takeaway text" descr="pptx-deck-generated"/>
+          <p:cNvSpPr txBox="1"/>
+          <p:nvPr/>
+        </p:nvSpPr>
+        <p:spPr>
+          <a:xfrm>
+            <a:off x="603504" y="3044952"/>
+            <a:ext cx="11073384" cy="457200"/>
+          </a:xfrm>
+          <a:prstGeom prst="rect">
+            <a:avLst/>
+          </a:prstGeom>
+          <a:noFill/>
+          <a:ln>
+            <a:noFill/>
+          </a:ln>
+        </p:spPr>
+        <p:txBody>
+          <a:bodyPr wrap="square" anchor="t" lIns="109728" rIns="109728" tIns="73152" bIns="73152">
+            <a:spAutoFit/>
+          </a:bodyPr>
+          <a:lstStyle/>
+          <a:p>
+            <a:pPr algn="l">
+              <a:lnSpc>
+                <a:spcPct val="100000"/>
+              </a:lnSpc>
+              <a:spcAft>
+                <a:spcPts val="0"/>
+              </a:spcAft>
+            </a:pPr>
+            <a:r>
+              <a:rPr sz="1400" b="1">
+                <a:solidFill>
+                  <a:schemeClr val="dk1"/>
+                </a:solidFill>
+                <a:latin typeface="Yu Gothic"/>
+                <a:ea typeface="Yu Gothic"/>
+              </a:rPr>
+              <a:t>旧サーバは1月末まで停止せず保全する</a:t>
+            </a:r>
+          </a:p>
+        </p:txBody>
+      </p:sp>
     </p:spTree>
   </p:cSld>
   <p:clrMapOvr>

--- a/skills/pptx-deck/examples/redmine-migration/redmine-migration.pptx
+++ b/skills/pptx-deck/examples/redmine-migration/redmine-migration.pptx
@@ -6490,20 +6490,6 @@
             </a:solidFill>
           </a:ln>
         </p:spPr>
-        <p:style>
-          <a:lnRef idx="1">
-            <a:schemeClr val="accent1"/>
-          </a:lnRef>
-          <a:fillRef idx="3">
-            <a:schemeClr val="accent1"/>
-          </a:fillRef>
-          <a:effectRef idx="2">
-            <a:schemeClr val="accent1"/>
-          </a:effectRef>
-          <a:fontRef idx="minor">
-            <a:schemeClr val="lt1"/>
-          </a:fontRef>
-        </p:style>
         <p:txBody>
           <a:bodyPr rtlCol="0" anchor="ctr" wrap="square" lIns="45720" rIns="45720"/>
           <a:lstStyle/>
@@ -6576,20 +6562,6 @@
             </a:solidFill>
           </a:ln>
         </p:spPr>
-        <p:style>
-          <a:lnRef idx="1">
-            <a:schemeClr val="accent1"/>
-          </a:lnRef>
-          <a:fillRef idx="3">
-            <a:schemeClr val="accent1"/>
-          </a:fillRef>
-          <a:effectRef idx="2">
-            <a:schemeClr val="accent1"/>
-          </a:effectRef>
-          <a:fontRef idx="minor">
-            <a:schemeClr val="lt1"/>
-          </a:fontRef>
-        </p:style>
         <p:txBody>
           <a:bodyPr rtlCol="0" anchor="ctr" wrap="square" lIns="45720" rIns="45720"/>
           <a:lstStyle/>
@@ -6662,20 +6634,6 @@
             </a:solidFill>
           </a:ln>
         </p:spPr>
-        <p:style>
-          <a:lnRef idx="1">
-            <a:schemeClr val="accent1"/>
-          </a:lnRef>
-          <a:fillRef idx="3">
-            <a:schemeClr val="accent1"/>
-          </a:fillRef>
-          <a:effectRef idx="2">
-            <a:schemeClr val="accent1"/>
-          </a:effectRef>
-          <a:fontRef idx="minor">
-            <a:schemeClr val="lt1"/>
-          </a:fontRef>
-        </p:style>
         <p:txBody>
           <a:bodyPr rtlCol="0" anchor="ctr" wrap="square" lIns="45720" rIns="45720"/>
           <a:lstStyle/>
@@ -6748,20 +6706,6 @@
             </a:solidFill>
           </a:ln>
         </p:spPr>
-        <p:style>
-          <a:lnRef idx="1">
-            <a:schemeClr val="accent1"/>
-          </a:lnRef>
-          <a:fillRef idx="3">
-            <a:schemeClr val="accent1"/>
-          </a:fillRef>
-          <a:effectRef idx="2">
-            <a:schemeClr val="accent1"/>
-          </a:effectRef>
-          <a:fontRef idx="minor">
-            <a:schemeClr val="lt1"/>
-          </a:fontRef>
-        </p:style>
         <p:txBody>
           <a:bodyPr rtlCol="0" anchor="ctr" wrap="square" lIns="45720" rIns="45720"/>
           <a:lstStyle/>
@@ -6920,7 +6864,9 @@
             <a:ext cx="2377440" cy="914400"/>
           </a:xfrm>
           <a:prstGeom prst="roundRect">
-            <a:avLst/>
+            <a:avLst>
+              <a:gd name="adj" fmla="val 6000"/>
+            </a:avLst>
           </a:prstGeom>
           <a:solidFill>
             <a:srgbClr val="FFFFFF"/>
@@ -6931,20 +6877,6 @@
             </a:solidFill>
           </a:ln>
         </p:spPr>
-        <p:style>
-          <a:lnRef idx="1">
-            <a:schemeClr val="accent1"/>
-          </a:lnRef>
-          <a:fillRef idx="3">
-            <a:schemeClr val="accent1"/>
-          </a:fillRef>
-          <a:effectRef idx="2">
-            <a:schemeClr val="accent1"/>
-          </a:effectRef>
-          <a:fontRef idx="minor">
-            <a:schemeClr val="lt1"/>
-          </a:fontRef>
-        </p:style>
         <p:txBody>
           <a:bodyPr rtlCol="0" anchor="ctr" wrap="square"/>
           <a:lstStyle/>
@@ -6998,20 +6930,6 @@
             </a:solidFill>
           </a:ln>
         </p:spPr>
-        <p:style>
-          <a:lnRef idx="2">
-            <a:schemeClr val="accent1"/>
-          </a:lnRef>
-          <a:fillRef idx="0">
-            <a:schemeClr val="accent1"/>
-          </a:fillRef>
-          <a:effectRef idx="1">
-            <a:schemeClr val="accent1"/>
-          </a:effectRef>
-          <a:fontRef idx="minor">
-            <a:schemeClr val="tx1"/>
-          </a:fontRef>
-        </p:style>
       </p:cxnSp>
       <p:sp>
         <p:nvSpPr>
@@ -7025,7 +6943,9 @@
             <a:ext cx="2377440" cy="914400"/>
           </a:xfrm>
           <a:prstGeom prst="roundRect">
-            <a:avLst/>
+            <a:avLst>
+              <a:gd name="adj" fmla="val 6000"/>
+            </a:avLst>
           </a:prstGeom>
           <a:solidFill>
             <a:srgbClr val="FFFFFF"/>
@@ -7036,20 +6956,6 @@
             </a:solidFill>
           </a:ln>
         </p:spPr>
-        <p:style>
-          <a:lnRef idx="1">
-            <a:schemeClr val="accent1"/>
-          </a:lnRef>
-          <a:fillRef idx="3">
-            <a:schemeClr val="accent1"/>
-          </a:fillRef>
-          <a:effectRef idx="2">
-            <a:schemeClr val="accent1"/>
-          </a:effectRef>
-          <a:fontRef idx="minor">
-            <a:schemeClr val="lt1"/>
-          </a:fontRef>
-        </p:style>
         <p:txBody>
           <a:bodyPr rtlCol="0" anchor="ctr" wrap="square"/>
           <a:lstStyle/>
@@ -7103,20 +7009,6 @@
             </a:solidFill>
           </a:ln>
         </p:spPr>
-        <p:style>
-          <a:lnRef idx="2">
-            <a:schemeClr val="accent1"/>
-          </a:lnRef>
-          <a:fillRef idx="0">
-            <a:schemeClr val="accent1"/>
-          </a:fillRef>
-          <a:effectRef idx="1">
-            <a:schemeClr val="accent1"/>
-          </a:effectRef>
-          <a:fontRef idx="minor">
-            <a:schemeClr val="tx1"/>
-          </a:fontRef>
-        </p:style>
       </p:cxnSp>
       <p:sp>
         <p:nvSpPr>
@@ -7130,7 +7022,9 @@
             <a:ext cx="2377440" cy="914400"/>
           </a:xfrm>
           <a:prstGeom prst="roundRect">
-            <a:avLst/>
+            <a:avLst>
+              <a:gd name="adj" fmla="val 6000"/>
+            </a:avLst>
           </a:prstGeom>
           <a:solidFill>
             <a:srgbClr val="FFFFFF"/>
@@ -7141,20 +7035,6 @@
             </a:solidFill>
           </a:ln>
         </p:spPr>
-        <p:style>
-          <a:lnRef idx="1">
-            <a:schemeClr val="accent1"/>
-          </a:lnRef>
-          <a:fillRef idx="3">
-            <a:schemeClr val="accent1"/>
-          </a:fillRef>
-          <a:effectRef idx="2">
-            <a:schemeClr val="accent1"/>
-          </a:effectRef>
-          <a:fontRef idx="minor">
-            <a:schemeClr val="lt1"/>
-          </a:fontRef>
-        </p:style>
         <p:txBody>
           <a:bodyPr rtlCol="0" anchor="ctr" wrap="square"/>
           <a:lstStyle/>
@@ -7208,20 +7088,6 @@
             </a:solidFill>
           </a:ln>
         </p:spPr>
-        <p:style>
-          <a:lnRef idx="2">
-            <a:schemeClr val="accent1"/>
-          </a:lnRef>
-          <a:fillRef idx="0">
-            <a:schemeClr val="accent1"/>
-          </a:fillRef>
-          <a:effectRef idx="1">
-            <a:schemeClr val="accent1"/>
-          </a:effectRef>
-          <a:fontRef idx="minor">
-            <a:schemeClr val="tx1"/>
-          </a:fontRef>
-        </p:style>
       </p:cxnSp>
       <p:sp>
         <p:nvSpPr>
@@ -7235,7 +7101,9 @@
             <a:ext cx="2377440" cy="914400"/>
           </a:xfrm>
           <a:prstGeom prst="roundRect">
-            <a:avLst/>
+            <a:avLst>
+              <a:gd name="adj" fmla="val 6000"/>
+            </a:avLst>
           </a:prstGeom>
           <a:solidFill>
             <a:srgbClr val="FFFFFF"/>
@@ -7246,20 +7114,6 @@
             </a:solidFill>
           </a:ln>
         </p:spPr>
-        <p:style>
-          <a:lnRef idx="1">
-            <a:schemeClr val="accent1"/>
-          </a:lnRef>
-          <a:fillRef idx="3">
-            <a:schemeClr val="accent1"/>
-          </a:fillRef>
-          <a:effectRef idx="2">
-            <a:schemeClr val="accent1"/>
-          </a:effectRef>
-          <a:fontRef idx="minor">
-            <a:schemeClr val="lt1"/>
-          </a:fontRef>
-        </p:style>
         <p:txBody>
           <a:bodyPr rtlCol="0" anchor="ctr" wrap="square"/>
           <a:lstStyle/>

--- a/skills/pptx-deck/examples/redmine-migration/redmine-migration.pptx
+++ b/skills/pptx-deck/examples/redmine-migration/redmine-migration.pptx
@@ -4668,10 +4668,10 @@
         </p:nvGrpSpPr>
         <p:grpSpPr>
           <a:xfrm>
-            <a:off x="457200" y="1554480"/>
-            <a:ext cx="3648456" cy="1146048"/>
+            <a:off x="457200" y="2795016"/>
+            <a:ext cx="3648456" cy="1450848"/>
             <a:chOff x="0" y="0"/>
-            <a:chExt cx="3648456" cy="1146048"/>
+            <a:chExt cx="3648456" cy="1450848"/>
           </a:xfrm>
         </p:grpSpPr>
         <p:sp>
@@ -4683,11 +4683,11 @@
           <p:spPr>
             <a:xfrm>
               <a:off x="0" y="0"/>
-              <a:ext cx="3648456" cy="1146048"/>
+              <a:ext cx="3648456" cy="1450848"/>
             </a:xfrm>
             <a:prstGeom prst="roundRect">
               <a:avLst>
-                <a:gd name="adj" fmla="val 4787"/>
+                <a:gd name="adj" fmla="val 3782"/>
               </a:avLst>
             </a:prstGeom>
             <a:solidFill>
@@ -4718,7 +4718,7 @@
           <p:spPr>
             <a:xfrm>
               <a:off x="109728" y="73152"/>
-              <a:ext cx="3429000" cy="457200"/>
+              <a:ext cx="3429000" cy="487680"/>
             </a:xfrm>
             <a:prstGeom prst="rect">
               <a:avLst/>
@@ -4743,7 +4743,7 @@
                 </a:spcAft>
               </a:pPr>
               <a:r>
-                <a:rPr sz="1800" b="1">
+                <a:rPr sz="2000" b="1">
                   <a:solidFill>
                     <a:schemeClr val="accent1"/>
                   </a:solidFill>
@@ -4763,8 +4763,8 @@
           </p:nvSpPr>
           <p:spPr>
             <a:xfrm>
-              <a:off x="109728" y="530352"/>
-              <a:ext cx="3429000" cy="432816"/>
+              <a:off x="109728" y="560832"/>
+              <a:ext cx="3429000" cy="463296"/>
             </a:xfrm>
             <a:prstGeom prst="rect">
               <a:avLst/>
@@ -4789,7 +4789,7 @@
                 </a:spcAft>
               </a:pPr>
               <a:r>
-                <a:rPr sz="1400" b="0">
+                <a:rPr sz="1600" b="0">
                   <a:solidFill>
                     <a:schemeClr val="dk1"/>
                   </a:solidFill>
@@ -4836,10 +4836,10 @@
         </p:nvGrpSpPr>
         <p:grpSpPr>
           <a:xfrm>
-            <a:off x="4270248" y="1554480"/>
-            <a:ext cx="3648456" cy="1146048"/>
+            <a:off x="4270248" y="2795016"/>
+            <a:ext cx="3648456" cy="1450848"/>
             <a:chOff x="0" y="0"/>
-            <a:chExt cx="3648456" cy="1146048"/>
+            <a:chExt cx="3648456" cy="1450848"/>
           </a:xfrm>
         </p:grpSpPr>
         <p:sp>
@@ -4851,11 +4851,11 @@
           <p:spPr>
             <a:xfrm>
               <a:off x="0" y="0"/>
-              <a:ext cx="3648456" cy="1146048"/>
+              <a:ext cx="3648456" cy="1450848"/>
             </a:xfrm>
             <a:prstGeom prst="roundRect">
               <a:avLst>
-                <a:gd name="adj" fmla="val 4787"/>
+                <a:gd name="adj" fmla="val 3782"/>
               </a:avLst>
             </a:prstGeom>
             <a:solidFill>
@@ -4886,7 +4886,7 @@
           <p:spPr>
             <a:xfrm>
               <a:off x="109728" y="73152"/>
-              <a:ext cx="3429000" cy="457200"/>
+              <a:ext cx="3429000" cy="487680"/>
             </a:xfrm>
             <a:prstGeom prst="rect">
               <a:avLst/>
@@ -4911,7 +4911,7 @@
                 </a:spcAft>
               </a:pPr>
               <a:r>
-                <a:rPr sz="1800" b="1">
+                <a:rPr sz="2000" b="1">
                   <a:solidFill>
                     <a:schemeClr val="accent1"/>
                   </a:solidFill>
@@ -4931,8 +4931,8 @@
           </p:nvSpPr>
           <p:spPr>
             <a:xfrm>
-              <a:off x="109728" y="530352"/>
-              <a:ext cx="3429000" cy="432816"/>
+              <a:off x="109728" y="560832"/>
+              <a:ext cx="3429000" cy="707136"/>
             </a:xfrm>
             <a:prstGeom prst="rect">
               <a:avLst/>
@@ -4957,7 +4957,7 @@
                 </a:spcAft>
               </a:pPr>
               <a:r>
-                <a:rPr sz="1400" b="0">
+                <a:rPr sz="1600" b="0">
                   <a:solidFill>
                     <a:schemeClr val="dk1"/>
                   </a:solidFill>
@@ -5004,10 +5004,10 @@
         </p:nvGrpSpPr>
         <p:grpSpPr>
           <a:xfrm>
-            <a:off x="8083296" y="1554480"/>
-            <a:ext cx="3648456" cy="1146048"/>
+            <a:off x="8083296" y="2795016"/>
+            <a:ext cx="3648456" cy="1450848"/>
             <a:chOff x="0" y="0"/>
-            <a:chExt cx="3648456" cy="1146048"/>
+            <a:chExt cx="3648456" cy="1450848"/>
           </a:xfrm>
         </p:grpSpPr>
         <p:sp>
@@ -5019,11 +5019,11 @@
           <p:spPr>
             <a:xfrm>
               <a:off x="0" y="0"/>
-              <a:ext cx="3648456" cy="1146048"/>
+              <a:ext cx="3648456" cy="1450848"/>
             </a:xfrm>
             <a:prstGeom prst="roundRect">
               <a:avLst>
-                <a:gd name="adj" fmla="val 4787"/>
+                <a:gd name="adj" fmla="val 3782"/>
               </a:avLst>
             </a:prstGeom>
             <a:solidFill>
@@ -5054,7 +5054,7 @@
           <p:spPr>
             <a:xfrm>
               <a:off x="109727" y="73152"/>
-              <a:ext cx="3429000" cy="457200"/>
+              <a:ext cx="3429000" cy="487680"/>
             </a:xfrm>
             <a:prstGeom prst="rect">
               <a:avLst/>
@@ -5079,7 +5079,7 @@
                 </a:spcAft>
               </a:pPr>
               <a:r>
-                <a:rPr sz="1800" b="1">
+                <a:rPr sz="2000" b="1">
                   <a:solidFill>
                     <a:schemeClr val="accent1"/>
                   </a:solidFill>
@@ -5099,8 +5099,8 @@
           </p:nvSpPr>
           <p:spPr>
             <a:xfrm>
-              <a:off x="109727" y="530352"/>
-              <a:ext cx="3429000" cy="432816"/>
+              <a:off x="109727" y="560832"/>
+              <a:ext cx="3429000" cy="463296"/>
             </a:xfrm>
             <a:prstGeom prst="rect">
               <a:avLst/>
@@ -5125,7 +5125,7 @@
                 </a:spcAft>
               </a:pPr>
               <a:r>
-                <a:rPr sz="1400" b="0">
+                <a:rPr sz="1600" b="0">
                   <a:solidFill>
                     <a:schemeClr val="dk1"/>
                   </a:solidFill>
@@ -5172,7 +5172,7 @@
         </p:nvSpPr>
         <p:spPr>
           <a:xfrm>
-            <a:off x="457200" y="2929128"/>
+            <a:off x="457200" y="4474464"/>
             <a:ext cx="11274552" cy="457200"/>
           </a:xfrm>
           <a:prstGeom prst="roundRect">
@@ -5207,7 +5207,7 @@
         </p:nvSpPr>
         <p:spPr>
           <a:xfrm>
-            <a:off x="457200" y="2929128"/>
+            <a:off x="457200" y="4474464"/>
             <a:ext cx="82296" cy="457200"/>
           </a:xfrm>
           <a:prstGeom prst="rect">
@@ -5233,7 +5233,7 @@
         </p:nvSpPr>
         <p:spPr>
           <a:xfrm>
-            <a:off x="603504" y="2929128"/>
+            <a:off x="603504" y="4474464"/>
             <a:ext cx="11073384" cy="457200"/>
           </a:xfrm>
           <a:prstGeom prst="rect">
@@ -5259,7 +5259,7 @@
               </a:spcAft>
             </a:pPr>
             <a:r>
-              <a:rPr sz="1400" b="1">
+              <a:rPr sz="1600" b="1">
                 <a:solidFill>
                   <a:schemeClr val="dk1"/>
                 </a:solidFill>
@@ -5323,10 +5323,10 @@
         </p:nvGrpSpPr>
         <p:grpSpPr>
           <a:xfrm>
-            <a:off x="457200" y="1554480"/>
-            <a:ext cx="5308092" cy="1952752"/>
+            <a:off x="457200" y="2826004"/>
+            <a:ext cx="5308092" cy="2074671"/>
             <a:chOff x="0" y="0"/>
-            <a:chExt cx="5308092" cy="1952752"/>
+            <a:chExt cx="5308092" cy="2074671"/>
           </a:xfrm>
         </p:grpSpPr>
         <p:sp>
@@ -5338,11 +5338,11 @@
           <p:spPr>
             <a:xfrm>
               <a:off x="0" y="0"/>
-              <a:ext cx="5308092" cy="1952752"/>
+              <a:ext cx="5308092" cy="2074671"/>
             </a:xfrm>
             <a:prstGeom prst="roundRect">
               <a:avLst>
-                <a:gd name="adj" fmla="val 2810"/>
+                <a:gd name="adj" fmla="val 2644"/>
               </a:avLst>
             </a:prstGeom>
             <a:solidFill>
@@ -5398,7 +5398,7 @@
                 </a:spcAft>
               </a:pPr>
               <a:r>
-                <a:rPr sz="1800" b="1">
+                <a:rPr sz="2000" b="1">
                   <a:solidFill>
                     <a:schemeClr val="lt1"/>
                   </a:solidFill>
@@ -5419,7 +5419,7 @@
           <p:spPr>
             <a:xfrm>
               <a:off x="155448" y="530352"/>
-              <a:ext cx="4997196" cy="1367535"/>
+              <a:ext cx="4997196" cy="1489455"/>
             </a:xfrm>
             <a:prstGeom prst="rect">
               <a:avLst/>
@@ -5445,7 +5445,7 @@
                 <a:buChar char="•"/>
               </a:pPr>
               <a:r>
-                <a:rPr sz="1400" b="0">
+                <a:rPr sz="1600" b="0">
                   <a:solidFill>
                     <a:schemeClr val="dk1"/>
                   </a:solidFill>
@@ -5466,7 +5466,7 @@
                 <a:buChar char="•"/>
               </a:pPr>
               <a:r>
-                <a:rPr sz="1400" b="0">
+                <a:rPr sz="1600" b="0">
                   <a:solidFill>
                     <a:schemeClr val="dk1"/>
                   </a:solidFill>
@@ -5487,7 +5487,7 @@
                 <a:buChar char="•"/>
               </a:pPr>
               <a:r>
-                <a:rPr sz="1400" b="0">
+                <a:rPr sz="1600" b="0">
                   <a:solidFill>
                     <a:schemeClr val="dk1"/>
                   </a:solidFill>
@@ -5508,7 +5508,7 @@
                 <a:buChar char="•"/>
               </a:pPr>
               <a:r>
-                <a:rPr sz="1400" b="0">
+                <a:rPr sz="1600" b="0">
                   <a:solidFill>
                     <a:schemeClr val="dk1"/>
                   </a:solidFill>
@@ -5529,10 +5529,10 @@
         </p:nvGrpSpPr>
         <p:grpSpPr>
           <a:xfrm>
-            <a:off x="6423659" y="1554480"/>
-            <a:ext cx="5308092" cy="1952752"/>
+            <a:off x="6423659" y="2826004"/>
+            <a:ext cx="5308092" cy="2074671"/>
             <a:chOff x="0" y="0"/>
-            <a:chExt cx="5308092" cy="1952752"/>
+            <a:chExt cx="5308092" cy="2074671"/>
           </a:xfrm>
         </p:grpSpPr>
         <p:sp>
@@ -5544,11 +5544,11 @@
           <p:spPr>
             <a:xfrm>
               <a:off x="0" y="0"/>
-              <a:ext cx="5308092" cy="1952752"/>
+              <a:ext cx="5308092" cy="2074671"/>
             </a:xfrm>
             <a:prstGeom prst="roundRect">
               <a:avLst>
-                <a:gd name="adj" fmla="val 2810"/>
+                <a:gd name="adj" fmla="val 2644"/>
               </a:avLst>
             </a:prstGeom>
             <a:solidFill>
@@ -5601,7 +5601,7 @@
                 </a:spcAft>
               </a:pPr>
               <a:r>
-                <a:rPr sz="1800" b="1">
+                <a:rPr sz="2000" b="1">
                   <a:solidFill>
                     <a:schemeClr val="lt1"/>
                   </a:solidFill>
@@ -5622,7 +5622,7 @@
           <p:spPr>
             <a:xfrm>
               <a:off x="155448" y="530352"/>
-              <a:ext cx="4997196" cy="1367535"/>
+              <a:ext cx="4997196" cy="1489455"/>
             </a:xfrm>
             <a:prstGeom prst="rect">
               <a:avLst/>
@@ -5648,7 +5648,7 @@
                 <a:buChar char="•"/>
               </a:pPr>
               <a:r>
-                <a:rPr sz="1400" b="0">
+                <a:rPr sz="1600" b="0">
                   <a:solidFill>
                     <a:schemeClr val="dk1"/>
                   </a:solidFill>
@@ -5669,7 +5669,7 @@
                 <a:buChar char="•"/>
               </a:pPr>
               <a:r>
-                <a:rPr sz="1400" b="0">
+                <a:rPr sz="1600" b="0">
                   <a:solidFill>
                     <a:schemeClr val="dk1"/>
                   </a:solidFill>
@@ -5690,7 +5690,7 @@
                 <a:buChar char="•"/>
               </a:pPr>
               <a:r>
-                <a:rPr sz="1400" b="0">
+                <a:rPr sz="1600" b="0">
                   <a:solidFill>
                     <a:schemeClr val="dk1"/>
                   </a:solidFill>
@@ -5711,7 +5711,7 @@
                 <a:buChar char="•"/>
               </a:pPr>
               <a:r>
-                <a:rPr sz="1400" b="0">
+                <a:rPr sz="1600" b="0">
                   <a:solidFill>
                     <a:schemeClr val="dk1"/>
                   </a:solidFill>
@@ -5732,7 +5732,7 @@
         </p:nvSpPr>
         <p:spPr>
           <a:xfrm>
-            <a:off x="5911596" y="2374635"/>
+            <a:off x="5911596" y="3697366"/>
             <a:ext cx="365760" cy="256032"/>
           </a:xfrm>
           <a:prstGeom prst="rightArrow">
@@ -6490,6 +6490,20 @@
             </a:solidFill>
           </a:ln>
         </p:spPr>
+        <p:style>
+          <a:lnRef idx="1">
+            <a:schemeClr val="accent1"/>
+          </a:lnRef>
+          <a:fillRef idx="3">
+            <a:schemeClr val="accent1"/>
+          </a:fillRef>
+          <a:effectRef idx="2">
+            <a:schemeClr val="accent1"/>
+          </a:effectRef>
+          <a:fontRef idx="minor">
+            <a:schemeClr val="lt1"/>
+          </a:fontRef>
+        </p:style>
         <p:txBody>
           <a:bodyPr rtlCol="0" anchor="ctr" wrap="square" lIns="45720" rIns="45720"/>
           <a:lstStyle/>
@@ -6562,6 +6576,20 @@
             </a:solidFill>
           </a:ln>
         </p:spPr>
+        <p:style>
+          <a:lnRef idx="1">
+            <a:schemeClr val="accent1"/>
+          </a:lnRef>
+          <a:fillRef idx="3">
+            <a:schemeClr val="accent1"/>
+          </a:fillRef>
+          <a:effectRef idx="2">
+            <a:schemeClr val="accent1"/>
+          </a:effectRef>
+          <a:fontRef idx="minor">
+            <a:schemeClr val="lt1"/>
+          </a:fontRef>
+        </p:style>
         <p:txBody>
           <a:bodyPr rtlCol="0" anchor="ctr" wrap="square" lIns="45720" rIns="45720"/>
           <a:lstStyle/>
@@ -6634,6 +6662,20 @@
             </a:solidFill>
           </a:ln>
         </p:spPr>
+        <p:style>
+          <a:lnRef idx="1">
+            <a:schemeClr val="accent1"/>
+          </a:lnRef>
+          <a:fillRef idx="3">
+            <a:schemeClr val="accent1"/>
+          </a:fillRef>
+          <a:effectRef idx="2">
+            <a:schemeClr val="accent1"/>
+          </a:effectRef>
+          <a:fontRef idx="minor">
+            <a:schemeClr val="lt1"/>
+          </a:fontRef>
+        </p:style>
         <p:txBody>
           <a:bodyPr rtlCol="0" anchor="ctr" wrap="square" lIns="45720" rIns="45720"/>
           <a:lstStyle/>
@@ -6706,6 +6748,20 @@
             </a:solidFill>
           </a:ln>
         </p:spPr>
+        <p:style>
+          <a:lnRef idx="1">
+            <a:schemeClr val="accent1"/>
+          </a:lnRef>
+          <a:fillRef idx="3">
+            <a:schemeClr val="accent1"/>
+          </a:fillRef>
+          <a:effectRef idx="2">
+            <a:schemeClr val="accent1"/>
+          </a:effectRef>
+          <a:fontRef idx="minor">
+            <a:schemeClr val="lt1"/>
+          </a:fontRef>
+        </p:style>
         <p:txBody>
           <a:bodyPr rtlCol="0" anchor="ctr" wrap="square" lIns="45720" rIns="45720"/>
           <a:lstStyle/>
@@ -6864,9 +6920,7 @@
             <a:ext cx="2377440" cy="914400"/>
           </a:xfrm>
           <a:prstGeom prst="roundRect">
-            <a:avLst>
-              <a:gd name="adj" fmla="val 6000"/>
-            </a:avLst>
+            <a:avLst/>
           </a:prstGeom>
           <a:solidFill>
             <a:srgbClr val="FFFFFF"/>
@@ -6877,6 +6931,20 @@
             </a:solidFill>
           </a:ln>
         </p:spPr>
+        <p:style>
+          <a:lnRef idx="1">
+            <a:schemeClr val="accent1"/>
+          </a:lnRef>
+          <a:fillRef idx="3">
+            <a:schemeClr val="accent1"/>
+          </a:fillRef>
+          <a:effectRef idx="2">
+            <a:schemeClr val="accent1"/>
+          </a:effectRef>
+          <a:fontRef idx="minor">
+            <a:schemeClr val="lt1"/>
+          </a:fontRef>
+        </p:style>
         <p:txBody>
           <a:bodyPr rtlCol="0" anchor="ctr" wrap="square"/>
           <a:lstStyle/>
@@ -6930,6 +6998,20 @@
             </a:solidFill>
           </a:ln>
         </p:spPr>
+        <p:style>
+          <a:lnRef idx="2">
+            <a:schemeClr val="accent1"/>
+          </a:lnRef>
+          <a:fillRef idx="0">
+            <a:schemeClr val="accent1"/>
+          </a:fillRef>
+          <a:effectRef idx="1">
+            <a:schemeClr val="accent1"/>
+          </a:effectRef>
+          <a:fontRef idx="minor">
+            <a:schemeClr val="tx1"/>
+          </a:fontRef>
+        </p:style>
       </p:cxnSp>
       <p:sp>
         <p:nvSpPr>
@@ -6943,9 +7025,7 @@
             <a:ext cx="2377440" cy="914400"/>
           </a:xfrm>
           <a:prstGeom prst="roundRect">
-            <a:avLst>
-              <a:gd name="adj" fmla="val 6000"/>
-            </a:avLst>
+            <a:avLst/>
           </a:prstGeom>
           <a:solidFill>
             <a:srgbClr val="FFFFFF"/>
@@ -6956,6 +7036,20 @@
             </a:solidFill>
           </a:ln>
         </p:spPr>
+        <p:style>
+          <a:lnRef idx="1">
+            <a:schemeClr val="accent1"/>
+          </a:lnRef>
+          <a:fillRef idx="3">
+            <a:schemeClr val="accent1"/>
+          </a:fillRef>
+          <a:effectRef idx="2">
+            <a:schemeClr val="accent1"/>
+          </a:effectRef>
+          <a:fontRef idx="minor">
+            <a:schemeClr val="lt1"/>
+          </a:fontRef>
+        </p:style>
         <p:txBody>
           <a:bodyPr rtlCol="0" anchor="ctr" wrap="square"/>
           <a:lstStyle/>
@@ -7009,6 +7103,20 @@
             </a:solidFill>
           </a:ln>
         </p:spPr>
+        <p:style>
+          <a:lnRef idx="2">
+            <a:schemeClr val="accent1"/>
+          </a:lnRef>
+          <a:fillRef idx="0">
+            <a:schemeClr val="accent1"/>
+          </a:fillRef>
+          <a:effectRef idx="1">
+            <a:schemeClr val="accent1"/>
+          </a:effectRef>
+          <a:fontRef idx="minor">
+            <a:schemeClr val="tx1"/>
+          </a:fontRef>
+        </p:style>
       </p:cxnSp>
       <p:sp>
         <p:nvSpPr>
@@ -7022,9 +7130,7 @@
             <a:ext cx="2377440" cy="914400"/>
           </a:xfrm>
           <a:prstGeom prst="roundRect">
-            <a:avLst>
-              <a:gd name="adj" fmla="val 6000"/>
-            </a:avLst>
+            <a:avLst/>
           </a:prstGeom>
           <a:solidFill>
             <a:srgbClr val="FFFFFF"/>
@@ -7035,6 +7141,20 @@
             </a:solidFill>
           </a:ln>
         </p:spPr>
+        <p:style>
+          <a:lnRef idx="1">
+            <a:schemeClr val="accent1"/>
+          </a:lnRef>
+          <a:fillRef idx="3">
+            <a:schemeClr val="accent1"/>
+          </a:fillRef>
+          <a:effectRef idx="2">
+            <a:schemeClr val="accent1"/>
+          </a:effectRef>
+          <a:fontRef idx="minor">
+            <a:schemeClr val="lt1"/>
+          </a:fontRef>
+        </p:style>
         <p:txBody>
           <a:bodyPr rtlCol="0" anchor="ctr" wrap="square"/>
           <a:lstStyle/>
@@ -7088,6 +7208,20 @@
             </a:solidFill>
           </a:ln>
         </p:spPr>
+        <p:style>
+          <a:lnRef idx="2">
+            <a:schemeClr val="accent1"/>
+          </a:lnRef>
+          <a:fillRef idx="0">
+            <a:schemeClr val="accent1"/>
+          </a:fillRef>
+          <a:effectRef idx="1">
+            <a:schemeClr val="accent1"/>
+          </a:effectRef>
+          <a:fontRef idx="minor">
+            <a:schemeClr val="tx1"/>
+          </a:fontRef>
+        </p:style>
       </p:cxnSp>
       <p:sp>
         <p:nvSpPr>
@@ -7101,9 +7235,7 @@
             <a:ext cx="2377440" cy="914400"/>
           </a:xfrm>
           <a:prstGeom prst="roundRect">
-            <a:avLst>
-              <a:gd name="adj" fmla="val 6000"/>
-            </a:avLst>
+            <a:avLst/>
           </a:prstGeom>
           <a:solidFill>
             <a:srgbClr val="FFFFFF"/>
@@ -7114,6 +7246,20 @@
             </a:solidFill>
           </a:ln>
         </p:spPr>
+        <p:style>
+          <a:lnRef idx="1">
+            <a:schemeClr val="accent1"/>
+          </a:lnRef>
+          <a:fillRef idx="3">
+            <a:schemeClr val="accent1"/>
+          </a:fillRef>
+          <a:effectRef idx="2">
+            <a:schemeClr val="accent1"/>
+          </a:effectRef>
+          <a:fontRef idx="minor">
+            <a:schemeClr val="lt1"/>
+          </a:fontRef>
+        </p:style>
         <p:txBody>
           <a:bodyPr rtlCol="0" anchor="ctr" wrap="square"/>
           <a:lstStyle/>
@@ -7199,7 +7345,7 @@
         </p:nvSpPr>
         <p:spPr>
           <a:xfrm>
-            <a:off x="2468880" y="1554480"/>
+            <a:off x="2468880" y="1815084"/>
             <a:ext cx="2315718" cy="438912"/>
           </a:xfrm>
           <a:prstGeom prst="rect">
@@ -7222,7 +7368,7 @@
               </a:spcAft>
             </a:pPr>
             <a:r>
-              <a:rPr sz="1200" b="1">
+              <a:rPr sz="1300" b="1">
                 <a:solidFill>
                   <a:schemeClr val="lt1"/>
                 </a:solidFill>
@@ -7242,7 +7388,7 @@
         </p:nvSpPr>
         <p:spPr>
           <a:xfrm>
-            <a:off x="4784598" y="1554480"/>
+            <a:off x="4784598" y="1815084"/>
             <a:ext cx="2315718" cy="438912"/>
           </a:xfrm>
           <a:prstGeom prst="rect">
@@ -7265,7 +7411,7 @@
               </a:spcAft>
             </a:pPr>
             <a:r>
-              <a:rPr sz="1200" b="1">
+              <a:rPr sz="1300" b="1">
                 <a:solidFill>
                   <a:schemeClr val="lt1"/>
                 </a:solidFill>
@@ -7285,7 +7431,7 @@
         </p:nvSpPr>
         <p:spPr>
           <a:xfrm>
-            <a:off x="7100316" y="1554480"/>
+            <a:off x="7100316" y="1815084"/>
             <a:ext cx="2315718" cy="438912"/>
           </a:xfrm>
           <a:prstGeom prst="rect">
@@ -7308,7 +7454,7 @@
               </a:spcAft>
             </a:pPr>
             <a:r>
-              <a:rPr sz="1200" b="1">
+              <a:rPr sz="1300" b="1">
                 <a:solidFill>
                   <a:schemeClr val="lt1"/>
                 </a:solidFill>
@@ -7328,7 +7474,7 @@
         </p:nvSpPr>
         <p:spPr>
           <a:xfrm>
-            <a:off x="9416034" y="1554480"/>
+            <a:off x="9416034" y="1815084"/>
             <a:ext cx="2315718" cy="438912"/>
           </a:xfrm>
           <a:prstGeom prst="rect">
@@ -7351,7 +7497,7 @@
               </a:spcAft>
             </a:pPr>
             <a:r>
-              <a:rPr sz="1200" b="1">
+              <a:rPr sz="1300" b="1">
                 <a:solidFill>
                   <a:schemeClr val="lt1"/>
                 </a:solidFill>
@@ -7371,8 +7517,8 @@
         </p:nvSpPr>
         <p:spPr>
           <a:xfrm>
-            <a:off x="457200" y="2596896"/>
-            <a:ext cx="11274552" cy="603504"/>
+            <a:off x="457200" y="2985515"/>
+            <a:ext cx="11274552" cy="731520"/>
           </a:xfrm>
           <a:prstGeom prst="rect">
             <a:avLst/>
@@ -7397,8 +7543,8 @@
         </p:nvSpPr>
         <p:spPr>
           <a:xfrm>
-            <a:off x="457200" y="3803904"/>
-            <a:ext cx="11274552" cy="603504"/>
+            <a:off x="457200" y="4448556"/>
+            <a:ext cx="11274552" cy="731520"/>
           </a:xfrm>
           <a:prstGeom prst="rect">
             <a:avLst/>
@@ -7423,8 +7569,8 @@
         </p:nvCxnSpPr>
         <p:spPr>
           <a:xfrm>
-            <a:off x="2468880" y="1993391"/>
-            <a:ext cx="0" cy="3017521"/>
+            <a:off x="2468880" y="2253995"/>
+            <a:ext cx="0" cy="3657601"/>
           </a:xfrm>
           <a:prstGeom prst="line">
             <a:avLst/>
@@ -7446,8 +7592,8 @@
         </p:nvCxnSpPr>
         <p:spPr>
           <a:xfrm>
-            <a:off x="4784598" y="1993391"/>
-            <a:ext cx="0" cy="3017521"/>
+            <a:off x="4784598" y="2253995"/>
+            <a:ext cx="0" cy="3657601"/>
           </a:xfrm>
           <a:prstGeom prst="line">
             <a:avLst/>
@@ -7469,8 +7615,8 @@
         </p:nvCxnSpPr>
         <p:spPr>
           <a:xfrm>
-            <a:off x="7100316" y="1993391"/>
-            <a:ext cx="0" cy="3017521"/>
+            <a:off x="7100316" y="2253995"/>
+            <a:ext cx="0" cy="3657601"/>
           </a:xfrm>
           <a:prstGeom prst="line">
             <a:avLst/>
@@ -7492,8 +7638,8 @@
         </p:nvCxnSpPr>
         <p:spPr>
           <a:xfrm>
-            <a:off x="9416034" y="1993391"/>
-            <a:ext cx="0" cy="3017521"/>
+            <a:off x="9416034" y="2253995"/>
+            <a:ext cx="0" cy="3657601"/>
           </a:xfrm>
           <a:prstGeom prst="line">
             <a:avLst/>
@@ -7515,8 +7661,8 @@
         </p:nvCxnSpPr>
         <p:spPr>
           <a:xfrm>
-            <a:off x="11731751" y="1993391"/>
-            <a:ext cx="0" cy="3017521"/>
+            <a:off x="11731751" y="2253995"/>
+            <a:ext cx="0" cy="3657601"/>
           </a:xfrm>
           <a:prstGeom prst="line">
             <a:avLst/>
@@ -7538,8 +7684,8 @@
         </p:nvSpPr>
         <p:spPr>
           <a:xfrm>
-            <a:off x="493776" y="2020823"/>
-            <a:ext cx="1920240" cy="548640"/>
+            <a:off x="493776" y="2281427"/>
+            <a:ext cx="1920240" cy="676656"/>
           </a:xfrm>
           <a:prstGeom prst="rect">
             <a:avLst/>
@@ -7550,7 +7696,7 @@
           </a:ln>
         </p:spPr>
         <p:txBody>
-          <a:bodyPr wrap="square" anchor="t" lIns="109728" rIns="109728" tIns="73152" bIns="73152">
+          <a:bodyPr wrap="square" anchor="ctr" lIns="109728" rIns="109728" tIns="73152" bIns="73152">
             <a:spAutoFit/>
           </a:bodyPr>
           <a:lstStyle/>
@@ -7564,7 +7710,7 @@
               </a:spcAft>
             </a:pPr>
             <a:r>
-              <a:rPr sz="1400" b="1">
+              <a:rPr sz="1600" b="1">
                 <a:solidFill>
                   <a:schemeClr val="dk1"/>
                 </a:solidFill>
@@ -7584,7 +7730,7 @@
         </p:nvGrpSpPr>
         <p:grpSpPr>
           <a:xfrm>
-            <a:off x="2505456" y="2103120"/>
+            <a:off x="2505456" y="2427731"/>
             <a:ext cx="2242565" cy="384048"/>
             <a:chOff x="0" y="0"/>
             <a:chExt cx="2242565" cy="384048"/>
@@ -7623,7 +7769,7 @@
                 </a:spcAft>
               </a:pPr>
               <a:r>
-                <a:rPr sz="1200" b="1">
+                <a:rPr sz="1300" b="1">
                   <a:solidFill>
                     <a:schemeClr val="lt1"/>
                   </a:solidFill>
@@ -7644,8 +7790,8 @@
         </p:nvSpPr>
         <p:spPr>
           <a:xfrm>
-            <a:off x="493776" y="2624327"/>
-            <a:ext cx="1920240" cy="548640"/>
+            <a:off x="493776" y="3012947"/>
+            <a:ext cx="1920240" cy="676656"/>
           </a:xfrm>
           <a:prstGeom prst="rect">
             <a:avLst/>
@@ -7656,7 +7802,7 @@
           </a:ln>
         </p:spPr>
         <p:txBody>
-          <a:bodyPr wrap="square" anchor="t" lIns="109728" rIns="109728" tIns="73152" bIns="73152">
+          <a:bodyPr wrap="square" anchor="ctr" lIns="109728" rIns="109728" tIns="73152" bIns="73152">
             <a:spAutoFit/>
           </a:bodyPr>
           <a:lstStyle/>
@@ -7670,7 +7816,7 @@
               </a:spcAft>
             </a:pPr>
             <a:r>
-              <a:rPr sz="1400" b="1">
+              <a:rPr sz="1600" b="1">
                 <a:solidFill>
                   <a:schemeClr val="dk1"/>
                 </a:solidFill>
@@ -7690,7 +7836,7 @@
         </p:nvGrpSpPr>
         <p:grpSpPr>
           <a:xfrm>
-            <a:off x="2505456" y="2706624"/>
+            <a:off x="2505456" y="3159251"/>
             <a:ext cx="4558283" cy="384048"/>
             <a:chOff x="0" y="0"/>
             <a:chExt cx="4558283" cy="384048"/>
@@ -7729,7 +7875,7 @@
                 </a:spcAft>
               </a:pPr>
               <a:r>
-                <a:rPr sz="1200" b="1">
+                <a:rPr sz="1300" b="1">
                   <a:solidFill>
                     <a:schemeClr val="lt1"/>
                   </a:solidFill>
@@ -7750,8 +7896,8 @@
         </p:nvSpPr>
         <p:spPr>
           <a:xfrm>
-            <a:off x="493776" y="3227832"/>
-            <a:ext cx="1920240" cy="548640"/>
+            <a:off x="493776" y="3744467"/>
+            <a:ext cx="1920240" cy="676656"/>
           </a:xfrm>
           <a:prstGeom prst="rect">
             <a:avLst/>
@@ -7762,7 +7908,7 @@
           </a:ln>
         </p:spPr>
         <p:txBody>
-          <a:bodyPr wrap="square" anchor="t" lIns="109728" rIns="109728" tIns="73152" bIns="73152">
+          <a:bodyPr wrap="square" anchor="ctr" lIns="109728" rIns="109728" tIns="73152" bIns="73152">
             <a:spAutoFit/>
           </a:bodyPr>
           <a:lstStyle/>
@@ -7776,7 +7922,7 @@
               </a:spcAft>
             </a:pPr>
             <a:r>
-              <a:rPr sz="1400" b="1">
+              <a:rPr sz="1600" b="1">
                 <a:solidFill>
                   <a:schemeClr val="dk1"/>
                 </a:solidFill>
@@ -7796,7 +7942,7 @@
         </p:nvGrpSpPr>
         <p:grpSpPr>
           <a:xfrm>
-            <a:off x="4821174" y="3310128"/>
+            <a:off x="4821174" y="3890772"/>
             <a:ext cx="2242565" cy="384048"/>
             <a:chOff x="0" y="0"/>
             <a:chExt cx="2242565" cy="384048"/>
@@ -7835,7 +7981,7 @@
                 </a:spcAft>
               </a:pPr>
               <a:r>
-                <a:rPr sz="1200" b="1">
+                <a:rPr sz="1300" b="1">
                   <a:solidFill>
                     <a:schemeClr val="lt1"/>
                   </a:solidFill>
@@ -7856,8 +8002,8 @@
         </p:nvSpPr>
         <p:spPr>
           <a:xfrm>
-            <a:off x="493776" y="3831336"/>
-            <a:ext cx="1920240" cy="548640"/>
+            <a:off x="493776" y="4475988"/>
+            <a:ext cx="1920240" cy="676656"/>
           </a:xfrm>
           <a:prstGeom prst="rect">
             <a:avLst/>
@@ -7868,7 +8014,7 @@
           </a:ln>
         </p:spPr>
         <p:txBody>
-          <a:bodyPr wrap="square" anchor="t" lIns="109728" rIns="109728" tIns="73152" bIns="73152">
+          <a:bodyPr wrap="square" anchor="ctr" lIns="109728" rIns="109728" tIns="73152" bIns="73152">
             <a:spAutoFit/>
           </a:bodyPr>
           <a:lstStyle/>
@@ -7882,7 +8028,7 @@
               </a:spcAft>
             </a:pPr>
             <a:r>
-              <a:rPr sz="1400" b="1">
+              <a:rPr sz="1600" b="1">
                 <a:solidFill>
                   <a:schemeClr val="dk1"/>
                 </a:solidFill>
@@ -7902,7 +8048,7 @@
         </p:nvGrpSpPr>
         <p:grpSpPr>
           <a:xfrm>
-            <a:off x="7136892" y="3913632"/>
+            <a:off x="7136892" y="4622292"/>
             <a:ext cx="2242565" cy="384048"/>
             <a:chOff x="0" y="0"/>
             <a:chExt cx="2242565" cy="384048"/>
@@ -7941,7 +8087,7 @@
                 </a:spcAft>
               </a:pPr>
               <a:r>
-                <a:rPr sz="1200" b="1">
+                <a:rPr sz="1300" b="1">
                   <a:solidFill>
                     <a:schemeClr val="lt1"/>
                   </a:solidFill>
@@ -7962,8 +8108,8 @@
         </p:nvSpPr>
         <p:spPr>
           <a:xfrm>
-            <a:off x="493776" y="4434840"/>
-            <a:ext cx="1920240" cy="548640"/>
+            <a:off x="493776" y="5207508"/>
+            <a:ext cx="1920240" cy="676656"/>
           </a:xfrm>
           <a:prstGeom prst="rect">
             <a:avLst/>
@@ -7974,7 +8120,7 @@
           </a:ln>
         </p:spPr>
         <p:txBody>
-          <a:bodyPr wrap="square" anchor="t" lIns="109728" rIns="109728" tIns="73152" bIns="73152">
+          <a:bodyPr wrap="square" anchor="ctr" lIns="109728" rIns="109728" tIns="73152" bIns="73152">
             <a:spAutoFit/>
           </a:bodyPr>
           <a:lstStyle/>
@@ -7988,7 +8134,7 @@
               </a:spcAft>
             </a:pPr>
             <a:r>
-              <a:rPr sz="1300" b="1">
+              <a:rPr sz="1600" b="1">
                 <a:solidFill>
                   <a:schemeClr val="dk1"/>
                 </a:solidFill>
@@ -8008,7 +8154,7 @@
         </p:nvGrpSpPr>
         <p:grpSpPr>
           <a:xfrm>
-            <a:off x="7136892" y="4517136"/>
+            <a:off x="7136892" y="5353812"/>
             <a:ext cx="4558283" cy="384048"/>
             <a:chOff x="0" y="0"/>
             <a:chExt cx="4558283" cy="384048"/>
@@ -8047,7 +8193,7 @@
                 </a:spcAft>
               </a:pPr>
               <a:r>
-                <a:rPr sz="1200" b="1">
+                <a:rPr sz="1300" b="1">
                   <a:solidFill>
                     <a:schemeClr val="lt1"/>
                   </a:solidFill>
@@ -8683,10 +8829,10 @@
         </p:nvGrpSpPr>
         <p:grpSpPr>
           <a:xfrm>
-            <a:off x="457200" y="1554480"/>
-            <a:ext cx="3575304" cy="1261872"/>
+            <a:off x="457200" y="2843784"/>
+            <a:ext cx="3575304" cy="1353312"/>
             <a:chOff x="0" y="0"/>
-            <a:chExt cx="3575304" cy="1261872"/>
+            <a:chExt cx="3575304" cy="1353312"/>
           </a:xfrm>
         </p:grpSpPr>
         <p:sp>
@@ -8698,11 +8844,11 @@
           <p:spPr>
             <a:xfrm>
               <a:off x="0" y="0"/>
-              <a:ext cx="3575304" cy="1261872"/>
+              <a:ext cx="3575304" cy="1353312"/>
             </a:xfrm>
             <a:prstGeom prst="roundRect">
               <a:avLst>
-                <a:gd name="adj" fmla="val 4348"/>
+                <a:gd name="adj" fmla="val 4054"/>
               </a:avLst>
             </a:prstGeom>
             <a:solidFill>
@@ -8731,7 +8877,7 @@
           <p:spPr>
             <a:xfrm>
               <a:off x="109728" y="73152"/>
-              <a:ext cx="3355848" cy="396239"/>
+              <a:ext cx="3355848" cy="426720"/>
             </a:xfrm>
             <a:prstGeom prst="rect">
               <a:avLst/>
@@ -8756,7 +8902,7 @@
                 </a:spcAft>
               </a:pPr>
               <a:r>
-                <a:rPr sz="1400" b="1">
+                <a:rPr sz="1600" b="1">
                   <a:solidFill>
                     <a:schemeClr val="dk1"/>
                   </a:solidFill>
@@ -8776,8 +8922,8 @@
           </p:nvSpPr>
           <p:spPr>
             <a:xfrm>
-              <a:off x="109728" y="505967"/>
-              <a:ext cx="3355848" cy="682752"/>
+              <a:off x="109728" y="536448"/>
+              <a:ext cx="3355848" cy="743712"/>
             </a:xfrm>
             <a:prstGeom prst="rect">
               <a:avLst/>
@@ -8802,7 +8948,7 @@
                 </a:spcAft>
               </a:pPr>
               <a:r>
-                <a:rPr sz="1400" b="0">
+                <a:rPr sz="1600" b="0">
                   <a:solidFill>
                     <a:schemeClr val="dk1"/>
                   </a:solidFill>
@@ -8823,7 +8969,7 @@
         </p:nvSpPr>
         <p:spPr>
           <a:xfrm rot="5400000">
-            <a:off x="4069080" y="2075688"/>
+            <a:off x="4069080" y="3410712"/>
             <a:ext cx="219456" cy="219456"/>
           </a:xfrm>
           <a:prstGeom prst="triangle">
@@ -8849,10 +8995,10 @@
         </p:nvGrpSpPr>
         <p:grpSpPr>
           <a:xfrm>
-            <a:off x="4306824" y="1554480"/>
-            <a:ext cx="3575304" cy="1261872"/>
+            <a:off x="4306824" y="2843784"/>
+            <a:ext cx="3575304" cy="1353312"/>
             <a:chOff x="0" y="0"/>
-            <a:chExt cx="3575304" cy="1261872"/>
+            <a:chExt cx="3575304" cy="1353312"/>
           </a:xfrm>
         </p:grpSpPr>
         <p:sp>
@@ -8864,11 +9010,11 @@
           <p:spPr>
             <a:xfrm>
               <a:off x="0" y="0"/>
-              <a:ext cx="3575304" cy="1261872"/>
+              <a:ext cx="3575304" cy="1353312"/>
             </a:xfrm>
             <a:prstGeom prst="roundRect">
               <a:avLst>
-                <a:gd name="adj" fmla="val 4348"/>
+                <a:gd name="adj" fmla="val 4054"/>
               </a:avLst>
             </a:prstGeom>
             <a:solidFill>
@@ -8897,7 +9043,7 @@
           <p:spPr>
             <a:xfrm>
               <a:off x="109728" y="73152"/>
-              <a:ext cx="3355848" cy="396239"/>
+              <a:ext cx="3355848" cy="426720"/>
             </a:xfrm>
             <a:prstGeom prst="rect">
               <a:avLst/>
@@ -8922,7 +9068,7 @@
                 </a:spcAft>
               </a:pPr>
               <a:r>
-                <a:rPr sz="1400" b="1">
+                <a:rPr sz="1600" b="1">
                   <a:solidFill>
                     <a:schemeClr val="dk1"/>
                   </a:solidFill>
@@ -8942,8 +9088,8 @@
           </p:nvSpPr>
           <p:spPr>
             <a:xfrm>
-              <a:off x="109728" y="505967"/>
-              <a:ext cx="3355848" cy="682752"/>
+              <a:off x="109728" y="536448"/>
+              <a:ext cx="3355848" cy="743712"/>
             </a:xfrm>
             <a:prstGeom prst="rect">
               <a:avLst/>
@@ -8968,7 +9114,7 @@
                 </a:spcAft>
               </a:pPr>
               <a:r>
-                <a:rPr sz="1400" b="0">
+                <a:rPr sz="1600" b="0">
                   <a:solidFill>
                     <a:schemeClr val="dk1"/>
                   </a:solidFill>
@@ -8989,7 +9135,7 @@
         </p:nvSpPr>
         <p:spPr>
           <a:xfrm rot="5400000">
-            <a:off x="7918704" y="2075688"/>
+            <a:off x="7918704" y="3410712"/>
             <a:ext cx="219456" cy="219456"/>
           </a:xfrm>
           <a:prstGeom prst="triangle">
@@ -9015,10 +9161,10 @@
         </p:nvGrpSpPr>
         <p:grpSpPr>
           <a:xfrm>
-            <a:off x="8156448" y="1554480"/>
-            <a:ext cx="3575304" cy="1261872"/>
+            <a:off x="8156448" y="2843784"/>
+            <a:ext cx="3575304" cy="1353312"/>
             <a:chOff x="0" y="0"/>
-            <a:chExt cx="3575304" cy="1261872"/>
+            <a:chExt cx="3575304" cy="1353312"/>
           </a:xfrm>
         </p:grpSpPr>
         <p:sp>
@@ -9030,11 +9176,11 @@
           <p:spPr>
             <a:xfrm>
               <a:off x="0" y="0"/>
-              <a:ext cx="3575304" cy="1261872"/>
+              <a:ext cx="3575304" cy="1353312"/>
             </a:xfrm>
             <a:prstGeom prst="roundRect">
               <a:avLst>
-                <a:gd name="adj" fmla="val 4348"/>
+                <a:gd name="adj" fmla="val 4054"/>
               </a:avLst>
             </a:prstGeom>
             <a:solidFill>
@@ -9063,7 +9209,7 @@
           <p:spPr>
             <a:xfrm>
               <a:off x="109727" y="73152"/>
-              <a:ext cx="3355848" cy="396239"/>
+              <a:ext cx="3355848" cy="426720"/>
             </a:xfrm>
             <a:prstGeom prst="rect">
               <a:avLst/>
@@ -9088,7 +9234,7 @@
                 </a:spcAft>
               </a:pPr>
               <a:r>
-                <a:rPr sz="1400" b="1">
+                <a:rPr sz="1600" b="1">
                   <a:solidFill>
                     <a:schemeClr val="dk1"/>
                   </a:solidFill>
@@ -9108,8 +9254,8 @@
           </p:nvSpPr>
           <p:spPr>
             <a:xfrm>
-              <a:off x="109727" y="505967"/>
-              <a:ext cx="3355848" cy="682752"/>
+              <a:off x="109727" y="536448"/>
+              <a:ext cx="3355848" cy="743712"/>
             </a:xfrm>
             <a:prstGeom prst="rect">
               <a:avLst/>
@@ -9134,7 +9280,7 @@
                 </a:spcAft>
               </a:pPr>
               <a:r>
-                <a:rPr sz="1400" b="0">
+                <a:rPr sz="1600" b="0">
                   <a:solidFill>
                     <a:schemeClr val="dk1"/>
                   </a:solidFill>
@@ -9155,7 +9301,7 @@
         </p:nvSpPr>
         <p:spPr>
           <a:xfrm>
-            <a:off x="457200" y="3044952"/>
+            <a:off x="457200" y="4425696"/>
             <a:ext cx="11274552" cy="457200"/>
           </a:xfrm>
           <a:prstGeom prst="roundRect">
@@ -9190,7 +9336,7 @@
         </p:nvSpPr>
         <p:spPr>
           <a:xfrm>
-            <a:off x="457200" y="3044952"/>
+            <a:off x="457200" y="4425696"/>
             <a:ext cx="82296" cy="457200"/>
           </a:xfrm>
           <a:prstGeom prst="rect">
@@ -9216,7 +9362,7 @@
         </p:nvSpPr>
         <p:spPr>
           <a:xfrm>
-            <a:off x="603504" y="3044952"/>
+            <a:off x="603504" y="4425696"/>
             <a:ext cx="11073384" cy="457200"/>
           </a:xfrm>
           <a:prstGeom prst="rect">
@@ -9242,7 +9388,7 @@
               </a:spcAft>
             </a:pPr>
             <a:r>
-              <a:rPr sz="1400" b="1">
+              <a:rPr sz="1600" b="1">
                 <a:solidFill>
                   <a:schemeClr val="dk1"/>
                 </a:solidFill>
